--- a/a7/packages/A7 Unit 5 - Multi-Step Proportional Relationships/Lessons/5.06/A7 5.06 Converting Length Across Systems; Currency - Slides.pptx
+++ b/a7/packages/A7 Unit 5 - Multi-Step Proportional Relationships/Lessons/5.06/A7 5.06 Converting Length Across Systems; Currency - Slides.pptx
@@ -3730,7 +3730,7 @@
                 </a:solidFill>
                 <a:latin typeface="Lexend"/>
               </a:rPr>
-              <a:t>How many centimetres is that?</a:t>
+              <a:t>How many centimeters is that?</a:t>
             </a:r>
           </a:p>
         </p:txBody>
@@ -4028,7 +4028,7 @@
                 </a:solidFill>
                 <a:latin typeface="Lexend"/>
               </a:rPr>
-              <a:t>How many centimetres is that?</a:t>
+              <a:t>How many centimeters is that?</a:t>
             </a:r>
           </a:p>
         </p:txBody>
@@ -5673,7 +5673,7 @@
                 </a:solidFill>
                 <a:latin typeface="Lexend"/>
               </a:rPr>
-              <a:t>How many centimetres is that?</a:t>
+              <a:t>How many centimeters is that?</a:t>
             </a:r>
           </a:p>
         </p:txBody>
@@ -6006,7 +6006,7 @@
                 </a:solidFill>
                 <a:latin typeface="Lexend"/>
               </a:rPr>
-              <a:t>How many centimetres is that?</a:t>
+              <a:t>How many centimeters is that?</a:t>
             </a:r>
           </a:p>
         </p:txBody>
@@ -7445,7 +7445,7 @@
                 </a:solidFill>
                 <a:latin typeface="Lexend"/>
               </a:rPr>
-              <a:t>How many kilometres is that?</a:t>
+              <a:t>How many kilometers is that?</a:t>
             </a:r>
           </a:p>
         </p:txBody>
@@ -7778,7 +7778,7 @@
                 </a:solidFill>
                 <a:latin typeface="Lexend"/>
               </a:rPr>
-              <a:t>How many kilometres is that?</a:t>
+              <a:t>How many kilometers is that?</a:t>
             </a:r>
           </a:p>
         </p:txBody>
@@ -9061,7 +9061,7 @@
                 </a:solidFill>
                 <a:latin typeface="Lexend"/>
               </a:rPr>
-              <a:t>How many centimetres is that?</a:t>
+              <a:t>How many centimeters is that?</a:t>
             </a:r>
           </a:p>
         </p:txBody>
@@ -9394,7 +9394,7 @@
                 </a:solidFill>
                 <a:latin typeface="Lexend"/>
               </a:rPr>
-              <a:t>How many centimetres is that?</a:t>
+              <a:t>How many centimeters is that?</a:t>
             </a:r>
           </a:p>
         </p:txBody>
@@ -9775,7 +9775,7 @@
                 </a:solidFill>
                 <a:latin typeface="Lexend"/>
               </a:rPr>
-              <a:t>About how many centimetres is that? Estimate, then compute.</a:t>
+              <a:t>About how many centimeters is that? Estimate, then compute.</a:t>
             </a:r>
           </a:p>
         </p:txBody>
@@ -10108,7 +10108,7 @@
                 </a:solidFill>
                 <a:latin typeface="Lexend"/>
               </a:rPr>
-              <a:t>About how many centimetres is that? Estimate, then compute.</a:t>
+              <a:t>About how many centimeters is that? Estimate, then compute.</a:t>
             </a:r>
           </a:p>
         </p:txBody>
@@ -10465,7 +10465,7 @@
                 </a:solidFill>
                 <a:latin typeface="Lexend"/>
               </a:rPr>
-              <a:t>Rates on 2 Nov: $1 = 1.32 CAD; 1 CAD = 16.2 pesos. Theo changes $200 to CAD, then to pesos.</a:t>
+              <a:t>Rate on Nov 2: $1 = 1.32 CAD; 1 CAD = 16.2 pesos. Theo changes $200 to CAD, then to pesos.</a:t>
             </a:r>
           </a:p>
         </p:txBody>
@@ -10798,7 +10798,7 @@
                 </a:solidFill>
                 <a:latin typeface="Lexend"/>
               </a:rPr>
-              <a:t>Rates on 2 Nov: $1 = 1.32 CAD; 1 CAD = 16.2 pesos. Theo changes $200 to CAD, then to pesos.</a:t>
+              <a:t>Rate on Nov 2: $1 = 1.32 CAD; 1 CAD = 16.2 pesos. Theo changes $200 to CAD, then to pesos.</a:t>
             </a:r>
           </a:p>
         </p:txBody>
@@ -11687,7 +11687,7 @@
                 </a:solidFill>
                 <a:latin typeface="Lexend"/>
               </a:rPr>
-              <a:t>1 km = 0.62 mi. Theo, who weighs 110 lb, runs a 5 km race.</a:t>
+              <a:t>1 km = 0.62 mi. Theo, who weighs 110 lb, rides a 12 km trail.</a:t>
             </a:r>
           </a:p>
         </p:txBody>
@@ -11722,7 +11722,7 @@
                 </a:solidFill>
                 <a:latin typeface="Lexend"/>
               </a:rPr>
-              <a:t>How long is the race in miles?</a:t>
+              <a:t>How long is the trail in miles?</a:t>
             </a:r>
           </a:p>
         </p:txBody>
@@ -12020,7 +12020,7 @@
                 </a:solidFill>
                 <a:latin typeface="Lexend"/>
               </a:rPr>
-              <a:t>1 km = 0.62 mi. Theo, who weighs 110 lb, runs a 5 km race.</a:t>
+              <a:t>1 km = 0.62 mi. Theo, who weighs 110 lb, rides a 12 km trail.</a:t>
             </a:r>
           </a:p>
         </p:txBody>
@@ -12055,14 +12055,14 @@
                 </a:solidFill>
                 <a:latin typeface="Lexend"/>
               </a:rPr>
-              <a:t>How long is the race in miles?</a:t>
+              <a:t>How long is the trail in miles?</a:t>
             </a:r>
           </a:p>
         </p:txBody>
       </p:sp>
       <p:pic>
         <p:nvPicPr>
-          <p:cNvPr id="10" name="Picture 9" descr="7848a55870dbf021.png"/>
+          <p:cNvPr id="10" name="Picture 9" descr="5134a9b996441169.png"/>
           <p:cNvPicPr>
             <a:picLocks noChangeAspect="1"/>
           </p:cNvPicPr>
@@ -12076,8 +12076,8 @@
         </p:blipFill>
         <p:spPr>
           <a:xfrm>
-            <a:off x="5181599" y="3149312"/>
-            <a:ext cx="1914144" cy="256032"/>
+            <a:off x="4969764" y="3149312"/>
+            <a:ext cx="2331720" cy="256032"/>
           </a:xfrm>
           <a:prstGeom prst="rect">
             <a:avLst/>
@@ -12114,7 +12114,7 @@
                 </a:solidFill>
                 <a:latin typeface="Lexend"/>
               </a:rPr>
-              <a:t>Answer:   3.1 mi</a:t>
+              <a:t>Answer:   7.44 mi</a:t>
             </a:r>
           </a:p>
         </p:txBody>
@@ -12804,7 +12804,7 @@
                 </a:solidFill>
                 <a:latin typeface="Lexend"/>
               </a:rPr>
-              <a:t>Answer:   She used the inches ratio on centimetres. Inches are bigger, so fewer: 11.7 in.</a:t>
+              <a:t>Answer:   She used the inches ratio on centimeters. Inches are bigger, so fewer: 11.7 in.</a:t>
             </a:r>
           </a:p>
         </p:txBody>
@@ -13102,7 +13102,7 @@
                 </a:solidFill>
                 <a:latin typeface="Lexend"/>
               </a:rPr>
-              <a:t>1 in = 2.54 cm. How many centimetres is 12 in?</a:t>
+              <a:t>1 in = 2.54 cm. How many centimeters is 12 in?</a:t>
             </a:r>
           </a:p>
         </p:txBody>
@@ -13242,7 +13242,7 @@
                 </a:solidFill>
                 <a:latin typeface="Lexend"/>
               </a:rPr>
-              <a:t>1 mi = 1.61 km. How many kilometres is 10 mi?</a:t>
+              <a:t>1 mi = 1.61 km. How many kilometers is 10 mi?</a:t>
             </a:r>
           </a:p>
         </p:txBody>
@@ -13382,7 +13382,7 @@
                 </a:solidFill>
                 <a:latin typeface="Lexend"/>
               </a:rPr>
-              <a:t>1 yd = 3 ft, 1 ft = 12 in, 1 in = 2.54 cm. How many centimetres is 2 yd? Estimate first.</a:t>
+              <a:t>1 yd = 3 ft, 1 ft = 12 in, 1 in = 2.54 cm. How many centimeters is 2 yd? Estimate first.</a:t>
             </a:r>
           </a:p>
         </p:txBody>
@@ -14398,7 +14398,7 @@
                 </a:solidFill>
                 <a:latin typeface="Lexend"/>
               </a:rPr>
-              <a:t>the centimetre–metre–kilometre–kilogram–litre system</a:t>
+              <a:t>the centimeter–meter–kilometer–kilogram–liter system</a:t>
             </a:r>
           </a:p>
         </p:txBody>
@@ -15522,7 +15522,7 @@
       </p:cxnSp>
       <p:pic>
         <p:nvPicPr>
-          <p:cNvPr id="10" name="Picture 9" descr="ff2899a6a3a58ae8.png"/>
+          <p:cNvPr id="10" name="Picture 9" descr="2ebe123ca6a6e2bb.png"/>
           <p:cNvPicPr>
             <a:picLocks noChangeAspect="1"/>
           </p:cNvPicPr>
@@ -15536,7 +15536,31 @@
         </p:blipFill>
         <p:spPr>
           <a:xfrm>
-            <a:off x="2542032" y="2058924"/>
+            <a:off x="4291583" y="2054352"/>
+            <a:ext cx="3578352" cy="289560"/>
+          </a:xfrm>
+          <a:prstGeom prst="rect">
+            <a:avLst/>
+          </a:prstGeom>
+        </p:spPr>
+      </p:pic>
+      <p:pic>
+        <p:nvPicPr>
+          <p:cNvPr id="11" name="Picture 10" descr="ff2899a6a3a58ae8.png"/>
+          <p:cNvPicPr>
+            <a:picLocks noChangeAspect="1"/>
+          </p:cNvPicPr>
+          <p:nvPr/>
+        </p:nvPicPr>
+        <p:blipFill>
+          <a:blip r:embed="rId3"/>
+          <a:stretch>
+            <a:fillRect/>
+          </a:stretch>
+        </p:blipFill>
+        <p:spPr>
+          <a:xfrm>
+            <a:off x="2542032" y="2744724"/>
             <a:ext cx="7077456" cy="280416"/>
           </a:xfrm>
           <a:prstGeom prst="rect">
@@ -15837,7 +15861,7 @@
                 </a:solidFill>
                 <a:latin typeface="Lexend"/>
               </a:rPr>
-              <a:t>How many centimetres is that?</a:t>
+              <a:t>How many centimeters is that?</a:t>
             </a:r>
           </a:p>
         </p:txBody>

--- a/a7/packages/A7 Unit 5 - Multi-Step Proportional Relationships/Lessons/5.06/A7 5.06 Converting Length Across Systems; Currency - Slides.pptx
+++ b/a7/packages/A7 Unit 5 - Multi-Step Proportional Relationships/Lessons/5.06/A7 5.06 Converting Length Across Systems; Currency - Slides.pptx
@@ -3665,29 +3665,53 @@
           </a:p>
         </p:txBody>
       </p:sp>
-      <p:sp>
-        <p:nvSpPr>
-          <p:cNvPr id="8" name="TextBox 7"/>
-          <p:cNvSpPr txBox="1"/>
-          <p:nvPr/>
-        </p:nvSpPr>
-        <p:spPr>
-          <a:xfrm>
-            <a:off x="777240" y="1600200"/>
-            <a:ext cx="10607040" cy="429370"/>
-          </a:xfrm>
-          <a:prstGeom prst="rect">
-            <a:avLst/>
-          </a:prstGeom>
-          <a:noFill/>
-        </p:spPr>
-        <p:txBody>
-          <a:bodyPr wrap="square" lIns="45720" rIns="45720" tIns="18288" bIns="18288" anchor="t">
-            <a:spAutoFit/>
-          </a:bodyPr>
-          <a:lstStyle/>
-          <a:p>
-            <a:pPr algn="ctr"/>
+      <p:pic>
+        <p:nvPicPr>
+          <p:cNvPr id="8" name="Picture 7" descr="88d2b26b87c7a8c9.png"/>
+          <p:cNvPicPr>
+            <a:picLocks noChangeAspect="1"/>
+          </p:cNvPicPr>
+          <p:nvPr/>
+        </p:nvPicPr>
+        <p:blipFill>
+          <a:blip r:embed="rId2"/>
+          <a:stretch>
+            <a:fillRect/>
+          </a:stretch>
+        </p:blipFill>
+        <p:spPr>
+          <a:xfrm>
+            <a:off x="3200756" y="1682496"/>
+            <a:ext cx="1847088" cy="243840"/>
+          </a:xfrm>
+          <a:prstGeom prst="rect">
+            <a:avLst/>
+          </a:prstGeom>
+        </p:spPr>
+      </p:pic>
+      <p:sp>
+        <p:nvSpPr>
+          <p:cNvPr id="9" name="TextBox 8"/>
+          <p:cNvSpPr txBox="1"/>
+          <p:nvPr/>
+        </p:nvSpPr>
+        <p:spPr>
+          <a:xfrm>
+            <a:off x="5047844" y="1577340"/>
+            <a:ext cx="4050079" cy="457200"/>
+          </a:xfrm>
+          <a:prstGeom prst="rect">
+            <a:avLst/>
+          </a:prstGeom>
+          <a:noFill/>
+        </p:spPr>
+        <p:txBody>
+          <a:bodyPr wrap="none" lIns="45720" rIns="45720" tIns="18288" bIns="18288" anchor="ctr">
+            <a:noAutofit/>
+          </a:bodyPr>
+          <a:lstStyle/>
+          <a:p>
+            <a:pPr algn="l"/>
             <a:r>
               <a:rPr sz="2280" b="0" i="0">
                 <a:solidFill>
@@ -3695,20 +3719,20 @@
                 </a:solidFill>
                 <a:latin typeface="Lexend"/>
               </a:rPr>
-              <a:t>1 in = 2.54 cm. A monitor is 25 in across.</a:t>
-            </a:r>
-          </a:p>
-        </p:txBody>
-      </p:sp>
-      <p:sp>
-        <p:nvSpPr>
-          <p:cNvPr id="9" name="TextBox 8"/>
-          <p:cNvSpPr txBox="1"/>
-          <p:nvPr/>
-        </p:nvSpPr>
-        <p:spPr>
-          <a:xfrm>
-            <a:off x="777240" y="2139298"/>
+              <a:t>. A monitor is 25 in across.</a:t>
+            </a:r>
+          </a:p>
+        </p:txBody>
+      </p:sp>
+      <p:sp>
+        <p:nvSpPr>
+          <p:cNvPr id="10" name="TextBox 9"/>
+          <p:cNvSpPr txBox="1"/>
+          <p:nvPr/>
+        </p:nvSpPr>
+        <p:spPr>
+          <a:xfrm>
+            <a:off x="777240" y="2286000"/>
             <a:ext cx="10607040" cy="429370"/>
           </a:xfrm>
           <a:prstGeom prst="rect">
@@ -3963,79 +3987,9 @@
           </a:p>
         </p:txBody>
       </p:sp>
-      <p:sp>
-        <p:nvSpPr>
-          <p:cNvPr id="8" name="TextBox 7"/>
-          <p:cNvSpPr txBox="1"/>
-          <p:nvPr/>
-        </p:nvSpPr>
-        <p:spPr>
-          <a:xfrm>
-            <a:off x="777240" y="1600200"/>
-            <a:ext cx="10607040" cy="429370"/>
-          </a:xfrm>
-          <a:prstGeom prst="rect">
-            <a:avLst/>
-          </a:prstGeom>
-          <a:noFill/>
-        </p:spPr>
-        <p:txBody>
-          <a:bodyPr wrap="square" lIns="45720" rIns="45720" tIns="18288" bIns="18288" anchor="t">
-            <a:spAutoFit/>
-          </a:bodyPr>
-          <a:lstStyle/>
-          <a:p>
-            <a:pPr algn="ctr"/>
-            <a:r>
-              <a:rPr sz="2280" b="0" i="0">
-                <a:solidFill>
-                  <a:srgbClr val="1A1A1A"/>
-                </a:solidFill>
-                <a:latin typeface="Lexend"/>
-              </a:rPr>
-              <a:t>1 in = 2.54 cm. A monitor is 25 in across.</a:t>
-            </a:r>
-          </a:p>
-        </p:txBody>
-      </p:sp>
-      <p:sp>
-        <p:nvSpPr>
-          <p:cNvPr id="9" name="TextBox 8"/>
-          <p:cNvSpPr txBox="1"/>
-          <p:nvPr/>
-        </p:nvSpPr>
-        <p:spPr>
-          <a:xfrm>
-            <a:off x="777240" y="2139298"/>
-            <a:ext cx="10607040" cy="429370"/>
-          </a:xfrm>
-          <a:prstGeom prst="rect">
-            <a:avLst/>
-          </a:prstGeom>
-          <a:noFill/>
-        </p:spPr>
-        <p:txBody>
-          <a:bodyPr wrap="square" lIns="45720" rIns="45720" tIns="18288" bIns="18288" anchor="t">
-            <a:spAutoFit/>
-          </a:bodyPr>
-          <a:lstStyle/>
-          <a:p>
-            <a:pPr algn="ctr"/>
-            <a:r>
-              <a:rPr sz="2280" b="0" i="0">
-                <a:solidFill>
-                  <a:srgbClr val="1A1A1A"/>
-                </a:solidFill>
-                <a:latin typeface="Lexend"/>
-              </a:rPr>
-              <a:t>How many centimeters is that?</a:t>
-            </a:r>
-          </a:p>
-        </p:txBody>
-      </p:sp>
       <p:pic>
         <p:nvPicPr>
-          <p:cNvPr id="10" name="Picture 9" descr="338bfed52120ec8e.png"/>
+          <p:cNvPr id="8" name="Picture 7" descr="e3914b43cbb52236.png"/>
           <p:cNvPicPr>
             <a:picLocks noChangeAspect="1"/>
           </p:cNvPicPr>
@@ -4049,7 +4003,101 @@
         </p:blipFill>
         <p:spPr>
           <a:xfrm>
-            <a:off x="4972811" y="2829272"/>
+            <a:off x="3202280" y="1682496"/>
+            <a:ext cx="1844040" cy="243840"/>
+          </a:xfrm>
+          <a:prstGeom prst="rect">
+            <a:avLst/>
+          </a:prstGeom>
+        </p:spPr>
+      </p:pic>
+      <p:sp>
+        <p:nvSpPr>
+          <p:cNvPr id="9" name="TextBox 8"/>
+          <p:cNvSpPr txBox="1"/>
+          <p:nvPr/>
+        </p:nvSpPr>
+        <p:spPr>
+          <a:xfrm>
+            <a:off x="5046320" y="1577340"/>
+            <a:ext cx="4050079" cy="457200"/>
+          </a:xfrm>
+          <a:prstGeom prst="rect">
+            <a:avLst/>
+          </a:prstGeom>
+          <a:noFill/>
+        </p:spPr>
+        <p:txBody>
+          <a:bodyPr wrap="none" lIns="45720" rIns="45720" tIns="18288" bIns="18288" anchor="ctr">
+            <a:noAutofit/>
+          </a:bodyPr>
+          <a:lstStyle/>
+          <a:p>
+            <a:pPr algn="l"/>
+            <a:r>
+              <a:rPr sz="2280" b="0" i="0">
+                <a:solidFill>
+                  <a:srgbClr val="1A1A1A"/>
+                </a:solidFill>
+                <a:latin typeface="Lexend"/>
+              </a:rPr>
+              <a:t>. A monitor is 25 in across.</a:t>
+            </a:r>
+          </a:p>
+        </p:txBody>
+      </p:sp>
+      <p:sp>
+        <p:nvSpPr>
+          <p:cNvPr id="10" name="TextBox 9"/>
+          <p:cNvSpPr txBox="1"/>
+          <p:nvPr/>
+        </p:nvSpPr>
+        <p:spPr>
+          <a:xfrm>
+            <a:off x="777240" y="2286000"/>
+            <a:ext cx="10607040" cy="429370"/>
+          </a:xfrm>
+          <a:prstGeom prst="rect">
+            <a:avLst/>
+          </a:prstGeom>
+          <a:noFill/>
+        </p:spPr>
+        <p:txBody>
+          <a:bodyPr wrap="square" lIns="45720" rIns="45720" tIns="18288" bIns="18288" anchor="t">
+            <a:spAutoFit/>
+          </a:bodyPr>
+          <a:lstStyle/>
+          <a:p>
+            <a:pPr algn="ctr"/>
+            <a:r>
+              <a:rPr sz="2280" b="0" i="0">
+                <a:solidFill>
+                  <a:srgbClr val="1A1A1A"/>
+                </a:solidFill>
+                <a:latin typeface="Lexend"/>
+              </a:rPr>
+              <a:t>How many centimeters is that?</a:t>
+            </a:r>
+          </a:p>
+        </p:txBody>
+      </p:sp>
+      <p:pic>
+        <p:nvPicPr>
+          <p:cNvPr id="11" name="Picture 10" descr="338bfed52120ec8e.png"/>
+          <p:cNvPicPr>
+            <a:picLocks noChangeAspect="1"/>
+          </p:cNvPicPr>
+          <p:nvPr/>
+        </p:nvPicPr>
+        <p:blipFill>
+          <a:blip r:embed="rId3"/>
+          <a:stretch>
+            <a:fillRect/>
+          </a:stretch>
+        </p:blipFill>
+        <p:spPr>
+          <a:xfrm>
+            <a:off x="4972811" y="2992166"/>
             <a:ext cx="2325624" cy="256032"/>
           </a:xfrm>
           <a:prstGeom prst="rect">
@@ -4059,7 +4107,7 @@
       </p:pic>
       <p:sp>
         <p:nvSpPr>
-          <p:cNvPr id="11" name="TextBox 10"/>
+          <p:cNvPr id="12" name="TextBox 11"/>
           <p:cNvSpPr txBox="1"/>
           <p:nvPr/>
         </p:nvSpPr>
@@ -4328,21 +4376,21 @@
         </p:nvSpPr>
         <p:spPr>
           <a:xfrm>
-            <a:off x="777240" y="2103120"/>
-            <a:ext cx="10607040" cy="429370"/>
-          </a:xfrm>
-          <a:prstGeom prst="rect">
-            <a:avLst/>
-          </a:prstGeom>
-          <a:noFill/>
-        </p:spPr>
-        <p:txBody>
-          <a:bodyPr wrap="square" lIns="45720" rIns="45720" tIns="18288" bIns="18288" anchor="t">
-            <a:spAutoFit/>
-          </a:bodyPr>
-          <a:lstStyle/>
-          <a:p>
-            <a:pPr algn="ctr"/>
+            <a:off x="3320460" y="2080260"/>
+            <a:ext cx="2167912" cy="457200"/>
+          </a:xfrm>
+          <a:prstGeom prst="rect">
+            <a:avLst/>
+          </a:prstGeom>
+          <a:noFill/>
+        </p:spPr>
+        <p:txBody>
+          <a:bodyPr wrap="none" lIns="45720" rIns="45720" tIns="18288" bIns="18288" anchor="ctr">
+            <a:noAutofit/>
+          </a:bodyPr>
+          <a:lstStyle/>
+          <a:p>
+            <a:pPr algn="l"/>
             <a:r>
               <a:rPr sz="2280" b="0" i="0">
                 <a:solidFill>
@@ -4350,20 +4398,79 @@
                 </a:solidFill>
                 <a:latin typeface="Lexend"/>
               </a:rPr>
-              <a:t>Today's rate: 1 US dollar = 0.92 euros.</a:t>
-            </a:r>
-          </a:p>
-        </p:txBody>
-      </p:sp>
-      <p:sp>
-        <p:nvSpPr>
-          <p:cNvPr id="9" name="TextBox 8"/>
-          <p:cNvSpPr txBox="1"/>
-          <p:nvPr/>
-        </p:nvSpPr>
-        <p:spPr>
-          <a:xfrm>
-            <a:off x="777240" y="2825098"/>
+              <a:t>Today's rate: </a:t>
+            </a:r>
+          </a:p>
+        </p:txBody>
+      </p:sp>
+      <p:pic>
+        <p:nvPicPr>
+          <p:cNvPr id="9" name="Picture 8" descr="9090d8e8f0989a75.png"/>
+          <p:cNvPicPr>
+            <a:picLocks noChangeAspect="1"/>
+          </p:cNvPicPr>
+          <p:nvPr/>
+        </p:nvPicPr>
+        <p:blipFill>
+          <a:blip r:embed="rId2"/>
+          <a:stretch>
+            <a:fillRect/>
+          </a:stretch>
+        </p:blipFill>
+        <p:spPr>
+          <a:xfrm>
+            <a:off x="5351213" y="2194560"/>
+            <a:ext cx="3346704" cy="234696"/>
+          </a:xfrm>
+          <a:prstGeom prst="rect">
+            <a:avLst/>
+          </a:prstGeom>
+        </p:spPr>
+      </p:pic>
+      <p:sp>
+        <p:nvSpPr>
+          <p:cNvPr id="10" name="TextBox 9"/>
+          <p:cNvSpPr txBox="1"/>
+          <p:nvPr/>
+        </p:nvSpPr>
+        <p:spPr>
+          <a:xfrm>
+            <a:off x="8697917" y="2080260"/>
+            <a:ext cx="280301" cy="457200"/>
+          </a:xfrm>
+          <a:prstGeom prst="rect">
+            <a:avLst/>
+          </a:prstGeom>
+          <a:noFill/>
+        </p:spPr>
+        <p:txBody>
+          <a:bodyPr wrap="none" lIns="45720" rIns="45720" tIns="18288" bIns="18288" anchor="ctr">
+            <a:noAutofit/>
+          </a:bodyPr>
+          <a:lstStyle/>
+          <a:p>
+            <a:pPr algn="l"/>
+            <a:r>
+              <a:rPr sz="2280" b="0" i="0">
+                <a:solidFill>
+                  <a:srgbClr val="1A1A1A"/>
+                </a:solidFill>
+                <a:latin typeface="Lexend"/>
+              </a:rPr>
+              <a:t>.</a:t>
+            </a:r>
+          </a:p>
+        </p:txBody>
+      </p:sp>
+      <p:sp>
+        <p:nvSpPr>
+          <p:cNvPr id="11" name="TextBox 10"/>
+          <p:cNvSpPr txBox="1"/>
+          <p:nvPr/>
+        </p:nvSpPr>
+        <p:spPr>
+          <a:xfrm>
+            <a:off x="777240" y="2971800"/>
             <a:ext cx="10607040" cy="429370"/>
           </a:xfrm>
           <a:prstGeom prst="rect">
@@ -4937,21 +5044,21 @@
         </p:nvSpPr>
         <p:spPr>
           <a:xfrm>
-            <a:off x="777240" y="1600200"/>
-            <a:ext cx="10607040" cy="429370"/>
-          </a:xfrm>
-          <a:prstGeom prst="rect">
-            <a:avLst/>
-          </a:prstGeom>
-          <a:noFill/>
-        </p:spPr>
-        <p:txBody>
-          <a:bodyPr wrap="square" lIns="45720" rIns="45720" tIns="18288" bIns="18288" anchor="t">
-            <a:spAutoFit/>
-          </a:bodyPr>
-          <a:lstStyle/>
-          <a:p>
-            <a:pPr algn="ctr"/>
+            <a:off x="1992908" y="1577340"/>
+            <a:ext cx="2167912" cy="457200"/>
+          </a:xfrm>
+          <a:prstGeom prst="rect">
+            <a:avLst/>
+          </a:prstGeom>
+          <a:noFill/>
+        </p:spPr>
+        <p:txBody>
+          <a:bodyPr wrap="none" lIns="45720" rIns="45720" tIns="18288" bIns="18288" anchor="ctr">
+            <a:noAutofit/>
+          </a:bodyPr>
+          <a:lstStyle/>
+          <a:p>
+            <a:pPr algn="l"/>
             <a:r>
               <a:rPr sz="2280" b="0" i="0">
                 <a:solidFill>
@@ -4959,20 +5066,79 @@
                 </a:solidFill>
                 <a:latin typeface="Lexend"/>
               </a:rPr>
-              <a:t>Today's rate: 1 US dollar = 1.35 Canadian dollars (CAD).</a:t>
-            </a:r>
-          </a:p>
-        </p:txBody>
-      </p:sp>
-      <p:sp>
-        <p:nvSpPr>
-          <p:cNvPr id="9" name="TextBox 8"/>
-          <p:cNvSpPr txBox="1"/>
-          <p:nvPr/>
-        </p:nvSpPr>
-        <p:spPr>
-          <a:xfrm>
-            <a:off x="777240" y="2139298"/>
+              <a:t>Today's rate: </a:t>
+            </a:r>
+          </a:p>
+        </p:txBody>
+      </p:sp>
+      <p:pic>
+        <p:nvPicPr>
+          <p:cNvPr id="9" name="Picture 8" descr="d0d46e5b72ac2d61.png"/>
+          <p:cNvPicPr>
+            <a:picLocks noChangeAspect="1"/>
+          </p:cNvPicPr>
+          <p:nvPr/>
+        </p:nvPicPr>
+        <p:blipFill>
+          <a:blip r:embed="rId2"/>
+          <a:stretch>
+            <a:fillRect/>
+          </a:stretch>
+        </p:blipFill>
+        <p:spPr>
+          <a:xfrm>
+            <a:off x="4023660" y="1682496"/>
+            <a:ext cx="5047488" cy="243840"/>
+          </a:xfrm>
+          <a:prstGeom prst="rect">
+            <a:avLst/>
+          </a:prstGeom>
+        </p:spPr>
+      </p:pic>
+      <p:sp>
+        <p:nvSpPr>
+          <p:cNvPr id="10" name="TextBox 9"/>
+          <p:cNvSpPr txBox="1"/>
+          <p:nvPr/>
+        </p:nvSpPr>
+        <p:spPr>
+          <a:xfrm>
+            <a:off x="9071148" y="1577340"/>
+            <a:ext cx="1234622" cy="457200"/>
+          </a:xfrm>
+          <a:prstGeom prst="rect">
+            <a:avLst/>
+          </a:prstGeom>
+          <a:noFill/>
+        </p:spPr>
+        <p:txBody>
+          <a:bodyPr wrap="none" lIns="45720" rIns="45720" tIns="18288" bIns="18288" anchor="ctr">
+            <a:noAutofit/>
+          </a:bodyPr>
+          <a:lstStyle/>
+          <a:p>
+            <a:pPr algn="l"/>
+            <a:r>
+              <a:rPr sz="2280" b="0" i="0">
+                <a:solidFill>
+                  <a:srgbClr val="1A1A1A"/>
+                </a:solidFill>
+                <a:latin typeface="Lexend"/>
+              </a:rPr>
+              <a:t> (CAD).</a:t>
+            </a:r>
+          </a:p>
+        </p:txBody>
+      </p:sp>
+      <p:sp>
+        <p:nvSpPr>
+          <p:cNvPr id="11" name="TextBox 10"/>
+          <p:cNvSpPr txBox="1"/>
+          <p:nvPr/>
+        </p:nvSpPr>
+        <p:spPr>
+          <a:xfrm>
+            <a:off x="777240" y="2286000"/>
             <a:ext cx="10607040" cy="429370"/>
           </a:xfrm>
           <a:prstGeom prst="rect">
@@ -5235,21 +5401,21 @@
         </p:nvSpPr>
         <p:spPr>
           <a:xfrm>
-            <a:off x="777240" y="1600200"/>
-            <a:ext cx="10607040" cy="429370"/>
-          </a:xfrm>
-          <a:prstGeom prst="rect">
-            <a:avLst/>
-          </a:prstGeom>
-          <a:noFill/>
-        </p:spPr>
-        <p:txBody>
-          <a:bodyPr wrap="square" lIns="45720" rIns="45720" tIns="18288" bIns="18288" anchor="t">
-            <a:spAutoFit/>
-          </a:bodyPr>
-          <a:lstStyle/>
-          <a:p>
-            <a:pPr algn="ctr"/>
+            <a:off x="1992908" y="1577340"/>
+            <a:ext cx="2167912" cy="457200"/>
+          </a:xfrm>
+          <a:prstGeom prst="rect">
+            <a:avLst/>
+          </a:prstGeom>
+          <a:noFill/>
+        </p:spPr>
+        <p:txBody>
+          <a:bodyPr wrap="none" lIns="45720" rIns="45720" tIns="18288" bIns="18288" anchor="ctr">
+            <a:noAutofit/>
+          </a:bodyPr>
+          <a:lstStyle/>
+          <a:p>
+            <a:pPr algn="l"/>
             <a:r>
               <a:rPr sz="2280" b="0" i="0">
                 <a:solidFill>
@@ -5257,49 +5423,14 @@
                 </a:solidFill>
                 <a:latin typeface="Lexend"/>
               </a:rPr>
-              <a:t>Today's rate: 1 US dollar = 1.35 Canadian dollars (CAD).</a:t>
-            </a:r>
-          </a:p>
-        </p:txBody>
-      </p:sp>
-      <p:sp>
-        <p:nvSpPr>
-          <p:cNvPr id="9" name="TextBox 8"/>
-          <p:cNvSpPr txBox="1"/>
-          <p:nvPr/>
-        </p:nvSpPr>
-        <p:spPr>
-          <a:xfrm>
-            <a:off x="777240" y="2139298"/>
-            <a:ext cx="10607040" cy="429370"/>
-          </a:xfrm>
-          <a:prstGeom prst="rect">
-            <a:avLst/>
-          </a:prstGeom>
-          <a:noFill/>
-        </p:spPr>
-        <p:txBody>
-          <a:bodyPr wrap="square" lIns="45720" rIns="45720" tIns="18288" bIns="18288" anchor="t">
-            <a:spAutoFit/>
-          </a:bodyPr>
-          <a:lstStyle/>
-          <a:p>
-            <a:pPr algn="ctr"/>
-            <a:r>
-              <a:rPr sz="2280" b="0" i="0">
-                <a:solidFill>
-                  <a:srgbClr val="1A1A1A"/>
-                </a:solidFill>
-                <a:latin typeface="Lexend"/>
-              </a:rPr>
-              <a:t>$120 in CAD? And 81 CAD in US dollars?</a:t>
+              <a:t>Today's rate: </a:t>
             </a:r>
           </a:p>
         </p:txBody>
       </p:sp>
       <p:pic>
         <p:nvPicPr>
-          <p:cNvPr id="10" name="Picture 9" descr="b61c547caeac9d33.png"/>
+          <p:cNvPr id="9" name="Picture 8" descr="1cbb51ff54ffc007.png"/>
           <p:cNvPicPr>
             <a:picLocks noChangeAspect="1"/>
           </p:cNvPicPr>
@@ -5313,17 +5444,87 @@
         </p:blipFill>
         <p:spPr>
           <a:xfrm>
-            <a:off x="4952999" y="2829272"/>
-            <a:ext cx="2368296" cy="256032"/>
+            <a:off x="4023660" y="1682496"/>
+            <a:ext cx="5047488" cy="243840"/>
           </a:xfrm>
           <a:prstGeom prst="rect">
             <a:avLst/>
           </a:prstGeom>
         </p:spPr>
       </p:pic>
+      <p:sp>
+        <p:nvSpPr>
+          <p:cNvPr id="10" name="TextBox 9"/>
+          <p:cNvSpPr txBox="1"/>
+          <p:nvPr/>
+        </p:nvSpPr>
+        <p:spPr>
+          <a:xfrm>
+            <a:off x="9071148" y="1577340"/>
+            <a:ext cx="1234622" cy="457200"/>
+          </a:xfrm>
+          <a:prstGeom prst="rect">
+            <a:avLst/>
+          </a:prstGeom>
+          <a:noFill/>
+        </p:spPr>
+        <p:txBody>
+          <a:bodyPr wrap="none" lIns="45720" rIns="45720" tIns="18288" bIns="18288" anchor="ctr">
+            <a:noAutofit/>
+          </a:bodyPr>
+          <a:lstStyle/>
+          <a:p>
+            <a:pPr algn="l"/>
+            <a:r>
+              <a:rPr sz="2280" b="0" i="0">
+                <a:solidFill>
+                  <a:srgbClr val="1A1A1A"/>
+                </a:solidFill>
+                <a:latin typeface="Lexend"/>
+              </a:rPr>
+              <a:t> (CAD).</a:t>
+            </a:r>
+          </a:p>
+        </p:txBody>
+      </p:sp>
+      <p:sp>
+        <p:nvSpPr>
+          <p:cNvPr id="11" name="TextBox 10"/>
+          <p:cNvSpPr txBox="1"/>
+          <p:nvPr/>
+        </p:nvSpPr>
+        <p:spPr>
+          <a:xfrm>
+            <a:off x="777240" y="2286000"/>
+            <a:ext cx="10607040" cy="429370"/>
+          </a:xfrm>
+          <a:prstGeom prst="rect">
+            <a:avLst/>
+          </a:prstGeom>
+          <a:noFill/>
+        </p:spPr>
+        <p:txBody>
+          <a:bodyPr wrap="square" lIns="45720" rIns="45720" tIns="18288" bIns="18288" anchor="t">
+            <a:spAutoFit/>
+          </a:bodyPr>
+          <a:lstStyle/>
+          <a:p>
+            <a:pPr algn="ctr"/>
+            <a:r>
+              <a:rPr sz="2280" b="0" i="0">
+                <a:solidFill>
+                  <a:srgbClr val="1A1A1A"/>
+                </a:solidFill>
+                <a:latin typeface="Lexend"/>
+              </a:rPr>
+              <a:t>$120 in CAD? And 81 CAD in US dollars?</a:t>
+            </a:r>
+          </a:p>
+        </p:txBody>
+      </p:sp>
       <p:pic>
         <p:nvPicPr>
-          <p:cNvPr id="11" name="Picture 10" descr="8124e5dae99de1de.png"/>
+          <p:cNvPr id="12" name="Picture 11" descr="b61c547caeac9d33.png"/>
           <p:cNvPicPr>
             <a:picLocks noChangeAspect="1"/>
           </p:cNvPicPr>
@@ -5337,7 +5538,31 @@
         </p:blipFill>
         <p:spPr>
           <a:xfrm>
-            <a:off x="4952999" y="3368768"/>
+            <a:off x="4952999" y="2992166"/>
+            <a:ext cx="2368296" cy="256032"/>
+          </a:xfrm>
+          <a:prstGeom prst="rect">
+            <a:avLst/>
+          </a:prstGeom>
+        </p:spPr>
+      </p:pic>
+      <p:pic>
+        <p:nvPicPr>
+          <p:cNvPr id="13" name="Picture 12" descr="8124e5dae99de1de.png"/>
+          <p:cNvPicPr>
+            <a:picLocks noChangeAspect="1"/>
+          </p:cNvPicPr>
+          <p:nvPr/>
+        </p:nvPicPr>
+        <p:blipFill>
+          <a:blip r:embed="rId4"/>
+          <a:stretch>
+            <a:fillRect/>
+          </a:stretch>
+        </p:blipFill>
+        <p:spPr>
+          <a:xfrm>
+            <a:off x="4952999" y="3531662"/>
             <a:ext cx="2054352" cy="256032"/>
           </a:xfrm>
           <a:prstGeom prst="rect">
@@ -5347,7 +5572,7 @@
       </p:pic>
       <p:sp>
         <p:nvSpPr>
-          <p:cNvPr id="12" name="TextBox 11"/>
+          <p:cNvPr id="14" name="TextBox 13"/>
           <p:cNvSpPr txBox="1"/>
           <p:nvPr/>
         </p:nvSpPr>
@@ -5608,15 +5833,74 @@
           </a:p>
         </p:txBody>
       </p:sp>
-      <p:sp>
-        <p:nvSpPr>
-          <p:cNvPr id="8" name="TextBox 7"/>
-          <p:cNvSpPr txBox="1"/>
-          <p:nvPr/>
-        </p:nvSpPr>
-        <p:spPr>
-          <a:xfrm>
-            <a:off x="1234440" y="1874519"/>
+      <p:pic>
+        <p:nvPicPr>
+          <p:cNvPr id="8" name="Picture 7" descr="88d2b26b87c7a8c9.png"/>
+          <p:cNvPicPr>
+            <a:picLocks noChangeAspect="1"/>
+          </p:cNvPicPr>
+          <p:nvPr/>
+        </p:nvPicPr>
+        <p:blipFill>
+          <a:blip r:embed="rId2"/>
+          <a:stretch>
+            <a:fillRect/>
+          </a:stretch>
+        </p:blipFill>
+        <p:spPr>
+          <a:xfrm>
+            <a:off x="1234440" y="1956815"/>
+            <a:ext cx="1847088" cy="243840"/>
+          </a:xfrm>
+          <a:prstGeom prst="rect">
+            <a:avLst/>
+          </a:prstGeom>
+        </p:spPr>
+      </p:pic>
+      <p:sp>
+        <p:nvSpPr>
+          <p:cNvPr id="9" name="TextBox 8"/>
+          <p:cNvSpPr txBox="1"/>
+          <p:nvPr/>
+        </p:nvSpPr>
+        <p:spPr>
+          <a:xfrm>
+            <a:off x="3081528" y="1851660"/>
+            <a:ext cx="3267008" cy="457200"/>
+          </a:xfrm>
+          <a:prstGeom prst="rect">
+            <a:avLst/>
+          </a:prstGeom>
+          <a:noFill/>
+        </p:spPr>
+        <p:txBody>
+          <a:bodyPr wrap="none" lIns="45720" rIns="45720" tIns="18288" bIns="18288" anchor="ctr">
+            <a:noAutofit/>
+          </a:bodyPr>
+          <a:lstStyle/>
+          <a:p>
+            <a:pPr algn="l"/>
+            <a:r>
+              <a:rPr sz="2280" b="0" i="0">
+                <a:solidFill>
+                  <a:srgbClr val="1A1A1A"/>
+                </a:solidFill>
+                <a:latin typeface="Lexend"/>
+              </a:rPr>
+              <a:t>. A ruler is 20 in long.</a:t>
+            </a:r>
+          </a:p>
+        </p:txBody>
+      </p:sp>
+      <p:sp>
+        <p:nvSpPr>
+          <p:cNvPr id="10" name="TextBox 9"/>
+          <p:cNvSpPr txBox="1"/>
+          <p:nvPr/>
+        </p:nvSpPr>
+        <p:spPr>
+          <a:xfrm>
+            <a:off x="1234440" y="2487168"/>
             <a:ext cx="10058400" cy="429370"/>
           </a:xfrm>
           <a:prstGeom prst="rect">
@@ -5632,47 +5916,12 @@
           <a:p>
             <a:pPr algn="l"/>
             <a:r>
-              <a:rPr sz="2280" b="0" i="0">
+              <a:rPr sz="2280" b="1" i="0">
                 <a:solidFill>
                   <a:srgbClr val="1A1A1A"/>
                 </a:solidFill>
                 <a:latin typeface="Lexend"/>
               </a:rPr>
-              <a:t>1 in = 2.54 cm. A ruler is 20 in long.</a:t>
-            </a:r>
-          </a:p>
-        </p:txBody>
-      </p:sp>
-      <p:sp>
-        <p:nvSpPr>
-          <p:cNvPr id="9" name="TextBox 8"/>
-          <p:cNvSpPr txBox="1"/>
-          <p:nvPr/>
-        </p:nvSpPr>
-        <p:spPr>
-          <a:xfrm>
-            <a:off x="1234440" y="2413618"/>
-            <a:ext cx="10058400" cy="429370"/>
-          </a:xfrm>
-          <a:prstGeom prst="rect">
-            <a:avLst/>
-          </a:prstGeom>
-          <a:noFill/>
-        </p:spPr>
-        <p:txBody>
-          <a:bodyPr wrap="square" lIns="45720" rIns="45720" tIns="18288" bIns="18288" anchor="t">
-            <a:spAutoFit/>
-          </a:bodyPr>
-          <a:lstStyle/>
-          <a:p>
-            <a:pPr algn="l"/>
-            <a:r>
-              <a:rPr sz="2280" b="1" i="0">
-                <a:solidFill>
-                  <a:srgbClr val="1A1A1A"/>
-                </a:solidFill>
-                <a:latin typeface="Lexend"/>
-              </a:rPr>
               <a:t>How many centimeters is that?</a:t>
             </a:r>
           </a:p>
@@ -5680,7 +5929,7 @@
       </p:sp>
       <p:sp>
         <p:nvSpPr>
-          <p:cNvPr id="10" name="TextBox 9"/>
+          <p:cNvPr id="11" name="TextBox 10"/>
           <p:cNvSpPr txBox="1"/>
           <p:nvPr/>
         </p:nvSpPr>
@@ -5941,79 +6190,9 @@
           </a:p>
         </p:txBody>
       </p:sp>
-      <p:sp>
-        <p:nvSpPr>
-          <p:cNvPr id="8" name="TextBox 7"/>
-          <p:cNvSpPr txBox="1"/>
-          <p:nvPr/>
-        </p:nvSpPr>
-        <p:spPr>
-          <a:xfrm>
-            <a:off x="1234440" y="1874519"/>
-            <a:ext cx="10058400" cy="429370"/>
-          </a:xfrm>
-          <a:prstGeom prst="rect">
-            <a:avLst/>
-          </a:prstGeom>
-          <a:noFill/>
-        </p:spPr>
-        <p:txBody>
-          <a:bodyPr wrap="square" lIns="45720" rIns="45720" tIns="18288" bIns="18288" anchor="t">
-            <a:spAutoFit/>
-          </a:bodyPr>
-          <a:lstStyle/>
-          <a:p>
-            <a:pPr algn="l"/>
-            <a:r>
-              <a:rPr sz="2280" b="0" i="0">
-                <a:solidFill>
-                  <a:srgbClr val="1A1A1A"/>
-                </a:solidFill>
-                <a:latin typeface="Lexend"/>
-              </a:rPr>
-              <a:t>1 in = 2.54 cm. A ruler is 20 in long.</a:t>
-            </a:r>
-          </a:p>
-        </p:txBody>
-      </p:sp>
-      <p:sp>
-        <p:nvSpPr>
-          <p:cNvPr id="9" name="TextBox 8"/>
-          <p:cNvSpPr txBox="1"/>
-          <p:nvPr/>
-        </p:nvSpPr>
-        <p:spPr>
-          <a:xfrm>
-            <a:off x="1234440" y="2413618"/>
-            <a:ext cx="10058400" cy="429370"/>
-          </a:xfrm>
-          <a:prstGeom prst="rect">
-            <a:avLst/>
-          </a:prstGeom>
-          <a:noFill/>
-        </p:spPr>
-        <p:txBody>
-          <a:bodyPr wrap="square" lIns="45720" rIns="45720" tIns="18288" bIns="18288" anchor="t">
-            <a:spAutoFit/>
-          </a:bodyPr>
-          <a:lstStyle/>
-          <a:p>
-            <a:pPr algn="l"/>
-            <a:r>
-              <a:rPr sz="2280" b="1" i="0">
-                <a:solidFill>
-                  <a:srgbClr val="1A1A1A"/>
-                </a:solidFill>
-                <a:latin typeface="Lexend"/>
-              </a:rPr>
-              <a:t>How many centimeters is that?</a:t>
-            </a:r>
-          </a:p>
-        </p:txBody>
-      </p:sp>
       <p:pic>
         <p:nvPicPr>
-          <p:cNvPr id="10" name="Picture 9" descr="563291572bb5ac31.png"/>
+          <p:cNvPr id="8" name="Picture 7" descr="e3914b43cbb52236.png"/>
           <p:cNvPicPr>
             <a:picLocks noChangeAspect="1"/>
           </p:cNvPicPr>
@@ -6027,7 +6206,101 @@
         </p:blipFill>
         <p:spPr>
           <a:xfrm>
-            <a:off x="4948428" y="3150836"/>
+            <a:off x="1234440" y="1956815"/>
+            <a:ext cx="1844040" cy="243840"/>
+          </a:xfrm>
+          <a:prstGeom prst="rect">
+            <a:avLst/>
+          </a:prstGeom>
+        </p:spPr>
+      </p:pic>
+      <p:sp>
+        <p:nvSpPr>
+          <p:cNvPr id="9" name="TextBox 8"/>
+          <p:cNvSpPr txBox="1"/>
+          <p:nvPr/>
+        </p:nvSpPr>
+        <p:spPr>
+          <a:xfrm>
+            <a:off x="3078480" y="1851660"/>
+            <a:ext cx="3267008" cy="457200"/>
+          </a:xfrm>
+          <a:prstGeom prst="rect">
+            <a:avLst/>
+          </a:prstGeom>
+          <a:noFill/>
+        </p:spPr>
+        <p:txBody>
+          <a:bodyPr wrap="none" lIns="45720" rIns="45720" tIns="18288" bIns="18288" anchor="ctr">
+            <a:noAutofit/>
+          </a:bodyPr>
+          <a:lstStyle/>
+          <a:p>
+            <a:pPr algn="l"/>
+            <a:r>
+              <a:rPr sz="2280" b="0" i="0">
+                <a:solidFill>
+                  <a:srgbClr val="1A1A1A"/>
+                </a:solidFill>
+                <a:latin typeface="Lexend"/>
+              </a:rPr>
+              <a:t>. A ruler is 20 in long.</a:t>
+            </a:r>
+          </a:p>
+        </p:txBody>
+      </p:sp>
+      <p:sp>
+        <p:nvSpPr>
+          <p:cNvPr id="10" name="TextBox 9"/>
+          <p:cNvSpPr txBox="1"/>
+          <p:nvPr/>
+        </p:nvSpPr>
+        <p:spPr>
+          <a:xfrm>
+            <a:off x="1234440" y="2487168"/>
+            <a:ext cx="10058400" cy="429370"/>
+          </a:xfrm>
+          <a:prstGeom prst="rect">
+            <a:avLst/>
+          </a:prstGeom>
+          <a:noFill/>
+        </p:spPr>
+        <p:txBody>
+          <a:bodyPr wrap="square" lIns="45720" rIns="45720" tIns="18288" bIns="18288" anchor="t">
+            <a:spAutoFit/>
+          </a:bodyPr>
+          <a:lstStyle/>
+          <a:p>
+            <a:pPr algn="l"/>
+            <a:r>
+              <a:rPr sz="2280" b="1" i="0">
+                <a:solidFill>
+                  <a:srgbClr val="1A1A1A"/>
+                </a:solidFill>
+                <a:latin typeface="Lexend"/>
+              </a:rPr>
+              <a:t>How many centimeters is that?</a:t>
+            </a:r>
+          </a:p>
+        </p:txBody>
+      </p:sp>
+      <p:pic>
+        <p:nvPicPr>
+          <p:cNvPr id="11" name="Picture 10" descr="563291572bb5ac31.png"/>
+          <p:cNvPicPr>
+            <a:picLocks noChangeAspect="1"/>
+          </p:cNvPicPr>
+          <p:nvPr/>
+        </p:nvPicPr>
+        <p:blipFill>
+          <a:blip r:embed="rId3"/>
+          <a:stretch>
+            <a:fillRect/>
+          </a:stretch>
+        </p:blipFill>
+        <p:spPr>
+          <a:xfrm>
+            <a:off x="4948428" y="3242102"/>
             <a:ext cx="2374392" cy="252984"/>
           </a:xfrm>
           <a:prstGeom prst="rect">
@@ -6037,7 +6310,7 @@
       </p:pic>
       <p:sp>
         <p:nvSpPr>
-          <p:cNvPr id="11" name="TextBox 10"/>
+          <p:cNvPr id="12" name="TextBox 11"/>
           <p:cNvSpPr txBox="1"/>
           <p:nvPr/>
         </p:nvSpPr>
@@ -6298,15 +6571,74 @@
           </a:p>
         </p:txBody>
       </p:sp>
-      <p:sp>
-        <p:nvSpPr>
-          <p:cNvPr id="8" name="TextBox 7"/>
-          <p:cNvSpPr txBox="1"/>
-          <p:nvPr/>
-        </p:nvSpPr>
-        <p:spPr>
-          <a:xfrm>
-            <a:off x="1234440" y="1874519"/>
+      <p:pic>
+        <p:nvPicPr>
+          <p:cNvPr id="8" name="Picture 7" descr="8f784bf30c7681cf.png"/>
+          <p:cNvPicPr>
+            <a:picLocks noChangeAspect="1"/>
+          </p:cNvPicPr>
+          <p:nvPr/>
+        </p:nvPicPr>
+        <p:blipFill>
+          <a:blip r:embed="rId2"/>
+          <a:stretch>
+            <a:fillRect/>
+          </a:stretch>
+        </p:blipFill>
+        <p:spPr>
+          <a:xfrm>
+            <a:off x="1234440" y="1956815"/>
+            <a:ext cx="1831848" cy="243840"/>
+          </a:xfrm>
+          <a:prstGeom prst="rect">
+            <a:avLst/>
+          </a:prstGeom>
+        </p:spPr>
+      </p:pic>
+      <p:sp>
+        <p:nvSpPr>
+          <p:cNvPr id="9" name="TextBox 8"/>
+          <p:cNvSpPr txBox="1"/>
+          <p:nvPr/>
+        </p:nvSpPr>
+        <p:spPr>
+          <a:xfrm>
+            <a:off x="3066288" y="1851660"/>
+            <a:ext cx="3686644" cy="457200"/>
+          </a:xfrm>
+          <a:prstGeom prst="rect">
+            <a:avLst/>
+          </a:prstGeom>
+          <a:noFill/>
+        </p:spPr>
+        <p:txBody>
+          <a:bodyPr wrap="none" lIns="45720" rIns="45720" tIns="18288" bIns="18288" anchor="ctr">
+            <a:noAutofit/>
+          </a:bodyPr>
+          <a:lstStyle/>
+          <a:p>
+            <a:pPr algn="l"/>
+            <a:r>
+              <a:rPr sz="2280" b="0" i="0">
+                <a:solidFill>
+                  <a:srgbClr val="1A1A1A"/>
+                </a:solidFill>
+                <a:latin typeface="Lexend"/>
+              </a:rPr>
+              <a:t>. A phone is 20 cm long.</a:t>
+            </a:r>
+          </a:p>
+        </p:txBody>
+      </p:sp>
+      <p:sp>
+        <p:nvSpPr>
+          <p:cNvPr id="10" name="TextBox 9"/>
+          <p:cNvSpPr txBox="1"/>
+          <p:nvPr/>
+        </p:nvSpPr>
+        <p:spPr>
+          <a:xfrm>
+            <a:off x="1234440" y="2487168"/>
             <a:ext cx="10058400" cy="429370"/>
           </a:xfrm>
           <a:prstGeom prst="rect">
@@ -6322,47 +6654,12 @@
           <a:p>
             <a:pPr algn="l"/>
             <a:r>
-              <a:rPr sz="2280" b="0" i="0">
+              <a:rPr sz="2280" b="1" i="0">
                 <a:solidFill>
                   <a:srgbClr val="1A1A1A"/>
                 </a:solidFill>
                 <a:latin typeface="Lexend"/>
               </a:rPr>
-              <a:t>1 cm = 0.39 in. A phone is 20 cm long.</a:t>
-            </a:r>
-          </a:p>
-        </p:txBody>
-      </p:sp>
-      <p:sp>
-        <p:nvSpPr>
-          <p:cNvPr id="9" name="TextBox 8"/>
-          <p:cNvSpPr txBox="1"/>
-          <p:nvPr/>
-        </p:nvSpPr>
-        <p:spPr>
-          <a:xfrm>
-            <a:off x="1234440" y="2413618"/>
-            <a:ext cx="10058400" cy="429370"/>
-          </a:xfrm>
-          <a:prstGeom prst="rect">
-            <a:avLst/>
-          </a:prstGeom>
-          <a:noFill/>
-        </p:spPr>
-        <p:txBody>
-          <a:bodyPr wrap="square" lIns="45720" rIns="45720" tIns="18288" bIns="18288" anchor="t">
-            <a:spAutoFit/>
-          </a:bodyPr>
-          <a:lstStyle/>
-          <a:p>
-            <a:pPr algn="l"/>
-            <a:r>
-              <a:rPr sz="2280" b="1" i="0">
-                <a:solidFill>
-                  <a:srgbClr val="1A1A1A"/>
-                </a:solidFill>
-                <a:latin typeface="Lexend"/>
-              </a:rPr>
               <a:t>How many inches is that?</a:t>
             </a:r>
           </a:p>
@@ -6370,7 +6667,7 @@
       </p:sp>
       <p:sp>
         <p:nvSpPr>
-          <p:cNvPr id="10" name="TextBox 9"/>
+          <p:cNvPr id="11" name="TextBox 10"/>
           <p:cNvSpPr txBox="1"/>
           <p:nvPr/>
         </p:nvSpPr>
@@ -6631,79 +6928,9 @@
           </a:p>
         </p:txBody>
       </p:sp>
-      <p:sp>
-        <p:nvSpPr>
-          <p:cNvPr id="8" name="TextBox 7"/>
-          <p:cNvSpPr txBox="1"/>
-          <p:nvPr/>
-        </p:nvSpPr>
-        <p:spPr>
-          <a:xfrm>
-            <a:off x="1234440" y="1874519"/>
-            <a:ext cx="10058400" cy="429370"/>
-          </a:xfrm>
-          <a:prstGeom prst="rect">
-            <a:avLst/>
-          </a:prstGeom>
-          <a:noFill/>
-        </p:spPr>
-        <p:txBody>
-          <a:bodyPr wrap="square" lIns="45720" rIns="45720" tIns="18288" bIns="18288" anchor="t">
-            <a:spAutoFit/>
-          </a:bodyPr>
-          <a:lstStyle/>
-          <a:p>
-            <a:pPr algn="l"/>
-            <a:r>
-              <a:rPr sz="2280" b="0" i="0">
-                <a:solidFill>
-                  <a:srgbClr val="1A1A1A"/>
-                </a:solidFill>
-                <a:latin typeface="Lexend"/>
-              </a:rPr>
-              <a:t>1 cm = 0.39 in. A phone is 20 cm long.</a:t>
-            </a:r>
-          </a:p>
-        </p:txBody>
-      </p:sp>
-      <p:sp>
-        <p:nvSpPr>
-          <p:cNvPr id="9" name="TextBox 8"/>
-          <p:cNvSpPr txBox="1"/>
-          <p:nvPr/>
-        </p:nvSpPr>
-        <p:spPr>
-          <a:xfrm>
-            <a:off x="1234440" y="2413618"/>
-            <a:ext cx="10058400" cy="429370"/>
-          </a:xfrm>
-          <a:prstGeom prst="rect">
-            <a:avLst/>
-          </a:prstGeom>
-          <a:noFill/>
-        </p:spPr>
-        <p:txBody>
-          <a:bodyPr wrap="square" lIns="45720" rIns="45720" tIns="18288" bIns="18288" anchor="t">
-            <a:spAutoFit/>
-          </a:bodyPr>
-          <a:lstStyle/>
-          <a:p>
-            <a:pPr algn="l"/>
-            <a:r>
-              <a:rPr sz="2280" b="1" i="0">
-                <a:solidFill>
-                  <a:srgbClr val="1A1A1A"/>
-                </a:solidFill>
-                <a:latin typeface="Lexend"/>
-              </a:rPr>
-              <a:t>How many inches is that?</a:t>
-            </a:r>
-          </a:p>
-        </p:txBody>
-      </p:sp>
       <p:pic>
         <p:nvPicPr>
-          <p:cNvPr id="10" name="Picture 9" descr="a6122b463c812dde.png"/>
+          <p:cNvPr id="8" name="Picture 7" descr="6c8af11a6118811c.png"/>
           <p:cNvPicPr>
             <a:picLocks noChangeAspect="1"/>
           </p:cNvPicPr>
@@ -6717,7 +6944,101 @@
         </p:blipFill>
         <p:spPr>
           <a:xfrm>
-            <a:off x="5067299" y="3150836"/>
+            <a:off x="1234440" y="1956815"/>
+            <a:ext cx="1831848" cy="243840"/>
+          </a:xfrm>
+          <a:prstGeom prst="rect">
+            <a:avLst/>
+          </a:prstGeom>
+        </p:spPr>
+      </p:pic>
+      <p:sp>
+        <p:nvSpPr>
+          <p:cNvPr id="9" name="TextBox 8"/>
+          <p:cNvSpPr txBox="1"/>
+          <p:nvPr/>
+        </p:nvSpPr>
+        <p:spPr>
+          <a:xfrm>
+            <a:off x="3066288" y="1851660"/>
+            <a:ext cx="3686644" cy="457200"/>
+          </a:xfrm>
+          <a:prstGeom prst="rect">
+            <a:avLst/>
+          </a:prstGeom>
+          <a:noFill/>
+        </p:spPr>
+        <p:txBody>
+          <a:bodyPr wrap="none" lIns="45720" rIns="45720" tIns="18288" bIns="18288" anchor="ctr">
+            <a:noAutofit/>
+          </a:bodyPr>
+          <a:lstStyle/>
+          <a:p>
+            <a:pPr algn="l"/>
+            <a:r>
+              <a:rPr sz="2280" b="0" i="0">
+                <a:solidFill>
+                  <a:srgbClr val="1A1A1A"/>
+                </a:solidFill>
+                <a:latin typeface="Lexend"/>
+              </a:rPr>
+              <a:t>. A phone is 20 cm long.</a:t>
+            </a:r>
+          </a:p>
+        </p:txBody>
+      </p:sp>
+      <p:sp>
+        <p:nvSpPr>
+          <p:cNvPr id="10" name="TextBox 9"/>
+          <p:cNvSpPr txBox="1"/>
+          <p:nvPr/>
+        </p:nvSpPr>
+        <p:spPr>
+          <a:xfrm>
+            <a:off x="1234440" y="2487168"/>
+            <a:ext cx="10058400" cy="429370"/>
+          </a:xfrm>
+          <a:prstGeom prst="rect">
+            <a:avLst/>
+          </a:prstGeom>
+          <a:noFill/>
+        </p:spPr>
+        <p:txBody>
+          <a:bodyPr wrap="square" lIns="45720" rIns="45720" tIns="18288" bIns="18288" anchor="t">
+            <a:spAutoFit/>
+          </a:bodyPr>
+          <a:lstStyle/>
+          <a:p>
+            <a:pPr algn="l"/>
+            <a:r>
+              <a:rPr sz="2280" b="1" i="0">
+                <a:solidFill>
+                  <a:srgbClr val="1A1A1A"/>
+                </a:solidFill>
+                <a:latin typeface="Lexend"/>
+              </a:rPr>
+              <a:t>How many inches is that?</a:t>
+            </a:r>
+          </a:p>
+        </p:txBody>
+      </p:sp>
+      <p:pic>
+        <p:nvPicPr>
+          <p:cNvPr id="11" name="Picture 10" descr="a6122b463c812dde.png"/>
+          <p:cNvPicPr>
+            <a:picLocks noChangeAspect="1"/>
+          </p:cNvPicPr>
+          <p:nvPr/>
+        </p:nvPicPr>
+        <p:blipFill>
+          <a:blip r:embed="rId3"/>
+          <a:stretch>
+            <a:fillRect/>
+          </a:stretch>
+        </p:blipFill>
+        <p:spPr>
+          <a:xfrm>
+            <a:off x="5067299" y="3242102"/>
             <a:ext cx="2136648" cy="252984"/>
           </a:xfrm>
           <a:prstGeom prst="rect">
@@ -6727,7 +7048,7 @@
       </p:pic>
       <p:sp>
         <p:nvSpPr>
-          <p:cNvPr id="11" name="TextBox 10"/>
+          <p:cNvPr id="12" name="TextBox 11"/>
           <p:cNvSpPr txBox="1"/>
           <p:nvPr/>
         </p:nvSpPr>
@@ -6996,8 +7317,8 @@
         </p:nvSpPr>
         <p:spPr>
           <a:xfrm>
-            <a:off x="1874519" y="1440180"/>
-            <a:ext cx="7580215" cy="457200"/>
+            <a:off x="1874519" y="1504188"/>
+            <a:ext cx="1071364" cy="457200"/>
           </a:xfrm>
           <a:prstGeom prst="rect">
             <a:avLst/>
@@ -7018,84 +7339,14 @@
                 </a:solidFill>
                 <a:latin typeface="Lexend"/>
               </a:rPr>
-              <a:t>1.   At ¼ in : 1 ft, how long is a 10-ft wall on the plan?</a:t>
-            </a:r>
-          </a:p>
-        </p:txBody>
-      </p:sp>
-      <p:sp>
-        <p:nvSpPr>
-          <p:cNvPr id="9" name="TextBox 8"/>
-          <p:cNvSpPr txBox="1"/>
-          <p:nvPr/>
-        </p:nvSpPr>
-        <p:spPr>
-          <a:xfrm>
-            <a:off x="1874519" y="2052828"/>
-            <a:ext cx="9336740" cy="457200"/>
-          </a:xfrm>
-          <a:prstGeom prst="rect">
-            <a:avLst/>
-          </a:prstGeom>
-          <a:noFill/>
-        </p:spPr>
-        <p:txBody>
-          <a:bodyPr wrap="none" lIns="45720" rIns="45720" tIns="18288" bIns="18288" anchor="ctr">
-            <a:noAutofit/>
-          </a:bodyPr>
-          <a:lstStyle/>
-          <a:p>
-            <a:pPr algn="l"/>
-            <a:r>
-              <a:rPr sz="2180" b="0" i="0">
-                <a:solidFill>
-                  <a:srgbClr val="1A1A1A"/>
-                </a:solidFill>
-                <a:latin typeface="Lexend"/>
-              </a:rPr>
-              <a:t>2.   A 14 cm side becomes 7 cm in the copy. Find the scale factor.</a:t>
-            </a:r>
-          </a:p>
-        </p:txBody>
-      </p:sp>
-      <p:sp>
-        <p:nvSpPr>
-          <p:cNvPr id="10" name="TextBox 9"/>
-          <p:cNvSpPr txBox="1"/>
-          <p:nvPr/>
-        </p:nvSpPr>
-        <p:spPr>
-          <a:xfrm>
-            <a:off x="1874519" y="2665476"/>
-            <a:ext cx="3356481" cy="457200"/>
-          </a:xfrm>
-          <a:prstGeom prst="rect">
-            <a:avLst/>
-          </a:prstGeom>
-          <a:noFill/>
-        </p:spPr>
-        <p:txBody>
-          <a:bodyPr wrap="none" lIns="45720" rIns="45720" tIns="18288" bIns="18288" anchor="ctr">
-            <a:noAutofit/>
-          </a:bodyPr>
-          <a:lstStyle/>
-          <a:p>
-            <a:pPr algn="l"/>
-            <a:r>
-              <a:rPr sz="2180" b="0" i="0">
-                <a:solidFill>
-                  <a:srgbClr val="1A1A1A"/>
-                </a:solidFill>
-                <a:latin typeface="Lexend"/>
-              </a:rPr>
-              <a:t>3.   Find the quotient:  </a:t>
+              <a:t>1.   At </a:t>
             </a:r>
           </a:p>
         </p:txBody>
       </p:sp>
       <p:pic>
         <p:nvPicPr>
-          <p:cNvPr id="11" name="Picture 10" descr="cfca3ed0d980782e.png"/>
+          <p:cNvPr id="9" name="Picture 8" descr="9ca189c78b28bad0.png"/>
           <p:cNvPicPr>
             <a:picLocks noChangeAspect="1"/>
           </p:cNvPicPr>
@@ -7109,8 +7360,8 @@
         </p:blipFill>
         <p:spPr>
           <a:xfrm>
-            <a:off x="5093841" y="2781300"/>
-            <a:ext cx="1161288" cy="225552"/>
+            <a:off x="2808724" y="1463040"/>
+            <a:ext cx="1185672" cy="539496"/>
           </a:xfrm>
           <a:prstGeom prst="rect">
             <a:avLst/>
@@ -7119,14 +7370,14 @@
       </p:pic>
       <p:sp>
         <p:nvSpPr>
-          <p:cNvPr id="12" name="TextBox 11"/>
-          <p:cNvSpPr txBox="1"/>
-          <p:nvPr/>
-        </p:nvSpPr>
-        <p:spPr>
-          <a:xfrm>
-            <a:off x="1874519" y="3278124"/>
-            <a:ext cx="5672770" cy="457200"/>
+          <p:cNvPr id="10" name="TextBox 9"/>
+          <p:cNvSpPr txBox="1"/>
+          <p:nvPr/>
+        </p:nvSpPr>
+        <p:spPr>
+          <a:xfrm>
+            <a:off x="3994396" y="1504188"/>
+            <a:ext cx="5461953" cy="457200"/>
           </a:xfrm>
           <a:prstGeom prst="rect">
             <a:avLst/>
@@ -7147,7 +7398,195 @@
                 </a:solidFill>
                 <a:latin typeface="Lexend"/>
               </a:rPr>
-              <a:t>4.   12 in = 1 ft. How many feet is 30 in?</a:t>
+              <a:t>, how long is a 10-ft wall on the plan?</a:t>
+            </a:r>
+          </a:p>
+        </p:txBody>
+      </p:sp>
+      <p:sp>
+        <p:nvSpPr>
+          <p:cNvPr id="11" name="TextBox 10"/>
+          <p:cNvSpPr txBox="1"/>
+          <p:nvPr/>
+        </p:nvSpPr>
+        <p:spPr>
+          <a:xfrm>
+            <a:off x="1874519" y="2180844"/>
+            <a:ext cx="9336740" cy="457200"/>
+          </a:xfrm>
+          <a:prstGeom prst="rect">
+            <a:avLst/>
+          </a:prstGeom>
+          <a:noFill/>
+        </p:spPr>
+        <p:txBody>
+          <a:bodyPr wrap="none" lIns="45720" rIns="45720" tIns="18288" bIns="18288" anchor="ctr">
+            <a:noAutofit/>
+          </a:bodyPr>
+          <a:lstStyle/>
+          <a:p>
+            <a:pPr algn="l"/>
+            <a:r>
+              <a:rPr sz="2180" b="0" i="0">
+                <a:solidFill>
+                  <a:srgbClr val="1A1A1A"/>
+                </a:solidFill>
+                <a:latin typeface="Lexend"/>
+              </a:rPr>
+              <a:t>2.   A 14 cm side becomes 7 cm in the copy. Find the scale factor.</a:t>
+            </a:r>
+          </a:p>
+        </p:txBody>
+      </p:sp>
+      <p:sp>
+        <p:nvSpPr>
+          <p:cNvPr id="12" name="TextBox 11"/>
+          <p:cNvSpPr txBox="1"/>
+          <p:nvPr/>
+        </p:nvSpPr>
+        <p:spPr>
+          <a:xfrm>
+            <a:off x="1874519" y="2793492"/>
+            <a:ext cx="3356481" cy="457200"/>
+          </a:xfrm>
+          <a:prstGeom prst="rect">
+            <a:avLst/>
+          </a:prstGeom>
+          <a:noFill/>
+        </p:spPr>
+        <p:txBody>
+          <a:bodyPr wrap="none" lIns="45720" rIns="45720" tIns="18288" bIns="18288" anchor="ctr">
+            <a:noAutofit/>
+          </a:bodyPr>
+          <a:lstStyle/>
+          <a:p>
+            <a:pPr algn="l"/>
+            <a:r>
+              <a:rPr sz="2180" b="0" i="0">
+                <a:solidFill>
+                  <a:srgbClr val="1A1A1A"/>
+                </a:solidFill>
+                <a:latin typeface="Lexend"/>
+              </a:rPr>
+              <a:t>3.   Find the quotient:  </a:t>
+            </a:r>
+          </a:p>
+        </p:txBody>
+      </p:sp>
+      <p:pic>
+        <p:nvPicPr>
+          <p:cNvPr id="13" name="Picture 12" descr="cfca3ed0d980782e.png"/>
+          <p:cNvPicPr>
+            <a:picLocks noChangeAspect="1"/>
+          </p:cNvPicPr>
+          <p:nvPr/>
+        </p:nvPicPr>
+        <p:blipFill>
+          <a:blip r:embed="rId3"/>
+          <a:stretch>
+            <a:fillRect/>
+          </a:stretch>
+        </p:blipFill>
+        <p:spPr>
+          <a:xfrm>
+            <a:off x="5093841" y="2912173"/>
+            <a:ext cx="1161288" cy="225552"/>
+          </a:xfrm>
+          <a:prstGeom prst="rect">
+            <a:avLst/>
+          </a:prstGeom>
+        </p:spPr>
+      </p:pic>
+      <p:sp>
+        <p:nvSpPr>
+          <p:cNvPr id="14" name="TextBox 13"/>
+          <p:cNvSpPr txBox="1"/>
+          <p:nvPr/>
+        </p:nvSpPr>
+        <p:spPr>
+          <a:xfrm>
+            <a:off x="1874519" y="3406140"/>
+            <a:ext cx="706881" cy="457200"/>
+          </a:xfrm>
+          <a:prstGeom prst="rect">
+            <a:avLst/>
+          </a:prstGeom>
+          <a:noFill/>
+        </p:spPr>
+        <p:txBody>
+          <a:bodyPr wrap="none" lIns="45720" rIns="45720" tIns="18288" bIns="18288" anchor="ctr">
+            <a:noAutofit/>
+          </a:bodyPr>
+          <a:lstStyle/>
+          <a:p>
+            <a:pPr algn="l"/>
+            <a:r>
+              <a:rPr sz="2180" b="0" i="0">
+                <a:solidFill>
+                  <a:srgbClr val="1A1A1A"/>
+                </a:solidFill>
+                <a:latin typeface="Lexend"/>
+              </a:rPr>
+              <a:t>4.   </a:t>
+            </a:r>
+          </a:p>
+        </p:txBody>
+      </p:sp>
+      <p:pic>
+        <p:nvPicPr>
+          <p:cNvPr id="15" name="Picture 14" descr="16140fa0016efc2b.png"/>
+          <p:cNvPicPr>
+            <a:picLocks noChangeAspect="1"/>
+          </p:cNvPicPr>
+          <p:nvPr/>
+        </p:nvPicPr>
+        <p:blipFill>
+          <a:blip r:embed="rId4"/>
+          <a:stretch>
+            <a:fillRect/>
+          </a:stretch>
+        </p:blipFill>
+        <p:spPr>
+          <a:xfrm>
+            <a:off x="2444241" y="3503485"/>
+            <a:ext cx="1362456" cy="240791"/>
+          </a:xfrm>
+          <a:prstGeom prst="rect">
+            <a:avLst/>
+          </a:prstGeom>
+        </p:spPr>
+      </p:pic>
+      <p:sp>
+        <p:nvSpPr>
+          <p:cNvPr id="16" name="TextBox 15"/>
+          <p:cNvSpPr txBox="1"/>
+          <p:nvPr/>
+        </p:nvSpPr>
+        <p:spPr>
+          <a:xfrm>
+            <a:off x="3806697" y="3406140"/>
+            <a:ext cx="3738599" cy="457200"/>
+          </a:xfrm>
+          <a:prstGeom prst="rect">
+            <a:avLst/>
+          </a:prstGeom>
+          <a:noFill/>
+        </p:spPr>
+        <p:txBody>
+          <a:bodyPr wrap="none" lIns="45720" rIns="45720" tIns="18288" bIns="18288" anchor="ctr">
+            <a:noAutofit/>
+          </a:bodyPr>
+          <a:lstStyle/>
+          <a:p>
+            <a:pPr algn="l"/>
+            <a:r>
+              <a:rPr sz="2180" b="0" i="0">
+                <a:solidFill>
+                  <a:srgbClr val="1A1A1A"/>
+                </a:solidFill>
+                <a:latin typeface="Lexend"/>
+              </a:rPr>
+              <a:t>. How many feet is 30 in?</a:t>
             </a:r>
           </a:p>
         </p:txBody>
@@ -7380,15 +7819,74 @@
           </a:p>
         </p:txBody>
       </p:sp>
-      <p:sp>
-        <p:nvSpPr>
-          <p:cNvPr id="8" name="TextBox 7"/>
-          <p:cNvSpPr txBox="1"/>
-          <p:nvPr/>
-        </p:nvSpPr>
-        <p:spPr>
-          <a:xfrm>
-            <a:off x="1234440" y="1874519"/>
+      <p:pic>
+        <p:nvPicPr>
+          <p:cNvPr id="8" name="Picture 7" descr="673c0080fbe2317f.png"/>
+          <p:cNvPicPr>
+            <a:picLocks noChangeAspect="1"/>
+          </p:cNvPicPr>
+          <p:nvPr/>
+        </p:nvPicPr>
+        <p:blipFill>
+          <a:blip r:embed="rId2"/>
+          <a:stretch>
+            <a:fillRect/>
+          </a:stretch>
+        </p:blipFill>
+        <p:spPr>
+          <a:xfrm>
+            <a:off x="1234440" y="1956815"/>
+            <a:ext cx="1901952" cy="243840"/>
+          </a:xfrm>
+          <a:prstGeom prst="rect">
+            <a:avLst/>
+          </a:prstGeom>
+        </p:spPr>
+      </p:pic>
+      <p:sp>
+        <p:nvSpPr>
+          <p:cNvPr id="9" name="TextBox 8"/>
+          <p:cNvSpPr txBox="1"/>
+          <p:nvPr/>
+        </p:nvSpPr>
+        <p:spPr>
+          <a:xfrm>
+            <a:off x="3136392" y="1851660"/>
+            <a:ext cx="3155305" cy="457200"/>
+          </a:xfrm>
+          <a:prstGeom prst="rect">
+            <a:avLst/>
+          </a:prstGeom>
+          <a:noFill/>
+        </p:spPr>
+        <p:txBody>
+          <a:bodyPr wrap="none" lIns="45720" rIns="45720" tIns="18288" bIns="18288" anchor="ctr">
+            <a:noAutofit/>
+          </a:bodyPr>
+          <a:lstStyle/>
+          <a:p>
+            <a:pPr algn="l"/>
+            <a:r>
+              <a:rPr sz="2280" b="0" i="0">
+                <a:solidFill>
+                  <a:srgbClr val="1A1A1A"/>
+                </a:solidFill>
+                <a:latin typeface="Lexend"/>
+              </a:rPr>
+              <a:t>. A race is 5 mi long.</a:t>
+            </a:r>
+          </a:p>
+        </p:txBody>
+      </p:sp>
+      <p:sp>
+        <p:nvSpPr>
+          <p:cNvPr id="10" name="TextBox 9"/>
+          <p:cNvSpPr txBox="1"/>
+          <p:nvPr/>
+        </p:nvSpPr>
+        <p:spPr>
+          <a:xfrm>
+            <a:off x="1234440" y="2487168"/>
             <a:ext cx="10058400" cy="429370"/>
           </a:xfrm>
           <a:prstGeom prst="rect">
@@ -7404,47 +7902,12 @@
           <a:p>
             <a:pPr algn="l"/>
             <a:r>
-              <a:rPr sz="2280" b="0" i="0">
+              <a:rPr sz="2280" b="1" i="0">
                 <a:solidFill>
                   <a:srgbClr val="1A1A1A"/>
                 </a:solidFill>
                 <a:latin typeface="Lexend"/>
               </a:rPr>
-              <a:t>1 mi = 1.61 km. A race is 5 mi long.</a:t>
-            </a:r>
-          </a:p>
-        </p:txBody>
-      </p:sp>
-      <p:sp>
-        <p:nvSpPr>
-          <p:cNvPr id="9" name="TextBox 8"/>
-          <p:cNvSpPr txBox="1"/>
-          <p:nvPr/>
-        </p:nvSpPr>
-        <p:spPr>
-          <a:xfrm>
-            <a:off x="1234440" y="2413618"/>
-            <a:ext cx="10058400" cy="429370"/>
-          </a:xfrm>
-          <a:prstGeom prst="rect">
-            <a:avLst/>
-          </a:prstGeom>
-          <a:noFill/>
-        </p:spPr>
-        <p:txBody>
-          <a:bodyPr wrap="square" lIns="45720" rIns="45720" tIns="18288" bIns="18288" anchor="t">
-            <a:spAutoFit/>
-          </a:bodyPr>
-          <a:lstStyle/>
-          <a:p>
-            <a:pPr algn="l"/>
-            <a:r>
-              <a:rPr sz="2280" b="1" i="0">
-                <a:solidFill>
-                  <a:srgbClr val="1A1A1A"/>
-                </a:solidFill>
-                <a:latin typeface="Lexend"/>
-              </a:rPr>
               <a:t>How many kilometers is that?</a:t>
             </a:r>
           </a:p>
@@ -7452,7 +7915,7 @@
       </p:sp>
       <p:sp>
         <p:nvSpPr>
-          <p:cNvPr id="10" name="TextBox 9"/>
+          <p:cNvPr id="11" name="TextBox 10"/>
           <p:cNvSpPr txBox="1"/>
           <p:nvPr/>
         </p:nvSpPr>
@@ -7713,79 +8176,9 @@
           </a:p>
         </p:txBody>
       </p:sp>
-      <p:sp>
-        <p:nvSpPr>
-          <p:cNvPr id="8" name="TextBox 7"/>
-          <p:cNvSpPr txBox="1"/>
-          <p:nvPr/>
-        </p:nvSpPr>
-        <p:spPr>
-          <a:xfrm>
-            <a:off x="1234440" y="1874519"/>
-            <a:ext cx="10058400" cy="429370"/>
-          </a:xfrm>
-          <a:prstGeom prst="rect">
-            <a:avLst/>
-          </a:prstGeom>
-          <a:noFill/>
-        </p:spPr>
-        <p:txBody>
-          <a:bodyPr wrap="square" lIns="45720" rIns="45720" tIns="18288" bIns="18288" anchor="t">
-            <a:spAutoFit/>
-          </a:bodyPr>
-          <a:lstStyle/>
-          <a:p>
-            <a:pPr algn="l"/>
-            <a:r>
-              <a:rPr sz="2280" b="0" i="0">
-                <a:solidFill>
-                  <a:srgbClr val="1A1A1A"/>
-                </a:solidFill>
-                <a:latin typeface="Lexend"/>
-              </a:rPr>
-              <a:t>1 mi = 1.61 km. A race is 5 mi long.</a:t>
-            </a:r>
-          </a:p>
-        </p:txBody>
-      </p:sp>
-      <p:sp>
-        <p:nvSpPr>
-          <p:cNvPr id="9" name="TextBox 8"/>
-          <p:cNvSpPr txBox="1"/>
-          <p:nvPr/>
-        </p:nvSpPr>
-        <p:spPr>
-          <a:xfrm>
-            <a:off x="1234440" y="2413618"/>
-            <a:ext cx="10058400" cy="429370"/>
-          </a:xfrm>
-          <a:prstGeom prst="rect">
-            <a:avLst/>
-          </a:prstGeom>
-          <a:noFill/>
-        </p:spPr>
-        <p:txBody>
-          <a:bodyPr wrap="square" lIns="45720" rIns="45720" tIns="18288" bIns="18288" anchor="t">
-            <a:spAutoFit/>
-          </a:bodyPr>
-          <a:lstStyle/>
-          <a:p>
-            <a:pPr algn="l"/>
-            <a:r>
-              <a:rPr sz="2280" b="1" i="0">
-                <a:solidFill>
-                  <a:srgbClr val="1A1A1A"/>
-                </a:solidFill>
-                <a:latin typeface="Lexend"/>
-              </a:rPr>
-              <a:t>How many kilometers is that?</a:t>
-            </a:r>
-          </a:p>
-        </p:txBody>
-      </p:sp>
       <p:pic>
         <p:nvPicPr>
-          <p:cNvPr id="10" name="Picture 9" descr="ed0994c23a49387f.png"/>
+          <p:cNvPr id="8" name="Picture 7" descr="e62e96f3d6ecb8f1.png"/>
           <p:cNvPicPr>
             <a:picLocks noChangeAspect="1"/>
           </p:cNvPicPr>
@@ -7799,7 +8192,101 @@
         </p:blipFill>
         <p:spPr>
           <a:xfrm>
-            <a:off x="5081015" y="3149312"/>
+            <a:off x="1234440" y="1956815"/>
+            <a:ext cx="1901952" cy="243840"/>
+          </a:xfrm>
+          <a:prstGeom prst="rect">
+            <a:avLst/>
+          </a:prstGeom>
+        </p:spPr>
+      </p:pic>
+      <p:sp>
+        <p:nvSpPr>
+          <p:cNvPr id="9" name="TextBox 8"/>
+          <p:cNvSpPr txBox="1"/>
+          <p:nvPr/>
+        </p:nvSpPr>
+        <p:spPr>
+          <a:xfrm>
+            <a:off x="3136392" y="1851660"/>
+            <a:ext cx="3155305" cy="457200"/>
+          </a:xfrm>
+          <a:prstGeom prst="rect">
+            <a:avLst/>
+          </a:prstGeom>
+          <a:noFill/>
+        </p:spPr>
+        <p:txBody>
+          <a:bodyPr wrap="none" lIns="45720" rIns="45720" tIns="18288" bIns="18288" anchor="ctr">
+            <a:noAutofit/>
+          </a:bodyPr>
+          <a:lstStyle/>
+          <a:p>
+            <a:pPr algn="l"/>
+            <a:r>
+              <a:rPr sz="2280" b="0" i="0">
+                <a:solidFill>
+                  <a:srgbClr val="1A1A1A"/>
+                </a:solidFill>
+                <a:latin typeface="Lexend"/>
+              </a:rPr>
+              <a:t>. A race is 5 mi long.</a:t>
+            </a:r>
+          </a:p>
+        </p:txBody>
+      </p:sp>
+      <p:sp>
+        <p:nvSpPr>
+          <p:cNvPr id="10" name="TextBox 9"/>
+          <p:cNvSpPr txBox="1"/>
+          <p:nvPr/>
+        </p:nvSpPr>
+        <p:spPr>
+          <a:xfrm>
+            <a:off x="1234440" y="2487168"/>
+            <a:ext cx="10058400" cy="429370"/>
+          </a:xfrm>
+          <a:prstGeom prst="rect">
+            <a:avLst/>
+          </a:prstGeom>
+          <a:noFill/>
+        </p:spPr>
+        <p:txBody>
+          <a:bodyPr wrap="square" lIns="45720" rIns="45720" tIns="18288" bIns="18288" anchor="t">
+            <a:spAutoFit/>
+          </a:bodyPr>
+          <a:lstStyle/>
+          <a:p>
+            <a:pPr algn="l"/>
+            <a:r>
+              <a:rPr sz="2280" b="1" i="0">
+                <a:solidFill>
+                  <a:srgbClr val="1A1A1A"/>
+                </a:solidFill>
+                <a:latin typeface="Lexend"/>
+              </a:rPr>
+              <a:t>How many kilometers is that?</a:t>
+            </a:r>
+          </a:p>
+        </p:txBody>
+      </p:sp>
+      <p:pic>
+        <p:nvPicPr>
+          <p:cNvPr id="11" name="Picture 10" descr="ed0994c23a49387f.png"/>
+          <p:cNvPicPr>
+            <a:picLocks noChangeAspect="1"/>
+          </p:cNvPicPr>
+          <p:nvPr/>
+        </p:nvPicPr>
+        <p:blipFill>
+          <a:blip r:embed="rId3"/>
+          <a:stretch>
+            <a:fillRect/>
+          </a:stretch>
+        </p:blipFill>
+        <p:spPr>
+          <a:xfrm>
+            <a:off x="5081015" y="3239054"/>
             <a:ext cx="2112264" cy="256032"/>
           </a:xfrm>
           <a:prstGeom prst="rect">
@@ -7809,7 +8296,7 @@
       </p:pic>
       <p:sp>
         <p:nvSpPr>
-          <p:cNvPr id="11" name="TextBox 10"/>
+          <p:cNvPr id="12" name="TextBox 11"/>
           <p:cNvSpPr txBox="1"/>
           <p:nvPr/>
         </p:nvSpPr>
@@ -8070,114 +8557,9 @@
           </a:p>
         </p:txBody>
       </p:sp>
-      <p:sp>
-        <p:nvSpPr>
-          <p:cNvPr id="8" name="TextBox 7"/>
-          <p:cNvSpPr txBox="1"/>
-          <p:nvPr/>
-        </p:nvSpPr>
-        <p:spPr>
-          <a:xfrm>
-            <a:off x="1234440" y="1874519"/>
-            <a:ext cx="10058400" cy="429370"/>
-          </a:xfrm>
-          <a:prstGeom prst="rect">
-            <a:avLst/>
-          </a:prstGeom>
-          <a:noFill/>
-        </p:spPr>
-        <p:txBody>
-          <a:bodyPr wrap="square" lIns="45720" rIns="45720" tIns="18288" bIns="18288" anchor="t">
-            <a:spAutoFit/>
-          </a:bodyPr>
-          <a:lstStyle/>
-          <a:p>
-            <a:pPr algn="l"/>
-            <a:r>
-              <a:rPr sz="2280" b="0" i="0">
-                <a:solidFill>
-                  <a:srgbClr val="1A1A1A"/>
-                </a:solidFill>
-                <a:latin typeface="Lexend"/>
-              </a:rPr>
-              <a:t>1 km = 0.62 mi. A trail is 5 km long.</a:t>
-            </a:r>
-          </a:p>
-        </p:txBody>
-      </p:sp>
-      <p:sp>
-        <p:nvSpPr>
-          <p:cNvPr id="9" name="TextBox 8"/>
-          <p:cNvSpPr txBox="1"/>
-          <p:nvPr/>
-        </p:nvSpPr>
-        <p:spPr>
-          <a:xfrm>
-            <a:off x="1234440" y="2413618"/>
-            <a:ext cx="10058400" cy="429370"/>
-          </a:xfrm>
-          <a:prstGeom prst="rect">
-            <a:avLst/>
-          </a:prstGeom>
-          <a:noFill/>
-        </p:spPr>
-        <p:txBody>
-          <a:bodyPr wrap="square" lIns="45720" rIns="45720" tIns="18288" bIns="18288" anchor="t">
-            <a:spAutoFit/>
-          </a:bodyPr>
-          <a:lstStyle/>
-          <a:p>
-            <a:pPr algn="l"/>
-            <a:r>
-              <a:rPr sz="2280" b="1" i="0">
-                <a:solidFill>
-                  <a:srgbClr val="1A1A1A"/>
-                </a:solidFill>
-                <a:latin typeface="Lexend"/>
-              </a:rPr>
-              <a:t>How many miles is that?</a:t>
-            </a:r>
-          </a:p>
-        </p:txBody>
-      </p:sp>
-      <p:sp>
-        <p:nvSpPr>
-          <p:cNvPr id="10" name="TextBox 9"/>
-          <p:cNvSpPr txBox="1"/>
-          <p:nvPr/>
-        </p:nvSpPr>
-        <p:spPr>
-          <a:xfrm>
-            <a:off x="1691640" y="3144740"/>
-            <a:ext cx="594360" cy="457200"/>
-          </a:xfrm>
-          <a:prstGeom prst="rect">
-            <a:avLst/>
-          </a:prstGeom>
-          <a:noFill/>
-        </p:spPr>
-        <p:txBody>
-          <a:bodyPr wrap="square" lIns="45720" rIns="45720" tIns="18288" bIns="18288" anchor="t">
-            <a:spAutoFit/>
-          </a:bodyPr>
-          <a:lstStyle/>
-          <a:p>
-            <a:pPr algn="l"/>
-            <a:r>
-              <a:rPr sz="2280" b="1" i="0">
-                <a:solidFill>
-                  <a:srgbClr val="1A1A1A"/>
-                </a:solidFill>
-                <a:latin typeface="Lexend"/>
-              </a:rPr>
-              <a:t>A.</a:t>
-            </a:r>
-          </a:p>
-        </p:txBody>
-      </p:sp>
       <p:pic>
         <p:nvPicPr>
-          <p:cNvPr id="11" name="Picture 10" descr="d576d2edbb6fc5a5.png"/>
+          <p:cNvPr id="8" name="Picture 7" descr="d2f86d8905c9108c.png"/>
           <p:cNvPicPr>
             <a:picLocks noChangeAspect="1"/>
           </p:cNvPicPr>
@@ -8191,8 +8573,8 @@
         </p:blipFill>
         <p:spPr>
           <a:xfrm>
-            <a:off x="2258568" y="3144740"/>
-            <a:ext cx="1264920" cy="301752"/>
+            <a:off x="1234440" y="1956815"/>
+            <a:ext cx="1950720" cy="243840"/>
           </a:xfrm>
           <a:prstGeom prst="rect">
             <a:avLst/>
@@ -8201,13 +8583,83 @@
       </p:pic>
       <p:sp>
         <p:nvSpPr>
-          <p:cNvPr id="12" name="TextBox 11"/>
-          <p:cNvSpPr txBox="1"/>
-          <p:nvPr/>
-        </p:nvSpPr>
-        <p:spPr>
-          <a:xfrm>
-            <a:off x="6537959" y="3144740"/>
+          <p:cNvPr id="9" name="TextBox 8"/>
+          <p:cNvSpPr txBox="1"/>
+          <p:nvPr/>
+        </p:nvSpPr>
+        <p:spPr>
+          <a:xfrm>
+            <a:off x="3185160" y="1851660"/>
+            <a:ext cx="3180484" cy="457200"/>
+          </a:xfrm>
+          <a:prstGeom prst="rect">
+            <a:avLst/>
+          </a:prstGeom>
+          <a:noFill/>
+        </p:spPr>
+        <p:txBody>
+          <a:bodyPr wrap="none" lIns="45720" rIns="45720" tIns="18288" bIns="18288" anchor="ctr">
+            <a:noAutofit/>
+          </a:bodyPr>
+          <a:lstStyle/>
+          <a:p>
+            <a:pPr algn="l"/>
+            <a:r>
+              <a:rPr sz="2280" b="0" i="0">
+                <a:solidFill>
+                  <a:srgbClr val="1A1A1A"/>
+                </a:solidFill>
+                <a:latin typeface="Lexend"/>
+              </a:rPr>
+              <a:t>. A trail is 5 km long.</a:t>
+            </a:r>
+          </a:p>
+        </p:txBody>
+      </p:sp>
+      <p:sp>
+        <p:nvSpPr>
+          <p:cNvPr id="10" name="TextBox 9"/>
+          <p:cNvSpPr txBox="1"/>
+          <p:nvPr/>
+        </p:nvSpPr>
+        <p:spPr>
+          <a:xfrm>
+            <a:off x="1234440" y="2487168"/>
+            <a:ext cx="10058400" cy="429370"/>
+          </a:xfrm>
+          <a:prstGeom prst="rect">
+            <a:avLst/>
+          </a:prstGeom>
+          <a:noFill/>
+        </p:spPr>
+        <p:txBody>
+          <a:bodyPr wrap="square" lIns="45720" rIns="45720" tIns="18288" bIns="18288" anchor="t">
+            <a:spAutoFit/>
+          </a:bodyPr>
+          <a:lstStyle/>
+          <a:p>
+            <a:pPr algn="l"/>
+            <a:r>
+              <a:rPr sz="2280" b="1" i="0">
+                <a:solidFill>
+                  <a:srgbClr val="1A1A1A"/>
+                </a:solidFill>
+                <a:latin typeface="Lexend"/>
+              </a:rPr>
+              <a:t>How many miles is that?</a:t>
+            </a:r>
+          </a:p>
+        </p:txBody>
+      </p:sp>
+      <p:sp>
+        <p:nvSpPr>
+          <p:cNvPr id="11" name="TextBox 10"/>
+          <p:cNvSpPr txBox="1"/>
+          <p:nvPr/>
+        </p:nvSpPr>
+        <p:spPr>
+          <a:xfrm>
+            <a:off x="1691640" y="3218290"/>
             <a:ext cx="594360" cy="457200"/>
           </a:xfrm>
           <a:prstGeom prst="rect">
@@ -8229,14 +8681,14 @@
                 </a:solidFill>
                 <a:latin typeface="Lexend"/>
               </a:rPr>
-              <a:t>B.</a:t>
+              <a:t>A.</a:t>
             </a:r>
           </a:p>
         </p:txBody>
       </p:sp>
       <p:pic>
         <p:nvPicPr>
-          <p:cNvPr id="13" name="Picture 12" descr="1bea68e0811b195f.png"/>
+          <p:cNvPr id="12" name="Picture 11" descr="d576d2edbb6fc5a5.png"/>
           <p:cNvPicPr>
             <a:picLocks noChangeAspect="1"/>
           </p:cNvPicPr>
@@ -8250,8 +8702,8 @@
         </p:blipFill>
         <p:spPr>
           <a:xfrm>
-            <a:off x="7104888" y="3144740"/>
-            <a:ext cx="1249680" cy="301752"/>
+            <a:off x="2258568" y="3187810"/>
+            <a:ext cx="1264920" cy="301752"/>
           </a:xfrm>
           <a:prstGeom prst="rect">
             <a:avLst/>
@@ -8260,13 +8712,13 @@
       </p:pic>
       <p:sp>
         <p:nvSpPr>
-          <p:cNvPr id="14" name="TextBox 13"/>
-          <p:cNvSpPr txBox="1"/>
-          <p:nvPr/>
-        </p:nvSpPr>
-        <p:spPr>
-          <a:xfrm>
-            <a:off x="1691640" y="3757388"/>
+          <p:cNvPr id="13" name="TextBox 12"/>
+          <p:cNvSpPr txBox="1"/>
+          <p:nvPr/>
+        </p:nvSpPr>
+        <p:spPr>
+          <a:xfrm>
+            <a:off x="6537959" y="3218290"/>
             <a:ext cx="594360" cy="457200"/>
           </a:xfrm>
           <a:prstGeom prst="rect">
@@ -8288,14 +8740,14 @@
                 </a:solidFill>
                 <a:latin typeface="Lexend"/>
               </a:rPr>
-              <a:t>C.</a:t>
+              <a:t>B.</a:t>
             </a:r>
           </a:p>
         </p:txBody>
       </p:sp>
       <p:pic>
         <p:nvPicPr>
-          <p:cNvPr id="15" name="Picture 14" descr="711be185f145e86f.png"/>
+          <p:cNvPr id="14" name="Picture 13" descr="1bea68e0811b195f.png"/>
           <p:cNvPicPr>
             <a:picLocks noChangeAspect="1"/>
           </p:cNvPicPr>
@@ -8309,8 +8761,8 @@
         </p:blipFill>
         <p:spPr>
           <a:xfrm>
-            <a:off x="2258568" y="3757388"/>
-            <a:ext cx="1292352" cy="301752"/>
+            <a:off x="7104888" y="3187810"/>
+            <a:ext cx="1249680" cy="301752"/>
           </a:xfrm>
           <a:prstGeom prst="rect">
             <a:avLst/>
@@ -8319,13 +8771,13 @@
       </p:pic>
       <p:sp>
         <p:nvSpPr>
-          <p:cNvPr id="16" name="TextBox 15"/>
-          <p:cNvSpPr txBox="1"/>
-          <p:nvPr/>
-        </p:nvSpPr>
-        <p:spPr>
-          <a:xfrm>
-            <a:off x="6537959" y="3757388"/>
+          <p:cNvPr id="15" name="TextBox 14"/>
+          <p:cNvSpPr txBox="1"/>
+          <p:nvPr/>
+        </p:nvSpPr>
+        <p:spPr>
+          <a:xfrm>
+            <a:off x="1691640" y="3830938"/>
             <a:ext cx="594360" cy="457200"/>
           </a:xfrm>
           <a:prstGeom prst="rect">
@@ -8347,14 +8799,14 @@
                 </a:solidFill>
                 <a:latin typeface="Lexend"/>
               </a:rPr>
-              <a:t>D.</a:t>
+              <a:t>C.</a:t>
             </a:r>
           </a:p>
         </p:txBody>
       </p:sp>
       <p:pic>
         <p:nvPicPr>
-          <p:cNvPr id="17" name="Picture 16" descr="147918762884eff9.png"/>
+          <p:cNvPr id="16" name="Picture 15" descr="711be185f145e86f.png"/>
           <p:cNvPicPr>
             <a:picLocks noChangeAspect="1"/>
           </p:cNvPicPr>
@@ -8368,7 +8820,66 @@
         </p:blipFill>
         <p:spPr>
           <a:xfrm>
-            <a:off x="7104888" y="3757388"/>
+            <a:off x="2258568" y="3800458"/>
+            <a:ext cx="1292352" cy="301752"/>
+          </a:xfrm>
+          <a:prstGeom prst="rect">
+            <a:avLst/>
+          </a:prstGeom>
+        </p:spPr>
+      </p:pic>
+      <p:sp>
+        <p:nvSpPr>
+          <p:cNvPr id="17" name="TextBox 16"/>
+          <p:cNvSpPr txBox="1"/>
+          <p:nvPr/>
+        </p:nvSpPr>
+        <p:spPr>
+          <a:xfrm>
+            <a:off x="6537959" y="3830938"/>
+            <a:ext cx="594360" cy="457200"/>
+          </a:xfrm>
+          <a:prstGeom prst="rect">
+            <a:avLst/>
+          </a:prstGeom>
+          <a:noFill/>
+        </p:spPr>
+        <p:txBody>
+          <a:bodyPr wrap="square" lIns="45720" rIns="45720" tIns="18288" bIns="18288" anchor="t">
+            <a:spAutoFit/>
+          </a:bodyPr>
+          <a:lstStyle/>
+          <a:p>
+            <a:pPr algn="l"/>
+            <a:r>
+              <a:rPr sz="2280" b="1" i="0">
+                <a:solidFill>
+                  <a:srgbClr val="1A1A1A"/>
+                </a:solidFill>
+                <a:latin typeface="Lexend"/>
+              </a:rPr>
+              <a:t>D.</a:t>
+            </a:r>
+          </a:p>
+        </p:txBody>
+      </p:sp>
+      <p:pic>
+        <p:nvPicPr>
+          <p:cNvPr id="18" name="Picture 17" descr="147918762884eff9.png"/>
+          <p:cNvPicPr>
+            <a:picLocks noChangeAspect="1"/>
+          </p:cNvPicPr>
+          <p:nvPr/>
+        </p:nvPicPr>
+        <p:blipFill>
+          <a:blip r:embed="rId6"/>
+          <a:stretch>
+            <a:fillRect/>
+          </a:stretch>
+        </p:blipFill>
+        <p:spPr>
+          <a:xfrm>
+            <a:off x="7104888" y="3800458"/>
             <a:ext cx="1024128" cy="301752"/>
           </a:xfrm>
           <a:prstGeom prst="rect">
@@ -8378,13 +8889,13 @@
       </p:pic>
       <p:sp>
         <p:nvSpPr>
-          <p:cNvPr id="18" name="TextBox 17"/>
-          <p:cNvSpPr txBox="1"/>
-          <p:nvPr/>
-        </p:nvSpPr>
-        <p:spPr>
-          <a:xfrm>
-            <a:off x="777240" y="4434044"/>
+          <p:cNvPr id="19" name="TextBox 18"/>
+          <p:cNvSpPr txBox="1"/>
+          <p:nvPr/>
+        </p:nvSpPr>
+        <p:spPr>
+          <a:xfrm>
+            <a:off x="777240" y="4507594"/>
             <a:ext cx="10607040" cy="457200"/>
           </a:xfrm>
           <a:prstGeom prst="rect">
@@ -8639,79 +9150,9 @@
           </a:p>
         </p:txBody>
       </p:sp>
-      <p:sp>
-        <p:nvSpPr>
-          <p:cNvPr id="8" name="TextBox 7"/>
-          <p:cNvSpPr txBox="1"/>
-          <p:nvPr/>
-        </p:nvSpPr>
-        <p:spPr>
-          <a:xfrm>
-            <a:off x="1234440" y="1874519"/>
-            <a:ext cx="10058400" cy="429370"/>
-          </a:xfrm>
-          <a:prstGeom prst="rect">
-            <a:avLst/>
-          </a:prstGeom>
-          <a:noFill/>
-        </p:spPr>
-        <p:txBody>
-          <a:bodyPr wrap="square" lIns="45720" rIns="45720" tIns="18288" bIns="18288" anchor="t">
-            <a:spAutoFit/>
-          </a:bodyPr>
-          <a:lstStyle/>
-          <a:p>
-            <a:pPr algn="l"/>
-            <a:r>
-              <a:rPr sz="2280" b="0" i="0">
-                <a:solidFill>
-                  <a:srgbClr val="1A1A1A"/>
-                </a:solidFill>
-                <a:latin typeface="Lexend"/>
-              </a:rPr>
-              <a:t>1 km = 0.62 mi. A trail is 5 km long.</a:t>
-            </a:r>
-          </a:p>
-        </p:txBody>
-      </p:sp>
-      <p:sp>
-        <p:nvSpPr>
-          <p:cNvPr id="9" name="TextBox 8"/>
-          <p:cNvSpPr txBox="1"/>
-          <p:nvPr/>
-        </p:nvSpPr>
-        <p:spPr>
-          <a:xfrm>
-            <a:off x="1234440" y="2413618"/>
-            <a:ext cx="10058400" cy="429370"/>
-          </a:xfrm>
-          <a:prstGeom prst="rect">
-            <a:avLst/>
-          </a:prstGeom>
-          <a:noFill/>
-        </p:spPr>
-        <p:txBody>
-          <a:bodyPr wrap="square" lIns="45720" rIns="45720" tIns="18288" bIns="18288" anchor="t">
-            <a:spAutoFit/>
-          </a:bodyPr>
-          <a:lstStyle/>
-          <a:p>
-            <a:pPr algn="l"/>
-            <a:r>
-              <a:rPr sz="2280" b="1" i="0">
-                <a:solidFill>
-                  <a:srgbClr val="1A1A1A"/>
-                </a:solidFill>
-                <a:latin typeface="Lexend"/>
-              </a:rPr>
-              <a:t>How many miles is that?</a:t>
-            </a:r>
-          </a:p>
-        </p:txBody>
-      </p:sp>
       <p:pic>
         <p:nvPicPr>
-          <p:cNvPr id="10" name="Picture 9" descr="7848a55870dbf021.png"/>
+          <p:cNvPr id="8" name="Picture 7" descr="6e18d58589ed85bc.png"/>
           <p:cNvPicPr>
             <a:picLocks noChangeAspect="1"/>
           </p:cNvPicPr>
@@ -8725,7 +9166,101 @@
         </p:blipFill>
         <p:spPr>
           <a:xfrm>
-            <a:off x="5181599" y="3149312"/>
+            <a:off x="1234440" y="1956815"/>
+            <a:ext cx="1950720" cy="243840"/>
+          </a:xfrm>
+          <a:prstGeom prst="rect">
+            <a:avLst/>
+          </a:prstGeom>
+        </p:spPr>
+      </p:pic>
+      <p:sp>
+        <p:nvSpPr>
+          <p:cNvPr id="9" name="TextBox 8"/>
+          <p:cNvSpPr txBox="1"/>
+          <p:nvPr/>
+        </p:nvSpPr>
+        <p:spPr>
+          <a:xfrm>
+            <a:off x="3185160" y="1851660"/>
+            <a:ext cx="3180484" cy="457200"/>
+          </a:xfrm>
+          <a:prstGeom prst="rect">
+            <a:avLst/>
+          </a:prstGeom>
+          <a:noFill/>
+        </p:spPr>
+        <p:txBody>
+          <a:bodyPr wrap="none" lIns="45720" rIns="45720" tIns="18288" bIns="18288" anchor="ctr">
+            <a:noAutofit/>
+          </a:bodyPr>
+          <a:lstStyle/>
+          <a:p>
+            <a:pPr algn="l"/>
+            <a:r>
+              <a:rPr sz="2280" b="0" i="0">
+                <a:solidFill>
+                  <a:srgbClr val="1A1A1A"/>
+                </a:solidFill>
+                <a:latin typeface="Lexend"/>
+              </a:rPr>
+              <a:t>. A trail is 5 km long.</a:t>
+            </a:r>
+          </a:p>
+        </p:txBody>
+      </p:sp>
+      <p:sp>
+        <p:nvSpPr>
+          <p:cNvPr id="10" name="TextBox 9"/>
+          <p:cNvSpPr txBox="1"/>
+          <p:nvPr/>
+        </p:nvSpPr>
+        <p:spPr>
+          <a:xfrm>
+            <a:off x="1234440" y="2487168"/>
+            <a:ext cx="10058400" cy="429370"/>
+          </a:xfrm>
+          <a:prstGeom prst="rect">
+            <a:avLst/>
+          </a:prstGeom>
+          <a:noFill/>
+        </p:spPr>
+        <p:txBody>
+          <a:bodyPr wrap="square" lIns="45720" rIns="45720" tIns="18288" bIns="18288" anchor="t">
+            <a:spAutoFit/>
+          </a:bodyPr>
+          <a:lstStyle/>
+          <a:p>
+            <a:pPr algn="l"/>
+            <a:r>
+              <a:rPr sz="2280" b="1" i="0">
+                <a:solidFill>
+                  <a:srgbClr val="1A1A1A"/>
+                </a:solidFill>
+                <a:latin typeface="Lexend"/>
+              </a:rPr>
+              <a:t>How many miles is that?</a:t>
+            </a:r>
+          </a:p>
+        </p:txBody>
+      </p:sp>
+      <p:pic>
+        <p:nvPicPr>
+          <p:cNvPr id="11" name="Picture 10" descr="7848a55870dbf021.png"/>
+          <p:cNvPicPr>
+            <a:picLocks noChangeAspect="1"/>
+          </p:cNvPicPr>
+          <p:nvPr/>
+        </p:nvPicPr>
+        <p:blipFill>
+          <a:blip r:embed="rId3"/>
+          <a:stretch>
+            <a:fillRect/>
+          </a:stretch>
+        </p:blipFill>
+        <p:spPr>
+          <a:xfrm>
+            <a:off x="5181599" y="3239054"/>
             <a:ext cx="1914144" cy="256032"/>
           </a:xfrm>
           <a:prstGeom prst="rect">
@@ -8735,7 +9270,7 @@
       </p:pic>
       <p:sp>
         <p:nvSpPr>
-          <p:cNvPr id="11" name="TextBox 10"/>
+          <p:cNvPr id="12" name="TextBox 11"/>
           <p:cNvSpPr txBox="1"/>
           <p:nvPr/>
         </p:nvSpPr>
@@ -8996,15 +9531,133 @@
           </a:p>
         </p:txBody>
       </p:sp>
-      <p:sp>
-        <p:nvSpPr>
-          <p:cNvPr id="8" name="TextBox 7"/>
-          <p:cNvSpPr txBox="1"/>
-          <p:nvPr/>
-        </p:nvSpPr>
-        <p:spPr>
-          <a:xfrm>
-            <a:off x="1234440" y="1874519"/>
+      <p:pic>
+        <p:nvPicPr>
+          <p:cNvPr id="8" name="Picture 7" descr="a7e24ba549ecbc3a.png"/>
+          <p:cNvPicPr>
+            <a:picLocks noChangeAspect="1"/>
+          </p:cNvPicPr>
+          <p:nvPr/>
+        </p:nvPicPr>
+        <p:blipFill>
+          <a:blip r:embed="rId2"/>
+          <a:stretch>
+            <a:fillRect/>
+          </a:stretch>
+        </p:blipFill>
+        <p:spPr>
+          <a:xfrm>
+            <a:off x="1234440" y="1953768"/>
+            <a:ext cx="1347216" cy="240791"/>
+          </a:xfrm>
+          <a:prstGeom prst="rect">
+            <a:avLst/>
+          </a:prstGeom>
+        </p:spPr>
+      </p:pic>
+      <p:sp>
+        <p:nvSpPr>
+          <p:cNvPr id="9" name="TextBox 8"/>
+          <p:cNvSpPr txBox="1"/>
+          <p:nvPr/>
+        </p:nvSpPr>
+        <p:spPr>
+          <a:xfrm>
+            <a:off x="2581656" y="1851660"/>
+            <a:ext cx="953666" cy="457200"/>
+          </a:xfrm>
+          <a:prstGeom prst="rect">
+            <a:avLst/>
+          </a:prstGeom>
+          <a:noFill/>
+        </p:spPr>
+        <p:txBody>
+          <a:bodyPr wrap="none" lIns="45720" rIns="45720" tIns="18288" bIns="18288" anchor="ctr">
+            <a:noAutofit/>
+          </a:bodyPr>
+          <a:lstStyle/>
+          <a:p>
+            <a:pPr algn="l"/>
+            <a:r>
+              <a:rPr sz="2280" b="0" i="0">
+                <a:solidFill>
+                  <a:srgbClr val="1A1A1A"/>
+                </a:solidFill>
+                <a:latin typeface="Lexend"/>
+              </a:rPr>
+              <a:t> and </a:t>
+            </a:r>
+          </a:p>
+        </p:txBody>
+      </p:sp>
+      <p:pic>
+        <p:nvPicPr>
+          <p:cNvPr id="10" name="Picture 9" descr="88d2b26b87c7a8c9.png"/>
+          <p:cNvPicPr>
+            <a:picLocks noChangeAspect="1"/>
+          </p:cNvPicPr>
+          <p:nvPr/>
+        </p:nvPicPr>
+        <p:blipFill>
+          <a:blip r:embed="rId3"/>
+          <a:stretch>
+            <a:fillRect/>
+          </a:stretch>
+        </p:blipFill>
+        <p:spPr>
+          <a:xfrm>
+            <a:off x="3398162" y="1956815"/>
+            <a:ext cx="1847088" cy="243840"/>
+          </a:xfrm>
+          <a:prstGeom prst="rect">
+            <a:avLst/>
+          </a:prstGeom>
+        </p:spPr>
+      </p:pic>
+      <p:sp>
+        <p:nvSpPr>
+          <p:cNvPr id="11" name="TextBox 10"/>
+          <p:cNvSpPr txBox="1"/>
+          <p:nvPr/>
+        </p:nvSpPr>
+        <p:spPr>
+          <a:xfrm>
+            <a:off x="5245250" y="1851660"/>
+            <a:ext cx="280301" cy="457200"/>
+          </a:xfrm>
+          <a:prstGeom prst="rect">
+            <a:avLst/>
+          </a:prstGeom>
+          <a:noFill/>
+        </p:spPr>
+        <p:txBody>
+          <a:bodyPr wrap="none" lIns="45720" rIns="45720" tIns="18288" bIns="18288" anchor="ctr">
+            <a:noAutofit/>
+          </a:bodyPr>
+          <a:lstStyle/>
+          <a:p>
+            <a:pPr algn="l"/>
+            <a:r>
+              <a:rPr sz="2280" b="0" i="0">
+                <a:solidFill>
+                  <a:srgbClr val="1A1A1A"/>
+                </a:solidFill>
+                <a:latin typeface="Lexend"/>
+              </a:rPr>
+              <a:t>.</a:t>
+            </a:r>
+          </a:p>
+        </p:txBody>
+      </p:sp>
+      <p:sp>
+        <p:nvSpPr>
+          <p:cNvPr id="12" name="TextBox 11"/>
+          <p:cNvSpPr txBox="1"/>
+          <p:nvPr/>
+        </p:nvSpPr>
+        <p:spPr>
+          <a:xfrm>
+            <a:off x="1234440" y="2487168"/>
             <a:ext cx="10058400" cy="429370"/>
           </a:xfrm>
           <a:prstGeom prst="rect">
@@ -9026,20 +9679,20 @@
                 </a:solidFill>
                 <a:latin typeface="Lexend"/>
               </a:rPr>
-              <a:t>1 ft = 12 in and 1 in = 2.54 cm. A door is 6 ft tall.</a:t>
-            </a:r>
-          </a:p>
-        </p:txBody>
-      </p:sp>
-      <p:sp>
-        <p:nvSpPr>
-          <p:cNvPr id="9" name="TextBox 8"/>
-          <p:cNvSpPr txBox="1"/>
-          <p:nvPr/>
-        </p:nvSpPr>
-        <p:spPr>
-          <a:xfrm>
-            <a:off x="1234440" y="2413618"/>
+              <a:t>A door is 6 ft tall.</a:t>
+            </a:r>
+          </a:p>
+        </p:txBody>
+      </p:sp>
+      <p:sp>
+        <p:nvSpPr>
+          <p:cNvPr id="13" name="TextBox 12"/>
+          <p:cNvSpPr txBox="1"/>
+          <p:nvPr/>
+        </p:nvSpPr>
+        <p:spPr>
+          <a:xfrm>
+            <a:off x="1234440" y="3026266"/>
             <a:ext cx="10058400" cy="429370"/>
           </a:xfrm>
           <a:prstGeom prst="rect">
@@ -9068,7 +9721,7 @@
       </p:sp>
       <p:sp>
         <p:nvSpPr>
-          <p:cNvPr id="10" name="TextBox 9"/>
+          <p:cNvPr id="14" name="TextBox 13"/>
           <p:cNvSpPr txBox="1"/>
           <p:nvPr/>
         </p:nvSpPr>
@@ -9329,79 +9982,9 @@
           </a:p>
         </p:txBody>
       </p:sp>
-      <p:sp>
-        <p:nvSpPr>
-          <p:cNvPr id="8" name="TextBox 7"/>
-          <p:cNvSpPr txBox="1"/>
-          <p:nvPr/>
-        </p:nvSpPr>
-        <p:spPr>
-          <a:xfrm>
-            <a:off x="1234440" y="1874519"/>
-            <a:ext cx="10058400" cy="429370"/>
-          </a:xfrm>
-          <a:prstGeom prst="rect">
-            <a:avLst/>
-          </a:prstGeom>
-          <a:noFill/>
-        </p:spPr>
-        <p:txBody>
-          <a:bodyPr wrap="square" lIns="45720" rIns="45720" tIns="18288" bIns="18288" anchor="t">
-            <a:spAutoFit/>
-          </a:bodyPr>
-          <a:lstStyle/>
-          <a:p>
-            <a:pPr algn="l"/>
-            <a:r>
-              <a:rPr sz="2280" b="0" i="0">
-                <a:solidFill>
-                  <a:srgbClr val="1A1A1A"/>
-                </a:solidFill>
-                <a:latin typeface="Lexend"/>
-              </a:rPr>
-              <a:t>1 ft = 12 in and 1 in = 2.54 cm. A door is 6 ft tall.</a:t>
-            </a:r>
-          </a:p>
-        </p:txBody>
-      </p:sp>
-      <p:sp>
-        <p:nvSpPr>
-          <p:cNvPr id="9" name="TextBox 8"/>
-          <p:cNvSpPr txBox="1"/>
-          <p:nvPr/>
-        </p:nvSpPr>
-        <p:spPr>
-          <a:xfrm>
-            <a:off x="1234440" y="2413618"/>
-            <a:ext cx="10058400" cy="429370"/>
-          </a:xfrm>
-          <a:prstGeom prst="rect">
-            <a:avLst/>
-          </a:prstGeom>
-          <a:noFill/>
-        </p:spPr>
-        <p:txBody>
-          <a:bodyPr wrap="square" lIns="45720" rIns="45720" tIns="18288" bIns="18288" anchor="t">
-            <a:spAutoFit/>
-          </a:bodyPr>
-          <a:lstStyle/>
-          <a:p>
-            <a:pPr algn="l"/>
-            <a:r>
-              <a:rPr sz="2280" b="1" i="0">
-                <a:solidFill>
-                  <a:srgbClr val="1A1A1A"/>
-                </a:solidFill>
-                <a:latin typeface="Lexend"/>
-              </a:rPr>
-              <a:t>How many centimeters is that?</a:t>
-            </a:r>
-          </a:p>
-        </p:txBody>
-      </p:sp>
       <p:pic>
         <p:nvPicPr>
-          <p:cNvPr id="10" name="Picture 9" descr="cce88695c46a5fc8.png"/>
+          <p:cNvPr id="8" name="Picture 7" descr="f2542c0ca55f8587.png"/>
           <p:cNvPicPr>
             <a:picLocks noChangeAspect="1"/>
           </p:cNvPicPr>
@@ -9415,17 +9998,52 @@
         </p:blipFill>
         <p:spPr>
           <a:xfrm>
-            <a:off x="4780787" y="3140168"/>
-            <a:ext cx="1935480" cy="274320"/>
+            <a:off x="1234440" y="1953768"/>
+            <a:ext cx="1347216" cy="240791"/>
           </a:xfrm>
           <a:prstGeom prst="rect">
             <a:avLst/>
           </a:prstGeom>
         </p:spPr>
       </p:pic>
+      <p:sp>
+        <p:nvSpPr>
+          <p:cNvPr id="9" name="TextBox 8"/>
+          <p:cNvSpPr txBox="1"/>
+          <p:nvPr/>
+        </p:nvSpPr>
+        <p:spPr>
+          <a:xfrm>
+            <a:off x="2581656" y="1851660"/>
+            <a:ext cx="953666" cy="457200"/>
+          </a:xfrm>
+          <a:prstGeom prst="rect">
+            <a:avLst/>
+          </a:prstGeom>
+          <a:noFill/>
+        </p:spPr>
+        <p:txBody>
+          <a:bodyPr wrap="none" lIns="45720" rIns="45720" tIns="18288" bIns="18288" anchor="ctr">
+            <a:noAutofit/>
+          </a:bodyPr>
+          <a:lstStyle/>
+          <a:p>
+            <a:pPr algn="l"/>
+            <a:r>
+              <a:rPr sz="2280" b="0" i="0">
+                <a:solidFill>
+                  <a:srgbClr val="1A1A1A"/>
+                </a:solidFill>
+                <a:latin typeface="Lexend"/>
+              </a:rPr>
+              <a:t> and </a:t>
+            </a:r>
+          </a:p>
+        </p:txBody>
+      </p:sp>
       <p:pic>
         <p:nvPicPr>
-          <p:cNvPr id="11" name="Picture 10" descr="23919ae52bfa69e6.png"/>
+          <p:cNvPr id="10" name="Picture 9" descr="e3914b43cbb52236.png"/>
           <p:cNvPicPr>
             <a:picLocks noChangeAspect="1"/>
           </p:cNvPicPr>
@@ -9439,7 +10057,160 @@
         </p:blipFill>
         <p:spPr>
           <a:xfrm>
-            <a:off x="4780787" y="3690332"/>
+            <a:off x="3398162" y="1956815"/>
+            <a:ext cx="1844040" cy="243840"/>
+          </a:xfrm>
+          <a:prstGeom prst="rect">
+            <a:avLst/>
+          </a:prstGeom>
+        </p:spPr>
+      </p:pic>
+      <p:sp>
+        <p:nvSpPr>
+          <p:cNvPr id="11" name="TextBox 10"/>
+          <p:cNvSpPr txBox="1"/>
+          <p:nvPr/>
+        </p:nvSpPr>
+        <p:spPr>
+          <a:xfrm>
+            <a:off x="5242202" y="1851660"/>
+            <a:ext cx="280301" cy="457200"/>
+          </a:xfrm>
+          <a:prstGeom prst="rect">
+            <a:avLst/>
+          </a:prstGeom>
+          <a:noFill/>
+        </p:spPr>
+        <p:txBody>
+          <a:bodyPr wrap="none" lIns="45720" rIns="45720" tIns="18288" bIns="18288" anchor="ctr">
+            <a:noAutofit/>
+          </a:bodyPr>
+          <a:lstStyle/>
+          <a:p>
+            <a:pPr algn="l"/>
+            <a:r>
+              <a:rPr sz="2280" b="0" i="0">
+                <a:solidFill>
+                  <a:srgbClr val="1A1A1A"/>
+                </a:solidFill>
+                <a:latin typeface="Lexend"/>
+              </a:rPr>
+              <a:t>.</a:t>
+            </a:r>
+          </a:p>
+        </p:txBody>
+      </p:sp>
+      <p:sp>
+        <p:nvSpPr>
+          <p:cNvPr id="12" name="TextBox 11"/>
+          <p:cNvSpPr txBox="1"/>
+          <p:nvPr/>
+        </p:nvSpPr>
+        <p:spPr>
+          <a:xfrm>
+            <a:off x="1234440" y="2487168"/>
+            <a:ext cx="10058400" cy="429370"/>
+          </a:xfrm>
+          <a:prstGeom prst="rect">
+            <a:avLst/>
+          </a:prstGeom>
+          <a:noFill/>
+        </p:spPr>
+        <p:txBody>
+          <a:bodyPr wrap="square" lIns="45720" rIns="45720" tIns="18288" bIns="18288" anchor="t">
+            <a:spAutoFit/>
+          </a:bodyPr>
+          <a:lstStyle/>
+          <a:p>
+            <a:pPr algn="l"/>
+            <a:r>
+              <a:rPr sz="2280" b="0" i="0">
+                <a:solidFill>
+                  <a:srgbClr val="1A1A1A"/>
+                </a:solidFill>
+                <a:latin typeface="Lexend"/>
+              </a:rPr>
+              <a:t>A door is 6 ft tall.</a:t>
+            </a:r>
+          </a:p>
+        </p:txBody>
+      </p:sp>
+      <p:sp>
+        <p:nvSpPr>
+          <p:cNvPr id="13" name="TextBox 12"/>
+          <p:cNvSpPr txBox="1"/>
+          <p:nvPr/>
+        </p:nvSpPr>
+        <p:spPr>
+          <a:xfrm>
+            <a:off x="1234440" y="3026266"/>
+            <a:ext cx="10058400" cy="429370"/>
+          </a:xfrm>
+          <a:prstGeom prst="rect">
+            <a:avLst/>
+          </a:prstGeom>
+          <a:noFill/>
+        </p:spPr>
+        <p:txBody>
+          <a:bodyPr wrap="square" lIns="45720" rIns="45720" tIns="18288" bIns="18288" anchor="t">
+            <a:spAutoFit/>
+          </a:bodyPr>
+          <a:lstStyle/>
+          <a:p>
+            <a:pPr algn="l"/>
+            <a:r>
+              <a:rPr sz="2280" b="1" i="0">
+                <a:solidFill>
+                  <a:srgbClr val="1A1A1A"/>
+                </a:solidFill>
+                <a:latin typeface="Lexend"/>
+              </a:rPr>
+              <a:t>How many centimeters is that?</a:t>
+            </a:r>
+          </a:p>
+        </p:txBody>
+      </p:sp>
+      <p:pic>
+        <p:nvPicPr>
+          <p:cNvPr id="14" name="Picture 13" descr="cce88695c46a5fc8.png"/>
+          <p:cNvPicPr>
+            <a:picLocks noChangeAspect="1"/>
+          </p:cNvPicPr>
+          <p:nvPr/>
+        </p:nvPicPr>
+        <p:blipFill>
+          <a:blip r:embed="rId4"/>
+          <a:stretch>
+            <a:fillRect/>
+          </a:stretch>
+        </p:blipFill>
+        <p:spPr>
+          <a:xfrm>
+            <a:off x="4780787" y="3753769"/>
+            <a:ext cx="1935480" cy="274320"/>
+          </a:xfrm>
+          <a:prstGeom prst="rect">
+            <a:avLst/>
+          </a:prstGeom>
+        </p:spPr>
+      </p:pic>
+      <p:pic>
+        <p:nvPicPr>
+          <p:cNvPr id="15" name="Picture 14" descr="23919ae52bfa69e6.png"/>
+          <p:cNvPicPr>
+            <a:picLocks noChangeAspect="1"/>
+          </p:cNvPicPr>
+          <p:nvPr/>
+        </p:nvPicPr>
+        <p:blipFill>
+          <a:blip r:embed="rId5"/>
+          <a:stretch>
+            <a:fillRect/>
+          </a:stretch>
+        </p:blipFill>
+        <p:spPr>
+          <a:xfrm>
+            <a:off x="4780787" y="4320697"/>
             <a:ext cx="2709672" cy="252984"/>
           </a:xfrm>
           <a:prstGeom prst="rect">
@@ -9449,13 +10220,13 @@
       </p:pic>
       <p:sp>
         <p:nvSpPr>
-          <p:cNvPr id="12" name="TextBox 11"/>
-          <p:cNvSpPr txBox="1"/>
-          <p:nvPr/>
-        </p:nvSpPr>
-        <p:spPr>
-          <a:xfrm>
-            <a:off x="777240" y="4663440"/>
+          <p:cNvPr id="16" name="TextBox 15"/>
+          <p:cNvSpPr txBox="1"/>
+          <p:nvPr/>
+        </p:nvSpPr>
+        <p:spPr>
+          <a:xfrm>
+            <a:off x="777240" y="4772372"/>
             <a:ext cx="10607040" cy="548640"/>
           </a:xfrm>
           <a:prstGeom prst="rect">
@@ -9710,15 +10481,192 @@
           </a:p>
         </p:txBody>
       </p:sp>
-      <p:sp>
-        <p:nvSpPr>
-          <p:cNvPr id="8" name="TextBox 7"/>
-          <p:cNvSpPr txBox="1"/>
-          <p:nvPr/>
-        </p:nvSpPr>
-        <p:spPr>
-          <a:xfrm>
-            <a:off x="1234440" y="1874519"/>
+      <p:pic>
+        <p:nvPicPr>
+          <p:cNvPr id="8" name="Picture 7" descr="85d78c8d2e33f8ba.png"/>
+          <p:cNvPicPr>
+            <a:picLocks noChangeAspect="1"/>
+          </p:cNvPicPr>
+          <p:nvPr/>
+        </p:nvPicPr>
+        <p:blipFill>
+          <a:blip r:embed="rId2"/>
+          <a:stretch>
+            <a:fillRect/>
+          </a:stretch>
+        </p:blipFill>
+        <p:spPr>
+          <a:xfrm>
+            <a:off x="1234440" y="1962911"/>
+            <a:ext cx="1304544" cy="304800"/>
+          </a:xfrm>
+          <a:prstGeom prst="rect">
+            <a:avLst/>
+          </a:prstGeom>
+        </p:spPr>
+      </p:pic>
+      <p:sp>
+        <p:nvSpPr>
+          <p:cNvPr id="9" name="TextBox 8"/>
+          <p:cNvSpPr txBox="1"/>
+          <p:nvPr/>
+        </p:nvSpPr>
+        <p:spPr>
+          <a:xfrm>
+            <a:off x="2538984" y="1851660"/>
+            <a:ext cx="378166" cy="457200"/>
+          </a:xfrm>
+          <a:prstGeom prst="rect">
+            <a:avLst/>
+          </a:prstGeom>
+          <a:noFill/>
+        </p:spPr>
+        <p:txBody>
+          <a:bodyPr wrap="none" lIns="45720" rIns="45720" tIns="18288" bIns="18288" anchor="ctr">
+            <a:noAutofit/>
+          </a:bodyPr>
+          <a:lstStyle/>
+          <a:p>
+            <a:pPr algn="l"/>
+            <a:r>
+              <a:rPr sz="2280" b="0" i="0">
+                <a:solidFill>
+                  <a:srgbClr val="1A1A1A"/>
+                </a:solidFill>
+                <a:latin typeface="Lexend"/>
+              </a:rPr>
+              <a:t>, </a:t>
+            </a:r>
+          </a:p>
+        </p:txBody>
+      </p:sp>
+      <p:pic>
+        <p:nvPicPr>
+          <p:cNvPr id="10" name="Picture 9" descr="a7e24ba549ecbc3a.png"/>
+          <p:cNvPicPr>
+            <a:picLocks noChangeAspect="1"/>
+          </p:cNvPicPr>
+          <p:nvPr/>
+        </p:nvPicPr>
+        <p:blipFill>
+          <a:blip r:embed="rId3"/>
+          <a:stretch>
+            <a:fillRect/>
+          </a:stretch>
+        </p:blipFill>
+        <p:spPr>
+          <a:xfrm>
+            <a:off x="2779990" y="1953768"/>
+            <a:ext cx="1347216" cy="240791"/>
+          </a:xfrm>
+          <a:prstGeom prst="rect">
+            <a:avLst/>
+          </a:prstGeom>
+        </p:spPr>
+      </p:pic>
+      <p:sp>
+        <p:nvSpPr>
+          <p:cNvPr id="11" name="TextBox 10"/>
+          <p:cNvSpPr txBox="1"/>
+          <p:nvPr/>
+        </p:nvSpPr>
+        <p:spPr>
+          <a:xfrm>
+            <a:off x="4127206" y="1851660"/>
+            <a:ext cx="378166" cy="457200"/>
+          </a:xfrm>
+          <a:prstGeom prst="rect">
+            <a:avLst/>
+          </a:prstGeom>
+          <a:noFill/>
+        </p:spPr>
+        <p:txBody>
+          <a:bodyPr wrap="none" lIns="45720" rIns="45720" tIns="18288" bIns="18288" anchor="ctr">
+            <a:noAutofit/>
+          </a:bodyPr>
+          <a:lstStyle/>
+          <a:p>
+            <a:pPr algn="l"/>
+            <a:r>
+              <a:rPr sz="2280" b="0" i="0">
+                <a:solidFill>
+                  <a:srgbClr val="1A1A1A"/>
+                </a:solidFill>
+                <a:latin typeface="Lexend"/>
+              </a:rPr>
+              <a:t>, </a:t>
+            </a:r>
+          </a:p>
+        </p:txBody>
+      </p:sp>
+      <p:pic>
+        <p:nvPicPr>
+          <p:cNvPr id="12" name="Picture 11" descr="88d2b26b87c7a8c9.png"/>
+          <p:cNvPicPr>
+            <a:picLocks noChangeAspect="1"/>
+          </p:cNvPicPr>
+          <p:nvPr/>
+        </p:nvPicPr>
+        <p:blipFill>
+          <a:blip r:embed="rId4"/>
+          <a:stretch>
+            <a:fillRect/>
+          </a:stretch>
+        </p:blipFill>
+        <p:spPr>
+          <a:xfrm>
+            <a:off x="4368212" y="1956815"/>
+            <a:ext cx="1847088" cy="243840"/>
+          </a:xfrm>
+          <a:prstGeom prst="rect">
+            <a:avLst/>
+          </a:prstGeom>
+        </p:spPr>
+      </p:pic>
+      <p:sp>
+        <p:nvSpPr>
+          <p:cNvPr id="13" name="TextBox 12"/>
+          <p:cNvSpPr txBox="1"/>
+          <p:nvPr/>
+        </p:nvSpPr>
+        <p:spPr>
+          <a:xfrm>
+            <a:off x="6215300" y="1851660"/>
+            <a:ext cx="280301" cy="457200"/>
+          </a:xfrm>
+          <a:prstGeom prst="rect">
+            <a:avLst/>
+          </a:prstGeom>
+          <a:noFill/>
+        </p:spPr>
+        <p:txBody>
+          <a:bodyPr wrap="none" lIns="45720" rIns="45720" tIns="18288" bIns="18288" anchor="ctr">
+            <a:noAutofit/>
+          </a:bodyPr>
+          <a:lstStyle/>
+          <a:p>
+            <a:pPr algn="l"/>
+            <a:r>
+              <a:rPr sz="2280" b="0" i="0">
+                <a:solidFill>
+                  <a:srgbClr val="1A1A1A"/>
+                </a:solidFill>
+                <a:latin typeface="Lexend"/>
+              </a:rPr>
+              <a:t>.</a:t>
+            </a:r>
+          </a:p>
+        </p:txBody>
+      </p:sp>
+      <p:sp>
+        <p:nvSpPr>
+          <p:cNvPr id="14" name="TextBox 13"/>
+          <p:cNvSpPr txBox="1"/>
+          <p:nvPr/>
+        </p:nvSpPr>
+        <p:spPr>
+          <a:xfrm>
+            <a:off x="1234440" y="2487168"/>
             <a:ext cx="10058400" cy="429370"/>
           </a:xfrm>
           <a:prstGeom prst="rect">
@@ -9740,20 +10688,20 @@
                 </a:solidFill>
                 <a:latin typeface="Lexend"/>
               </a:rPr>
-              <a:t>1 yd = 3 ft, 1 ft = 12 in, 1 in = 2.54 cm. A table is 3 yd long.</a:t>
-            </a:r>
-          </a:p>
-        </p:txBody>
-      </p:sp>
-      <p:sp>
-        <p:nvSpPr>
-          <p:cNvPr id="9" name="TextBox 8"/>
-          <p:cNvSpPr txBox="1"/>
-          <p:nvPr/>
-        </p:nvSpPr>
-        <p:spPr>
-          <a:xfrm>
-            <a:off x="1234440" y="2413618"/>
+              <a:t>A table is 3 yd long.</a:t>
+            </a:r>
+          </a:p>
+        </p:txBody>
+      </p:sp>
+      <p:sp>
+        <p:nvSpPr>
+          <p:cNvPr id="15" name="TextBox 14"/>
+          <p:cNvSpPr txBox="1"/>
+          <p:nvPr/>
+        </p:nvSpPr>
+        <p:spPr>
+          <a:xfrm>
+            <a:off x="1234440" y="3026266"/>
             <a:ext cx="10058400" cy="429370"/>
           </a:xfrm>
           <a:prstGeom prst="rect">
@@ -9782,7 +10730,7 @@
       </p:sp>
       <p:sp>
         <p:nvSpPr>
-          <p:cNvPr id="10" name="TextBox 9"/>
+          <p:cNvPr id="16" name="TextBox 15"/>
           <p:cNvSpPr txBox="1"/>
           <p:nvPr/>
         </p:nvSpPr>
@@ -10043,114 +10991,9 @@
           </a:p>
         </p:txBody>
       </p:sp>
-      <p:sp>
-        <p:nvSpPr>
-          <p:cNvPr id="8" name="TextBox 7"/>
-          <p:cNvSpPr txBox="1"/>
-          <p:nvPr/>
-        </p:nvSpPr>
-        <p:spPr>
-          <a:xfrm>
-            <a:off x="1234440" y="1874519"/>
-            <a:ext cx="10058400" cy="429370"/>
-          </a:xfrm>
-          <a:prstGeom prst="rect">
-            <a:avLst/>
-          </a:prstGeom>
-          <a:noFill/>
-        </p:spPr>
-        <p:txBody>
-          <a:bodyPr wrap="square" lIns="45720" rIns="45720" tIns="18288" bIns="18288" anchor="t">
-            <a:spAutoFit/>
-          </a:bodyPr>
-          <a:lstStyle/>
-          <a:p>
-            <a:pPr algn="l"/>
-            <a:r>
-              <a:rPr sz="2280" b="0" i="0">
-                <a:solidFill>
-                  <a:srgbClr val="1A1A1A"/>
-                </a:solidFill>
-                <a:latin typeface="Lexend"/>
-              </a:rPr>
-              <a:t>1 yd = 3 ft, 1 ft = 12 in, 1 in = 2.54 cm. A table is 3 yd long.</a:t>
-            </a:r>
-          </a:p>
-        </p:txBody>
-      </p:sp>
-      <p:sp>
-        <p:nvSpPr>
-          <p:cNvPr id="9" name="TextBox 8"/>
-          <p:cNvSpPr txBox="1"/>
-          <p:nvPr/>
-        </p:nvSpPr>
-        <p:spPr>
-          <a:xfrm>
-            <a:off x="1234440" y="2413618"/>
-            <a:ext cx="10058400" cy="429370"/>
-          </a:xfrm>
-          <a:prstGeom prst="rect">
-            <a:avLst/>
-          </a:prstGeom>
-          <a:noFill/>
-        </p:spPr>
-        <p:txBody>
-          <a:bodyPr wrap="square" lIns="45720" rIns="45720" tIns="18288" bIns="18288" anchor="t">
-            <a:spAutoFit/>
-          </a:bodyPr>
-          <a:lstStyle/>
-          <a:p>
-            <a:pPr algn="l"/>
-            <a:r>
-              <a:rPr sz="2280" b="1" i="0">
-                <a:solidFill>
-                  <a:srgbClr val="1A1A1A"/>
-                </a:solidFill>
-                <a:latin typeface="Lexend"/>
-              </a:rPr>
-              <a:t>About how many centimeters is that? Estimate, then compute.</a:t>
-            </a:r>
-          </a:p>
-        </p:txBody>
-      </p:sp>
-      <p:sp>
-        <p:nvSpPr>
-          <p:cNvPr id="10" name="TextBox 9"/>
-          <p:cNvSpPr txBox="1"/>
-          <p:nvPr/>
-        </p:nvSpPr>
-        <p:spPr>
-          <a:xfrm>
-            <a:off x="2294988" y="3048728"/>
-            <a:ext cx="7708703" cy="457200"/>
-          </a:xfrm>
-          <a:prstGeom prst="rect">
-            <a:avLst/>
-          </a:prstGeom>
-          <a:noFill/>
-        </p:spPr>
-        <p:txBody>
-          <a:bodyPr wrap="none" lIns="45720" rIns="45720" tIns="18288" bIns="18288" anchor="ctr">
-            <a:noAutofit/>
-          </a:bodyPr>
-          <a:lstStyle/>
-          <a:p>
-            <a:pPr algn="l"/>
-            <a:r>
-              <a:rPr sz="2330" b="0" i="0">
-                <a:solidFill>
-                  <a:srgbClr val="1A1A1A"/>
-                </a:solidFill>
-                <a:latin typeface="Lexend"/>
-              </a:rPr>
-              <a:t>Estimate: 3 yd is a bit under 3 m, so about 270 cm</a:t>
-            </a:r>
-          </a:p>
-        </p:txBody>
-      </p:sp>
       <p:pic>
         <p:nvPicPr>
-          <p:cNvPr id="11" name="Picture 10" descr="d185211e555287e1.png"/>
+          <p:cNvPr id="8" name="Picture 7" descr="eb837b0c98931562.png"/>
           <p:cNvPicPr>
             <a:picLocks noChangeAspect="1"/>
           </p:cNvPicPr>
@@ -10164,7 +11007,289 @@
         </p:blipFill>
         <p:spPr>
           <a:xfrm>
-            <a:off x="2349852" y="3664424"/>
+            <a:off x="1234440" y="1962911"/>
+            <a:ext cx="1307592" cy="304800"/>
+          </a:xfrm>
+          <a:prstGeom prst="rect">
+            <a:avLst/>
+          </a:prstGeom>
+        </p:spPr>
+      </p:pic>
+      <p:sp>
+        <p:nvSpPr>
+          <p:cNvPr id="9" name="TextBox 8"/>
+          <p:cNvSpPr txBox="1"/>
+          <p:nvPr/>
+        </p:nvSpPr>
+        <p:spPr>
+          <a:xfrm>
+            <a:off x="2542032" y="1851660"/>
+            <a:ext cx="378166" cy="457200"/>
+          </a:xfrm>
+          <a:prstGeom prst="rect">
+            <a:avLst/>
+          </a:prstGeom>
+          <a:noFill/>
+        </p:spPr>
+        <p:txBody>
+          <a:bodyPr wrap="none" lIns="45720" rIns="45720" tIns="18288" bIns="18288" anchor="ctr">
+            <a:noAutofit/>
+          </a:bodyPr>
+          <a:lstStyle/>
+          <a:p>
+            <a:pPr algn="l"/>
+            <a:r>
+              <a:rPr sz="2280" b="0" i="0">
+                <a:solidFill>
+                  <a:srgbClr val="1A1A1A"/>
+                </a:solidFill>
+                <a:latin typeface="Lexend"/>
+              </a:rPr>
+              <a:t>, </a:t>
+            </a:r>
+          </a:p>
+        </p:txBody>
+      </p:sp>
+      <p:pic>
+        <p:nvPicPr>
+          <p:cNvPr id="10" name="Picture 9" descr="f2542c0ca55f8587.png"/>
+          <p:cNvPicPr>
+            <a:picLocks noChangeAspect="1"/>
+          </p:cNvPicPr>
+          <p:nvPr/>
+        </p:nvPicPr>
+        <p:blipFill>
+          <a:blip r:embed="rId3"/>
+          <a:stretch>
+            <a:fillRect/>
+          </a:stretch>
+        </p:blipFill>
+        <p:spPr>
+          <a:xfrm>
+            <a:off x="2783038" y="1953768"/>
+            <a:ext cx="1347216" cy="240791"/>
+          </a:xfrm>
+          <a:prstGeom prst="rect">
+            <a:avLst/>
+          </a:prstGeom>
+        </p:spPr>
+      </p:pic>
+      <p:sp>
+        <p:nvSpPr>
+          <p:cNvPr id="11" name="TextBox 10"/>
+          <p:cNvSpPr txBox="1"/>
+          <p:nvPr/>
+        </p:nvSpPr>
+        <p:spPr>
+          <a:xfrm>
+            <a:off x="4130254" y="1851660"/>
+            <a:ext cx="378166" cy="457200"/>
+          </a:xfrm>
+          <a:prstGeom prst="rect">
+            <a:avLst/>
+          </a:prstGeom>
+          <a:noFill/>
+        </p:spPr>
+        <p:txBody>
+          <a:bodyPr wrap="none" lIns="45720" rIns="45720" tIns="18288" bIns="18288" anchor="ctr">
+            <a:noAutofit/>
+          </a:bodyPr>
+          <a:lstStyle/>
+          <a:p>
+            <a:pPr algn="l"/>
+            <a:r>
+              <a:rPr sz="2280" b="0" i="0">
+                <a:solidFill>
+                  <a:srgbClr val="1A1A1A"/>
+                </a:solidFill>
+                <a:latin typeface="Lexend"/>
+              </a:rPr>
+              <a:t>, </a:t>
+            </a:r>
+          </a:p>
+        </p:txBody>
+      </p:sp>
+      <p:pic>
+        <p:nvPicPr>
+          <p:cNvPr id="12" name="Picture 11" descr="e3914b43cbb52236.png"/>
+          <p:cNvPicPr>
+            <a:picLocks noChangeAspect="1"/>
+          </p:cNvPicPr>
+          <p:nvPr/>
+        </p:nvPicPr>
+        <p:blipFill>
+          <a:blip r:embed="rId4"/>
+          <a:stretch>
+            <a:fillRect/>
+          </a:stretch>
+        </p:blipFill>
+        <p:spPr>
+          <a:xfrm>
+            <a:off x="4371260" y="1956815"/>
+            <a:ext cx="1844040" cy="243840"/>
+          </a:xfrm>
+          <a:prstGeom prst="rect">
+            <a:avLst/>
+          </a:prstGeom>
+        </p:spPr>
+      </p:pic>
+      <p:sp>
+        <p:nvSpPr>
+          <p:cNvPr id="13" name="TextBox 12"/>
+          <p:cNvSpPr txBox="1"/>
+          <p:nvPr/>
+        </p:nvSpPr>
+        <p:spPr>
+          <a:xfrm>
+            <a:off x="6215300" y="1851660"/>
+            <a:ext cx="280301" cy="457200"/>
+          </a:xfrm>
+          <a:prstGeom prst="rect">
+            <a:avLst/>
+          </a:prstGeom>
+          <a:noFill/>
+        </p:spPr>
+        <p:txBody>
+          <a:bodyPr wrap="none" lIns="45720" rIns="45720" tIns="18288" bIns="18288" anchor="ctr">
+            <a:noAutofit/>
+          </a:bodyPr>
+          <a:lstStyle/>
+          <a:p>
+            <a:pPr algn="l"/>
+            <a:r>
+              <a:rPr sz="2280" b="0" i="0">
+                <a:solidFill>
+                  <a:srgbClr val="1A1A1A"/>
+                </a:solidFill>
+                <a:latin typeface="Lexend"/>
+              </a:rPr>
+              <a:t>.</a:t>
+            </a:r>
+          </a:p>
+        </p:txBody>
+      </p:sp>
+      <p:sp>
+        <p:nvSpPr>
+          <p:cNvPr id="14" name="TextBox 13"/>
+          <p:cNvSpPr txBox="1"/>
+          <p:nvPr/>
+        </p:nvSpPr>
+        <p:spPr>
+          <a:xfrm>
+            <a:off x="1234440" y="2487168"/>
+            <a:ext cx="10058400" cy="429370"/>
+          </a:xfrm>
+          <a:prstGeom prst="rect">
+            <a:avLst/>
+          </a:prstGeom>
+          <a:noFill/>
+        </p:spPr>
+        <p:txBody>
+          <a:bodyPr wrap="square" lIns="45720" rIns="45720" tIns="18288" bIns="18288" anchor="t">
+            <a:spAutoFit/>
+          </a:bodyPr>
+          <a:lstStyle/>
+          <a:p>
+            <a:pPr algn="l"/>
+            <a:r>
+              <a:rPr sz="2280" b="0" i="0">
+                <a:solidFill>
+                  <a:srgbClr val="1A1A1A"/>
+                </a:solidFill>
+                <a:latin typeface="Lexend"/>
+              </a:rPr>
+              <a:t>A table is 3 yd long.</a:t>
+            </a:r>
+          </a:p>
+        </p:txBody>
+      </p:sp>
+      <p:sp>
+        <p:nvSpPr>
+          <p:cNvPr id="15" name="TextBox 14"/>
+          <p:cNvSpPr txBox="1"/>
+          <p:nvPr/>
+        </p:nvSpPr>
+        <p:spPr>
+          <a:xfrm>
+            <a:off x="1234440" y="3026266"/>
+            <a:ext cx="10058400" cy="429370"/>
+          </a:xfrm>
+          <a:prstGeom prst="rect">
+            <a:avLst/>
+          </a:prstGeom>
+          <a:noFill/>
+        </p:spPr>
+        <p:txBody>
+          <a:bodyPr wrap="square" lIns="45720" rIns="45720" tIns="18288" bIns="18288" anchor="t">
+            <a:spAutoFit/>
+          </a:bodyPr>
+          <a:lstStyle/>
+          <a:p>
+            <a:pPr algn="l"/>
+            <a:r>
+              <a:rPr sz="2280" b="1" i="0">
+                <a:solidFill>
+                  <a:srgbClr val="1A1A1A"/>
+                </a:solidFill>
+                <a:latin typeface="Lexend"/>
+              </a:rPr>
+              <a:t>About how many centimeters is that? Estimate, then compute.</a:t>
+            </a:r>
+          </a:p>
+        </p:txBody>
+      </p:sp>
+      <p:sp>
+        <p:nvSpPr>
+          <p:cNvPr id="16" name="TextBox 15"/>
+          <p:cNvSpPr txBox="1"/>
+          <p:nvPr/>
+        </p:nvSpPr>
+        <p:spPr>
+          <a:xfrm>
+            <a:off x="2294988" y="3661376"/>
+            <a:ext cx="7708703" cy="457200"/>
+          </a:xfrm>
+          <a:prstGeom prst="rect">
+            <a:avLst/>
+          </a:prstGeom>
+          <a:noFill/>
+        </p:spPr>
+        <p:txBody>
+          <a:bodyPr wrap="none" lIns="45720" rIns="45720" tIns="18288" bIns="18288" anchor="ctr">
+            <a:noAutofit/>
+          </a:bodyPr>
+          <a:lstStyle/>
+          <a:p>
+            <a:pPr algn="l"/>
+            <a:r>
+              <a:rPr sz="2330" b="0" i="0">
+                <a:solidFill>
+                  <a:srgbClr val="1A1A1A"/>
+                </a:solidFill>
+                <a:latin typeface="Lexend"/>
+              </a:rPr>
+              <a:t>Estimate: 3 yd is a bit under 3 m, so about 270 cm</a:t>
+            </a:r>
+          </a:p>
+        </p:txBody>
+      </p:sp>
+      <p:pic>
+        <p:nvPicPr>
+          <p:cNvPr id="17" name="Picture 16" descr="d185211e555287e1.png"/>
+          <p:cNvPicPr>
+            <a:picLocks noChangeAspect="1"/>
+          </p:cNvPicPr>
+          <p:nvPr/>
+        </p:nvPicPr>
+        <p:blipFill>
+          <a:blip r:embed="rId5"/>
+          <a:stretch>
+            <a:fillRect/>
+          </a:stretch>
+        </p:blipFill>
+        <p:spPr>
+          <a:xfrm>
+            <a:off x="2349852" y="4284026"/>
             <a:ext cx="5269992" cy="231648"/>
           </a:xfrm>
           <a:prstGeom prst="rect">
@@ -10174,13 +11299,13 @@
       </p:pic>
       <p:sp>
         <p:nvSpPr>
-          <p:cNvPr id="12" name="TextBox 11"/>
-          <p:cNvSpPr txBox="1"/>
-          <p:nvPr/>
-        </p:nvSpPr>
-        <p:spPr>
-          <a:xfrm>
-            <a:off x="777240" y="4663440"/>
+          <p:cNvPr id="18" name="TextBox 17"/>
+          <p:cNvSpPr txBox="1"/>
+          <p:nvPr/>
+        </p:nvSpPr>
+        <p:spPr>
+          <a:xfrm>
+            <a:off x="777240" y="4735796"/>
             <a:ext cx="10607040" cy="548640"/>
           </a:xfrm>
           <a:prstGeom prst="rect">
@@ -10443,8 +11568,161 @@
         </p:nvSpPr>
         <p:spPr>
           <a:xfrm>
-            <a:off x="1234440" y="1874519"/>
-            <a:ext cx="10058400" cy="858740"/>
+            <a:off x="1234440" y="1851660"/>
+            <a:ext cx="2464705" cy="457200"/>
+          </a:xfrm>
+          <a:prstGeom prst="rect">
+            <a:avLst/>
+          </a:prstGeom>
+          <a:noFill/>
+        </p:spPr>
+        <p:txBody>
+          <a:bodyPr wrap="none" lIns="45720" rIns="45720" tIns="18288" bIns="18288" anchor="ctr">
+            <a:noAutofit/>
+          </a:bodyPr>
+          <a:lstStyle/>
+          <a:p>
+            <a:pPr algn="l"/>
+            <a:r>
+              <a:rPr sz="2280" b="0" i="0">
+                <a:solidFill>
+                  <a:srgbClr val="1A1A1A"/>
+                </a:solidFill>
+                <a:latin typeface="Lexend"/>
+              </a:rPr>
+              <a:t>Rate on Nov 2: </a:t>
+            </a:r>
+          </a:p>
+        </p:txBody>
+      </p:sp>
+      <p:pic>
+        <p:nvPicPr>
+          <p:cNvPr id="9" name="Picture 8" descr="6f3040f3d83f449a.png"/>
+          <p:cNvPicPr>
+            <a:picLocks noChangeAspect="1"/>
+          </p:cNvPicPr>
+          <p:nvPr/>
+        </p:nvPicPr>
+        <p:blipFill>
+          <a:blip r:embed="rId2"/>
+          <a:stretch>
+            <a:fillRect/>
+          </a:stretch>
+        </p:blipFill>
+        <p:spPr>
+          <a:xfrm>
+            <a:off x="3561985" y="1950720"/>
+            <a:ext cx="1898904" cy="274320"/>
+          </a:xfrm>
+          <a:prstGeom prst="rect">
+            <a:avLst/>
+          </a:prstGeom>
+        </p:spPr>
+      </p:pic>
+      <p:sp>
+        <p:nvSpPr>
+          <p:cNvPr id="10" name="TextBox 9"/>
+          <p:cNvSpPr txBox="1"/>
+          <p:nvPr/>
+        </p:nvSpPr>
+        <p:spPr>
+          <a:xfrm>
+            <a:off x="5460889" y="1851660"/>
+            <a:ext cx="290742" cy="457200"/>
+          </a:xfrm>
+          <a:prstGeom prst="rect">
+            <a:avLst/>
+          </a:prstGeom>
+          <a:noFill/>
+        </p:spPr>
+        <p:txBody>
+          <a:bodyPr wrap="none" lIns="45720" rIns="45720" tIns="18288" bIns="18288" anchor="ctr">
+            <a:noAutofit/>
+          </a:bodyPr>
+          <a:lstStyle/>
+          <a:p>
+            <a:pPr algn="l"/>
+            <a:r>
+              <a:rPr sz="2280" b="0" i="0">
+                <a:solidFill>
+                  <a:srgbClr val="1A1A1A"/>
+                </a:solidFill>
+                <a:latin typeface="Lexend"/>
+              </a:rPr>
+              <a:t>;</a:t>
+            </a:r>
+          </a:p>
+        </p:txBody>
+      </p:sp>
+      <p:pic>
+        <p:nvPicPr>
+          <p:cNvPr id="11" name="Picture 10" descr="e54799be41057147.png"/>
+          <p:cNvPicPr>
+            <a:picLocks noChangeAspect="1"/>
+          </p:cNvPicPr>
+          <p:nvPr/>
+        </p:nvPicPr>
+        <p:blipFill>
+          <a:blip r:embed="rId3"/>
+          <a:stretch>
+            <a:fillRect/>
+          </a:stretch>
+        </p:blipFill>
+        <p:spPr>
+          <a:xfrm>
+            <a:off x="1234440" y="2584704"/>
+            <a:ext cx="2624328" cy="292608"/>
+          </a:xfrm>
+          <a:prstGeom prst="rect">
+            <a:avLst/>
+          </a:prstGeom>
+        </p:spPr>
+      </p:pic>
+      <p:sp>
+        <p:nvSpPr>
+          <p:cNvPr id="12" name="TextBox 11"/>
+          <p:cNvSpPr txBox="1"/>
+          <p:nvPr/>
+        </p:nvSpPr>
+        <p:spPr>
+          <a:xfrm>
+            <a:off x="3858768" y="2464308"/>
+            <a:ext cx="280301" cy="457200"/>
+          </a:xfrm>
+          <a:prstGeom prst="rect">
+            <a:avLst/>
+          </a:prstGeom>
+          <a:noFill/>
+        </p:spPr>
+        <p:txBody>
+          <a:bodyPr wrap="none" lIns="45720" rIns="45720" tIns="18288" bIns="18288" anchor="ctr">
+            <a:noAutofit/>
+          </a:bodyPr>
+          <a:lstStyle/>
+          <a:p>
+            <a:pPr algn="l"/>
+            <a:r>
+              <a:rPr sz="2280" b="0" i="0">
+                <a:solidFill>
+                  <a:srgbClr val="1A1A1A"/>
+                </a:solidFill>
+                <a:latin typeface="Lexend"/>
+              </a:rPr>
+              <a:t>.</a:t>
+            </a:r>
+          </a:p>
+        </p:txBody>
+      </p:sp>
+      <p:sp>
+        <p:nvSpPr>
+          <p:cNvPr id="13" name="TextBox 12"/>
+          <p:cNvSpPr txBox="1"/>
+          <p:nvPr/>
+        </p:nvSpPr>
+        <p:spPr>
+          <a:xfrm>
+            <a:off x="1234440" y="3099816"/>
+            <a:ext cx="10058400" cy="429370"/>
           </a:xfrm>
           <a:prstGeom prst="rect">
             <a:avLst/>
@@ -10465,20 +11743,20 @@
                 </a:solidFill>
                 <a:latin typeface="Lexend"/>
               </a:rPr>
-              <a:t>Rate on Nov 2: $1 = 1.32 CAD; 1 CAD = 16.2 pesos. Theo changes $200 to CAD, then to pesos.</a:t>
-            </a:r>
-          </a:p>
-        </p:txBody>
-      </p:sp>
-      <p:sp>
-        <p:nvSpPr>
-          <p:cNvPr id="9" name="TextBox 8"/>
-          <p:cNvSpPr txBox="1"/>
-          <p:nvPr/>
-        </p:nvSpPr>
-        <p:spPr>
-          <a:xfrm>
-            <a:off x="1234440" y="2842988"/>
+              <a:t>Theo changes $200 to CAD, then to pesos.</a:t>
+            </a:r>
+          </a:p>
+        </p:txBody>
+      </p:sp>
+      <p:sp>
+        <p:nvSpPr>
+          <p:cNvPr id="14" name="TextBox 13"/>
+          <p:cNvSpPr txBox="1"/>
+          <p:nvPr/>
+        </p:nvSpPr>
+        <p:spPr>
+          <a:xfrm>
+            <a:off x="1234440" y="3638914"/>
             <a:ext cx="10058400" cy="429370"/>
           </a:xfrm>
           <a:prstGeom prst="rect">
@@ -10507,13 +11785,13 @@
       </p:sp>
       <p:sp>
         <p:nvSpPr>
-          <p:cNvPr id="10" name="TextBox 9"/>
-          <p:cNvSpPr txBox="1"/>
-          <p:nvPr/>
-        </p:nvSpPr>
-        <p:spPr>
-          <a:xfrm>
-            <a:off x="777240" y="4343400"/>
+          <p:cNvPr id="15" name="TextBox 14"/>
+          <p:cNvSpPr txBox="1"/>
+          <p:nvPr/>
+        </p:nvSpPr>
+        <p:spPr>
+          <a:xfrm>
+            <a:off x="777240" y="4360892"/>
             <a:ext cx="10607040" cy="457200"/>
           </a:xfrm>
           <a:prstGeom prst="rect">
@@ -10776,17 +12054,17 @@
         </p:nvSpPr>
         <p:spPr>
           <a:xfrm>
-            <a:off x="1234440" y="1874519"/>
-            <a:ext cx="10058400" cy="858740"/>
-          </a:xfrm>
-          <a:prstGeom prst="rect">
-            <a:avLst/>
-          </a:prstGeom>
-          <a:noFill/>
-        </p:spPr>
-        <p:txBody>
-          <a:bodyPr wrap="square" lIns="45720" rIns="45720" tIns="18288" bIns="18288" anchor="t">
-            <a:spAutoFit/>
+            <a:off x="1234440" y="1851660"/>
+            <a:ext cx="2464705" cy="457200"/>
+          </a:xfrm>
+          <a:prstGeom prst="rect">
+            <a:avLst/>
+          </a:prstGeom>
+          <a:noFill/>
+        </p:spPr>
+        <p:txBody>
+          <a:bodyPr wrap="none" lIns="45720" rIns="45720" tIns="18288" bIns="18288" anchor="ctr">
+            <a:noAutofit/>
           </a:bodyPr>
           <a:lstStyle/>
           <a:p>
@@ -10798,49 +12076,14 @@
                 </a:solidFill>
                 <a:latin typeface="Lexend"/>
               </a:rPr>
-              <a:t>Rate on Nov 2: $1 = 1.32 CAD; 1 CAD = 16.2 pesos. Theo changes $200 to CAD, then to pesos.</a:t>
-            </a:r>
-          </a:p>
-        </p:txBody>
-      </p:sp>
-      <p:sp>
-        <p:nvSpPr>
-          <p:cNvPr id="9" name="TextBox 8"/>
-          <p:cNvSpPr txBox="1"/>
-          <p:nvPr/>
-        </p:nvSpPr>
-        <p:spPr>
-          <a:xfrm>
-            <a:off x="1234440" y="2842988"/>
-            <a:ext cx="10058400" cy="429370"/>
-          </a:xfrm>
-          <a:prstGeom prst="rect">
-            <a:avLst/>
-          </a:prstGeom>
-          <a:noFill/>
-        </p:spPr>
-        <p:txBody>
-          <a:bodyPr wrap="square" lIns="45720" rIns="45720" tIns="18288" bIns="18288" anchor="t">
-            <a:spAutoFit/>
-          </a:bodyPr>
-          <a:lstStyle/>
-          <a:p>
-            <a:pPr algn="l"/>
-            <a:r>
-              <a:rPr sz="2280" b="1" i="0">
-                <a:solidFill>
-                  <a:srgbClr val="1A1A1A"/>
-                </a:solidFill>
-                <a:latin typeface="Lexend"/>
-              </a:rPr>
-              <a:t>How many pesos does he get?</a:t>
+              <a:t>Rate on Nov 2: </a:t>
             </a:r>
           </a:p>
         </p:txBody>
       </p:sp>
       <p:pic>
         <p:nvPicPr>
-          <p:cNvPr id="10" name="Picture 9" descr="773c04bbf5cec411.png"/>
+          <p:cNvPr id="9" name="Picture 8" descr="62d87b2c8cfaf8d7.png"/>
           <p:cNvPicPr>
             <a:picLocks noChangeAspect="1"/>
           </p:cNvPicPr>
@@ -10854,7 +12097,195 @@
         </p:blipFill>
         <p:spPr>
           <a:xfrm>
-            <a:off x="2965704" y="3548203"/>
+            <a:off x="3561985" y="1950720"/>
+            <a:ext cx="1898904" cy="274320"/>
+          </a:xfrm>
+          <a:prstGeom prst="rect">
+            <a:avLst/>
+          </a:prstGeom>
+        </p:spPr>
+      </p:pic>
+      <p:sp>
+        <p:nvSpPr>
+          <p:cNvPr id="10" name="TextBox 9"/>
+          <p:cNvSpPr txBox="1"/>
+          <p:nvPr/>
+        </p:nvSpPr>
+        <p:spPr>
+          <a:xfrm>
+            <a:off x="5460889" y="1851660"/>
+            <a:ext cx="290742" cy="457200"/>
+          </a:xfrm>
+          <a:prstGeom prst="rect">
+            <a:avLst/>
+          </a:prstGeom>
+          <a:noFill/>
+        </p:spPr>
+        <p:txBody>
+          <a:bodyPr wrap="none" lIns="45720" rIns="45720" tIns="18288" bIns="18288" anchor="ctr">
+            <a:noAutofit/>
+          </a:bodyPr>
+          <a:lstStyle/>
+          <a:p>
+            <a:pPr algn="l"/>
+            <a:r>
+              <a:rPr sz="2280" b="0" i="0">
+                <a:solidFill>
+                  <a:srgbClr val="1A1A1A"/>
+                </a:solidFill>
+                <a:latin typeface="Lexend"/>
+              </a:rPr>
+              <a:t>;</a:t>
+            </a:r>
+          </a:p>
+        </p:txBody>
+      </p:sp>
+      <p:pic>
+        <p:nvPicPr>
+          <p:cNvPr id="11" name="Picture 10" descr="5f4792e490fd8ddb.png"/>
+          <p:cNvPicPr>
+            <a:picLocks noChangeAspect="1"/>
+          </p:cNvPicPr>
+          <p:nvPr/>
+        </p:nvPicPr>
+        <p:blipFill>
+          <a:blip r:embed="rId3"/>
+          <a:stretch>
+            <a:fillRect/>
+          </a:stretch>
+        </p:blipFill>
+        <p:spPr>
+          <a:xfrm>
+            <a:off x="1234440" y="2584704"/>
+            <a:ext cx="2621280" cy="292608"/>
+          </a:xfrm>
+          <a:prstGeom prst="rect">
+            <a:avLst/>
+          </a:prstGeom>
+        </p:spPr>
+      </p:pic>
+      <p:sp>
+        <p:nvSpPr>
+          <p:cNvPr id="12" name="TextBox 11"/>
+          <p:cNvSpPr txBox="1"/>
+          <p:nvPr/>
+        </p:nvSpPr>
+        <p:spPr>
+          <a:xfrm>
+            <a:off x="3855720" y="2464308"/>
+            <a:ext cx="280301" cy="457200"/>
+          </a:xfrm>
+          <a:prstGeom prst="rect">
+            <a:avLst/>
+          </a:prstGeom>
+          <a:noFill/>
+        </p:spPr>
+        <p:txBody>
+          <a:bodyPr wrap="none" lIns="45720" rIns="45720" tIns="18288" bIns="18288" anchor="ctr">
+            <a:noAutofit/>
+          </a:bodyPr>
+          <a:lstStyle/>
+          <a:p>
+            <a:pPr algn="l"/>
+            <a:r>
+              <a:rPr sz="2280" b="0" i="0">
+                <a:solidFill>
+                  <a:srgbClr val="1A1A1A"/>
+                </a:solidFill>
+                <a:latin typeface="Lexend"/>
+              </a:rPr>
+              <a:t>.</a:t>
+            </a:r>
+          </a:p>
+        </p:txBody>
+      </p:sp>
+      <p:sp>
+        <p:nvSpPr>
+          <p:cNvPr id="13" name="TextBox 12"/>
+          <p:cNvSpPr txBox="1"/>
+          <p:nvPr/>
+        </p:nvSpPr>
+        <p:spPr>
+          <a:xfrm>
+            <a:off x="1234440" y="3099816"/>
+            <a:ext cx="10058400" cy="429370"/>
+          </a:xfrm>
+          <a:prstGeom prst="rect">
+            <a:avLst/>
+          </a:prstGeom>
+          <a:noFill/>
+        </p:spPr>
+        <p:txBody>
+          <a:bodyPr wrap="square" lIns="45720" rIns="45720" tIns="18288" bIns="18288" anchor="t">
+            <a:spAutoFit/>
+          </a:bodyPr>
+          <a:lstStyle/>
+          <a:p>
+            <a:pPr algn="l"/>
+            <a:r>
+              <a:rPr sz="2280" b="0" i="0">
+                <a:solidFill>
+                  <a:srgbClr val="1A1A1A"/>
+                </a:solidFill>
+                <a:latin typeface="Lexend"/>
+              </a:rPr>
+              <a:t>Theo changes $200 to CAD, then to pesos.</a:t>
+            </a:r>
+          </a:p>
+        </p:txBody>
+      </p:sp>
+      <p:sp>
+        <p:nvSpPr>
+          <p:cNvPr id="14" name="TextBox 13"/>
+          <p:cNvSpPr txBox="1"/>
+          <p:nvPr/>
+        </p:nvSpPr>
+        <p:spPr>
+          <a:xfrm>
+            <a:off x="1234440" y="3638914"/>
+            <a:ext cx="10058400" cy="429370"/>
+          </a:xfrm>
+          <a:prstGeom prst="rect">
+            <a:avLst/>
+          </a:prstGeom>
+          <a:noFill/>
+        </p:spPr>
+        <p:txBody>
+          <a:bodyPr wrap="square" lIns="45720" rIns="45720" tIns="18288" bIns="18288" anchor="t">
+            <a:spAutoFit/>
+          </a:bodyPr>
+          <a:lstStyle/>
+          <a:p>
+            <a:pPr algn="l"/>
+            <a:r>
+              <a:rPr sz="2280" b="1" i="0">
+                <a:solidFill>
+                  <a:srgbClr val="1A1A1A"/>
+                </a:solidFill>
+                <a:latin typeface="Lexend"/>
+              </a:rPr>
+              <a:t>How many pesos does he get?</a:t>
+            </a:r>
+          </a:p>
+        </p:txBody>
+      </p:sp>
+      <p:pic>
+        <p:nvPicPr>
+          <p:cNvPr id="15" name="Picture 14" descr="773c04bbf5cec411.png"/>
+          <p:cNvPicPr>
+            <a:picLocks noChangeAspect="1"/>
+          </p:cNvPicPr>
+          <p:nvPr/>
+        </p:nvPicPr>
+        <p:blipFill>
+          <a:blip r:embed="rId4"/>
+          <a:stretch>
+            <a:fillRect/>
+          </a:stretch>
+        </p:blipFill>
+        <p:spPr>
+          <a:xfrm>
+            <a:off x="2965704" y="4387753"/>
             <a:ext cx="6339840" cy="316992"/>
           </a:xfrm>
           <a:prstGeom prst="rect">
@@ -10864,13 +12295,13 @@
       </p:pic>
       <p:sp>
         <p:nvSpPr>
-          <p:cNvPr id="11" name="TextBox 10"/>
-          <p:cNvSpPr txBox="1"/>
-          <p:nvPr/>
-        </p:nvSpPr>
-        <p:spPr>
-          <a:xfrm>
-            <a:off x="777240" y="4663440"/>
+          <p:cNvPr id="16" name="TextBox 15"/>
+          <p:cNvSpPr txBox="1"/>
+          <p:nvPr/>
+        </p:nvSpPr>
+        <p:spPr>
+          <a:xfrm>
+            <a:off x="777240" y="4845524"/>
             <a:ext cx="10607040" cy="548640"/>
           </a:xfrm>
           <a:prstGeom prst="rect">
@@ -11133,8 +12564,8 @@
         </p:nvSpPr>
         <p:spPr>
           <a:xfrm>
-            <a:off x="1874519" y="1440180"/>
-            <a:ext cx="7580215" cy="457200"/>
+            <a:off x="1874519" y="1504188"/>
+            <a:ext cx="1071364" cy="457200"/>
           </a:xfrm>
           <a:prstGeom prst="rect">
             <a:avLst/>
@@ -11155,154 +12586,14 @@
                 </a:solidFill>
                 <a:latin typeface="Lexend"/>
               </a:rPr>
-              <a:t>1.   At ¼ in : 1 ft, how long is a 10-ft wall on the plan?</a:t>
-            </a:r>
-          </a:p>
-        </p:txBody>
-      </p:sp>
-      <p:sp>
-        <p:nvSpPr>
-          <p:cNvPr id="9" name="TextBox 8"/>
-          <p:cNvSpPr txBox="1"/>
-          <p:nvPr/>
-        </p:nvSpPr>
-        <p:spPr>
-          <a:xfrm>
-            <a:off x="9866215" y="1440180"/>
-            <a:ext cx="997129" cy="457200"/>
-          </a:xfrm>
-          <a:prstGeom prst="rect">
-            <a:avLst/>
-          </a:prstGeom>
-          <a:noFill/>
-        </p:spPr>
-        <p:txBody>
-          <a:bodyPr wrap="none" lIns="45720" rIns="45720" tIns="18288" bIns="18288" anchor="ctr">
-            <a:noAutofit/>
-          </a:bodyPr>
-          <a:lstStyle/>
-          <a:p>
-            <a:pPr algn="l"/>
-            <a:r>
-              <a:rPr sz="2180" b="1" i="0">
-                <a:solidFill>
-                  <a:srgbClr val="9E1B32"/>
-                </a:solidFill>
-                <a:latin typeface="Lexend"/>
-              </a:rPr>
-              <a:t>2.5 in</a:t>
-            </a:r>
-          </a:p>
-        </p:txBody>
-      </p:sp>
-      <p:sp>
-        <p:nvSpPr>
-          <p:cNvPr id="10" name="TextBox 9"/>
-          <p:cNvSpPr txBox="1"/>
-          <p:nvPr/>
-        </p:nvSpPr>
-        <p:spPr>
-          <a:xfrm>
-            <a:off x="1874519" y="2052828"/>
-            <a:ext cx="9336740" cy="457200"/>
-          </a:xfrm>
-          <a:prstGeom prst="rect">
-            <a:avLst/>
-          </a:prstGeom>
-          <a:noFill/>
-        </p:spPr>
-        <p:txBody>
-          <a:bodyPr wrap="none" lIns="45720" rIns="45720" tIns="18288" bIns="18288" anchor="ctr">
-            <a:noAutofit/>
-          </a:bodyPr>
-          <a:lstStyle/>
-          <a:p>
-            <a:pPr algn="l"/>
-            <a:r>
-              <a:rPr sz="2180" b="0" i="0">
-                <a:solidFill>
-                  <a:srgbClr val="1A1A1A"/>
-                </a:solidFill>
-                <a:latin typeface="Lexend"/>
-              </a:rPr>
-              <a:t>2.   A 14 cm side becomes 7 cm in the copy. Find the scale factor.</a:t>
-            </a:r>
-          </a:p>
-        </p:txBody>
-      </p:sp>
-      <p:sp>
-        <p:nvSpPr>
-          <p:cNvPr id="11" name="TextBox 10"/>
-          <p:cNvSpPr txBox="1"/>
-          <p:nvPr/>
-        </p:nvSpPr>
-        <p:spPr>
-          <a:xfrm>
-            <a:off x="2606040" y="2510028"/>
-            <a:ext cx="1009168" cy="457200"/>
-          </a:xfrm>
-          <a:prstGeom prst="rect">
-            <a:avLst/>
-          </a:prstGeom>
-          <a:noFill/>
-        </p:spPr>
-        <p:txBody>
-          <a:bodyPr wrap="none" lIns="45720" rIns="45720" tIns="18288" bIns="18288" anchor="ctr">
-            <a:noAutofit/>
-          </a:bodyPr>
-          <a:lstStyle/>
-          <a:p>
-            <a:pPr algn="l"/>
-            <a:r>
-              <a:rPr sz="2180" b="1" i="0">
-                <a:solidFill>
-                  <a:srgbClr val="9E1B32"/>
-                </a:solidFill>
-                <a:latin typeface="Lexend"/>
-              </a:rPr>
-              <a:t>k = ½</a:t>
-            </a:r>
-          </a:p>
-        </p:txBody>
-      </p:sp>
-      <p:sp>
-        <p:nvSpPr>
-          <p:cNvPr id="12" name="TextBox 11"/>
-          <p:cNvSpPr txBox="1"/>
-          <p:nvPr/>
-        </p:nvSpPr>
-        <p:spPr>
-          <a:xfrm>
-            <a:off x="1874519" y="3122676"/>
-            <a:ext cx="3356481" cy="457200"/>
-          </a:xfrm>
-          <a:prstGeom prst="rect">
-            <a:avLst/>
-          </a:prstGeom>
-          <a:noFill/>
-        </p:spPr>
-        <p:txBody>
-          <a:bodyPr wrap="none" lIns="45720" rIns="45720" tIns="18288" bIns="18288" anchor="ctr">
-            <a:noAutofit/>
-          </a:bodyPr>
-          <a:lstStyle/>
-          <a:p>
-            <a:pPr algn="l"/>
-            <a:r>
-              <a:rPr sz="2180" b="0" i="0">
-                <a:solidFill>
-                  <a:srgbClr val="1A1A1A"/>
-                </a:solidFill>
-                <a:latin typeface="Lexend"/>
-              </a:rPr>
-              <a:t>3.   Find the quotient:  </a:t>
+              <a:t>1.   At </a:t>
             </a:r>
           </a:p>
         </p:txBody>
       </p:sp>
       <p:pic>
         <p:nvPicPr>
-          <p:cNvPr id="13" name="Picture 12" descr="cfca3ed0d980782e.png"/>
+          <p:cNvPr id="9" name="Picture 8" descr="9ca189c78b28bad0.png"/>
           <p:cNvPicPr>
             <a:picLocks noChangeAspect="1"/>
           </p:cNvPicPr>
@@ -11316,8 +12607,8 @@
         </p:blipFill>
         <p:spPr>
           <a:xfrm>
-            <a:off x="5093841" y="3238500"/>
-            <a:ext cx="1161288" cy="225552"/>
+            <a:off x="2808724" y="1463040"/>
+            <a:ext cx="1185672" cy="539496"/>
           </a:xfrm>
           <a:prstGeom prst="rect">
             <a:avLst/>
@@ -11326,14 +12617,14 @@
       </p:pic>
       <p:sp>
         <p:nvSpPr>
-          <p:cNvPr id="14" name="TextBox 13"/>
-          <p:cNvSpPr txBox="1"/>
-          <p:nvPr/>
-        </p:nvSpPr>
-        <p:spPr>
-          <a:xfrm>
-            <a:off x="6803769" y="3122676"/>
-            <a:ext cx="385609" cy="457200"/>
+          <p:cNvPr id="10" name="TextBox 9"/>
+          <p:cNvSpPr txBox="1"/>
+          <p:nvPr/>
+        </p:nvSpPr>
+        <p:spPr>
+          <a:xfrm>
+            <a:off x="3994396" y="1504188"/>
+            <a:ext cx="5461953" cy="457200"/>
           </a:xfrm>
           <a:prstGeom prst="rect">
             <a:avLst/>
@@ -11348,27 +12639,27 @@
           <a:p>
             <a:pPr algn="l"/>
             <a:r>
-              <a:rPr sz="2180" b="1" i="0">
-                <a:solidFill>
-                  <a:srgbClr val="9E1B32"/>
-                </a:solidFill>
-                <a:latin typeface="Lexend"/>
-              </a:rPr>
-              <a:t>5</a:t>
-            </a:r>
-          </a:p>
-        </p:txBody>
-      </p:sp>
-      <p:sp>
-        <p:nvSpPr>
-          <p:cNvPr id="15" name="TextBox 14"/>
-          <p:cNvSpPr txBox="1"/>
-          <p:nvPr/>
-        </p:nvSpPr>
-        <p:spPr>
-          <a:xfrm>
-            <a:off x="1874519" y="3735324"/>
-            <a:ext cx="5672770" cy="457200"/>
+              <a:rPr sz="2180" b="0" i="0">
+                <a:solidFill>
+                  <a:srgbClr val="1A1A1A"/>
+                </a:solidFill>
+                <a:latin typeface="Lexend"/>
+              </a:rPr>
+              <a:t>, how long is a 10-ft wall on the plan?</a:t>
+            </a:r>
+          </a:p>
+        </p:txBody>
+      </p:sp>
+      <p:sp>
+        <p:nvSpPr>
+          <p:cNvPr id="11" name="TextBox 10"/>
+          <p:cNvSpPr txBox="1"/>
+          <p:nvPr/>
+        </p:nvSpPr>
+        <p:spPr>
+          <a:xfrm>
+            <a:off x="9867830" y="1440180"/>
+            <a:ext cx="997129" cy="457200"/>
           </a:xfrm>
           <a:prstGeom prst="rect">
             <a:avLst/>
@@ -11383,17 +12674,146 @@
           <a:p>
             <a:pPr algn="l"/>
             <a:r>
+              <a:rPr sz="2180" b="1" i="0">
+                <a:solidFill>
+                  <a:srgbClr val="9E1B32"/>
+                </a:solidFill>
+                <a:latin typeface="Lexend"/>
+              </a:rPr>
+              <a:t>2.5 in</a:t>
+            </a:r>
+          </a:p>
+        </p:txBody>
+      </p:sp>
+      <p:sp>
+        <p:nvSpPr>
+          <p:cNvPr id="12" name="TextBox 11"/>
+          <p:cNvSpPr txBox="1"/>
+          <p:nvPr/>
+        </p:nvSpPr>
+        <p:spPr>
+          <a:xfrm>
+            <a:off x="1874519" y="2180844"/>
+            <a:ext cx="9336740" cy="457200"/>
+          </a:xfrm>
+          <a:prstGeom prst="rect">
+            <a:avLst/>
+          </a:prstGeom>
+          <a:noFill/>
+        </p:spPr>
+        <p:txBody>
+          <a:bodyPr wrap="none" lIns="45720" rIns="45720" tIns="18288" bIns="18288" anchor="ctr">
+            <a:noAutofit/>
+          </a:bodyPr>
+          <a:lstStyle/>
+          <a:p>
+            <a:pPr algn="l"/>
+            <a:r>
               <a:rPr sz="2180" b="0" i="0">
                 <a:solidFill>
                   <a:srgbClr val="1A1A1A"/>
                 </a:solidFill>
                 <a:latin typeface="Lexend"/>
               </a:rPr>
-              <a:t>4.   12 in = 1 ft. How many feet is 30 in?</a:t>
-            </a:r>
-          </a:p>
-        </p:txBody>
-      </p:sp>
+              <a:t>2.   A 14 cm side becomes 7 cm in the copy. Find the scale factor.</a:t>
+            </a:r>
+          </a:p>
+        </p:txBody>
+      </p:sp>
+      <p:sp>
+        <p:nvSpPr>
+          <p:cNvPr id="13" name="TextBox 12"/>
+          <p:cNvSpPr txBox="1"/>
+          <p:nvPr/>
+        </p:nvSpPr>
+        <p:spPr>
+          <a:xfrm>
+            <a:off x="2606040" y="2638044"/>
+            <a:ext cx="1009168" cy="457200"/>
+          </a:xfrm>
+          <a:prstGeom prst="rect">
+            <a:avLst/>
+          </a:prstGeom>
+          <a:noFill/>
+        </p:spPr>
+        <p:txBody>
+          <a:bodyPr wrap="none" lIns="45720" rIns="45720" tIns="18288" bIns="18288" anchor="ctr">
+            <a:noAutofit/>
+          </a:bodyPr>
+          <a:lstStyle/>
+          <a:p>
+            <a:pPr algn="l"/>
+            <a:r>
+              <a:rPr sz="2180" b="1" i="0">
+                <a:solidFill>
+                  <a:srgbClr val="9E1B32"/>
+                </a:solidFill>
+                <a:latin typeface="Lexend"/>
+              </a:rPr>
+              <a:t>k = ½</a:t>
+            </a:r>
+          </a:p>
+        </p:txBody>
+      </p:sp>
+      <p:sp>
+        <p:nvSpPr>
+          <p:cNvPr id="14" name="TextBox 13"/>
+          <p:cNvSpPr txBox="1"/>
+          <p:nvPr/>
+        </p:nvSpPr>
+        <p:spPr>
+          <a:xfrm>
+            <a:off x="1874519" y="3250692"/>
+            <a:ext cx="3356481" cy="457200"/>
+          </a:xfrm>
+          <a:prstGeom prst="rect">
+            <a:avLst/>
+          </a:prstGeom>
+          <a:noFill/>
+        </p:spPr>
+        <p:txBody>
+          <a:bodyPr wrap="none" lIns="45720" rIns="45720" tIns="18288" bIns="18288" anchor="ctr">
+            <a:noAutofit/>
+          </a:bodyPr>
+          <a:lstStyle/>
+          <a:p>
+            <a:pPr algn="l"/>
+            <a:r>
+              <a:rPr sz="2180" b="0" i="0">
+                <a:solidFill>
+                  <a:srgbClr val="1A1A1A"/>
+                </a:solidFill>
+                <a:latin typeface="Lexend"/>
+              </a:rPr>
+              <a:t>3.   Find the quotient:  </a:t>
+            </a:r>
+          </a:p>
+        </p:txBody>
+      </p:sp>
+      <p:pic>
+        <p:nvPicPr>
+          <p:cNvPr id="15" name="Picture 14" descr="cfca3ed0d980782e.png"/>
+          <p:cNvPicPr>
+            <a:picLocks noChangeAspect="1"/>
+          </p:cNvPicPr>
+          <p:nvPr/>
+        </p:nvPicPr>
+        <p:blipFill>
+          <a:blip r:embed="rId3"/>
+          <a:stretch>
+            <a:fillRect/>
+          </a:stretch>
+        </p:blipFill>
+        <p:spPr>
+          <a:xfrm>
+            <a:off x="5093841" y="3369373"/>
+            <a:ext cx="1161288" cy="225552"/>
+          </a:xfrm>
+          <a:prstGeom prst="rect">
+            <a:avLst/>
+          </a:prstGeom>
+        </p:spPr>
+      </p:pic>
       <p:sp>
         <p:nvSpPr>
           <p:cNvPr id="16" name="TextBox 15"/>
@@ -11402,7 +12822,136 @@
         </p:nvSpPr>
         <p:spPr>
           <a:xfrm>
-            <a:off x="7958770" y="3735324"/>
+            <a:off x="6803769" y="3250692"/>
+            <a:ext cx="385609" cy="457200"/>
+          </a:xfrm>
+          <a:prstGeom prst="rect">
+            <a:avLst/>
+          </a:prstGeom>
+          <a:noFill/>
+        </p:spPr>
+        <p:txBody>
+          <a:bodyPr wrap="none" lIns="45720" rIns="45720" tIns="18288" bIns="18288" anchor="ctr">
+            <a:noAutofit/>
+          </a:bodyPr>
+          <a:lstStyle/>
+          <a:p>
+            <a:pPr algn="l"/>
+            <a:r>
+              <a:rPr sz="2180" b="1" i="0">
+                <a:solidFill>
+                  <a:srgbClr val="9E1B32"/>
+                </a:solidFill>
+                <a:latin typeface="Lexend"/>
+              </a:rPr>
+              <a:t>5</a:t>
+            </a:r>
+          </a:p>
+        </p:txBody>
+      </p:sp>
+      <p:sp>
+        <p:nvSpPr>
+          <p:cNvPr id="17" name="TextBox 16"/>
+          <p:cNvSpPr txBox="1"/>
+          <p:nvPr/>
+        </p:nvSpPr>
+        <p:spPr>
+          <a:xfrm>
+            <a:off x="1874519" y="3863339"/>
+            <a:ext cx="706881" cy="457200"/>
+          </a:xfrm>
+          <a:prstGeom prst="rect">
+            <a:avLst/>
+          </a:prstGeom>
+          <a:noFill/>
+        </p:spPr>
+        <p:txBody>
+          <a:bodyPr wrap="none" lIns="45720" rIns="45720" tIns="18288" bIns="18288" anchor="ctr">
+            <a:noAutofit/>
+          </a:bodyPr>
+          <a:lstStyle/>
+          <a:p>
+            <a:pPr algn="l"/>
+            <a:r>
+              <a:rPr sz="2180" b="0" i="0">
+                <a:solidFill>
+                  <a:srgbClr val="1A1A1A"/>
+                </a:solidFill>
+                <a:latin typeface="Lexend"/>
+              </a:rPr>
+              <a:t>4.   </a:t>
+            </a:r>
+          </a:p>
+        </p:txBody>
+      </p:sp>
+      <p:pic>
+        <p:nvPicPr>
+          <p:cNvPr id="18" name="Picture 17" descr="16140fa0016efc2b.png"/>
+          <p:cNvPicPr>
+            <a:picLocks noChangeAspect="1"/>
+          </p:cNvPicPr>
+          <p:nvPr/>
+        </p:nvPicPr>
+        <p:blipFill>
+          <a:blip r:embed="rId4"/>
+          <a:stretch>
+            <a:fillRect/>
+          </a:stretch>
+        </p:blipFill>
+        <p:spPr>
+          <a:xfrm>
+            <a:off x="2444241" y="3960685"/>
+            <a:ext cx="1362456" cy="240791"/>
+          </a:xfrm>
+          <a:prstGeom prst="rect">
+            <a:avLst/>
+          </a:prstGeom>
+        </p:spPr>
+      </p:pic>
+      <p:sp>
+        <p:nvSpPr>
+          <p:cNvPr id="19" name="TextBox 18"/>
+          <p:cNvSpPr txBox="1"/>
+          <p:nvPr/>
+        </p:nvSpPr>
+        <p:spPr>
+          <a:xfrm>
+            <a:off x="3806697" y="3863339"/>
+            <a:ext cx="3738599" cy="457200"/>
+          </a:xfrm>
+          <a:prstGeom prst="rect">
+            <a:avLst/>
+          </a:prstGeom>
+          <a:noFill/>
+        </p:spPr>
+        <p:txBody>
+          <a:bodyPr wrap="none" lIns="45720" rIns="45720" tIns="18288" bIns="18288" anchor="ctr">
+            <a:noAutofit/>
+          </a:bodyPr>
+          <a:lstStyle/>
+          <a:p>
+            <a:pPr algn="l"/>
+            <a:r>
+              <a:rPr sz="2180" b="0" i="0">
+                <a:solidFill>
+                  <a:srgbClr val="1A1A1A"/>
+                </a:solidFill>
+                <a:latin typeface="Lexend"/>
+              </a:rPr>
+              <a:t>. How many feet is 30 in?</a:t>
+            </a:r>
+          </a:p>
+        </p:txBody>
+      </p:sp>
+      <p:sp>
+        <p:nvSpPr>
+          <p:cNvPr id="20" name="TextBox 19"/>
+          <p:cNvSpPr txBox="1"/>
+          <p:nvPr/>
+        </p:nvSpPr>
+        <p:spPr>
+          <a:xfrm>
+            <a:off x="7956776" y="3863339"/>
             <a:ext cx="950069" cy="457200"/>
           </a:xfrm>
           <a:prstGeom prst="rect">
@@ -11657,15 +13206,74 @@
           </a:p>
         </p:txBody>
       </p:sp>
-      <p:sp>
-        <p:nvSpPr>
-          <p:cNvPr id="8" name="TextBox 7"/>
-          <p:cNvSpPr txBox="1"/>
-          <p:nvPr/>
-        </p:nvSpPr>
-        <p:spPr>
-          <a:xfrm>
-            <a:off x="1234440" y="1874519"/>
+      <p:pic>
+        <p:nvPicPr>
+          <p:cNvPr id="8" name="Picture 7" descr="d2f86d8905c9108c.png"/>
+          <p:cNvPicPr>
+            <a:picLocks noChangeAspect="1"/>
+          </p:cNvPicPr>
+          <p:nvPr/>
+        </p:nvPicPr>
+        <p:blipFill>
+          <a:blip r:embed="rId2"/>
+          <a:stretch>
+            <a:fillRect/>
+          </a:stretch>
+        </p:blipFill>
+        <p:spPr>
+          <a:xfrm>
+            <a:off x="1234440" y="1956815"/>
+            <a:ext cx="1950720" cy="243840"/>
+          </a:xfrm>
+          <a:prstGeom prst="rect">
+            <a:avLst/>
+          </a:prstGeom>
+        </p:spPr>
+      </p:pic>
+      <p:sp>
+        <p:nvSpPr>
+          <p:cNvPr id="9" name="TextBox 8"/>
+          <p:cNvSpPr txBox="1"/>
+          <p:nvPr/>
+        </p:nvSpPr>
+        <p:spPr>
+          <a:xfrm>
+            <a:off x="3185160" y="1851660"/>
+            <a:ext cx="280301" cy="457200"/>
+          </a:xfrm>
+          <a:prstGeom prst="rect">
+            <a:avLst/>
+          </a:prstGeom>
+          <a:noFill/>
+        </p:spPr>
+        <p:txBody>
+          <a:bodyPr wrap="none" lIns="45720" rIns="45720" tIns="18288" bIns="18288" anchor="ctr">
+            <a:noAutofit/>
+          </a:bodyPr>
+          <a:lstStyle/>
+          <a:p>
+            <a:pPr algn="l"/>
+            <a:r>
+              <a:rPr sz="2280" b="0" i="0">
+                <a:solidFill>
+                  <a:srgbClr val="1A1A1A"/>
+                </a:solidFill>
+                <a:latin typeface="Lexend"/>
+              </a:rPr>
+              <a:t>.</a:t>
+            </a:r>
+          </a:p>
+        </p:txBody>
+      </p:sp>
+      <p:sp>
+        <p:nvSpPr>
+          <p:cNvPr id="10" name="TextBox 9"/>
+          <p:cNvSpPr txBox="1"/>
+          <p:nvPr/>
+        </p:nvSpPr>
+        <p:spPr>
+          <a:xfrm>
+            <a:off x="1234440" y="2487168"/>
             <a:ext cx="10058400" cy="429370"/>
           </a:xfrm>
           <a:prstGeom prst="rect">
@@ -11687,20 +13295,20 @@
                 </a:solidFill>
                 <a:latin typeface="Lexend"/>
               </a:rPr>
-              <a:t>1 km = 0.62 mi. Theo, who weighs 110 lb, rides a 12 km trail.</a:t>
-            </a:r>
-          </a:p>
-        </p:txBody>
-      </p:sp>
-      <p:sp>
-        <p:nvSpPr>
-          <p:cNvPr id="9" name="TextBox 8"/>
-          <p:cNvSpPr txBox="1"/>
-          <p:nvPr/>
-        </p:nvSpPr>
-        <p:spPr>
-          <a:xfrm>
-            <a:off x="1234440" y="2413618"/>
+              <a:t>Theo, who weighs 110 lb, rides a 12 km trail.</a:t>
+            </a:r>
+          </a:p>
+        </p:txBody>
+      </p:sp>
+      <p:sp>
+        <p:nvSpPr>
+          <p:cNvPr id="11" name="TextBox 10"/>
+          <p:cNvSpPr txBox="1"/>
+          <p:nvPr/>
+        </p:nvSpPr>
+        <p:spPr>
+          <a:xfrm>
+            <a:off x="1234440" y="3026266"/>
             <a:ext cx="10058400" cy="429370"/>
           </a:xfrm>
           <a:prstGeom prst="rect">
@@ -11729,7 +13337,7 @@
       </p:sp>
       <p:sp>
         <p:nvSpPr>
-          <p:cNvPr id="10" name="TextBox 9"/>
+          <p:cNvPr id="12" name="TextBox 11"/>
           <p:cNvSpPr txBox="1"/>
           <p:nvPr/>
         </p:nvSpPr>
@@ -11990,79 +13598,9 @@
           </a:p>
         </p:txBody>
       </p:sp>
-      <p:sp>
-        <p:nvSpPr>
-          <p:cNvPr id="8" name="TextBox 7"/>
-          <p:cNvSpPr txBox="1"/>
-          <p:nvPr/>
-        </p:nvSpPr>
-        <p:spPr>
-          <a:xfrm>
-            <a:off x="1234440" y="1874519"/>
-            <a:ext cx="10058400" cy="429370"/>
-          </a:xfrm>
-          <a:prstGeom prst="rect">
-            <a:avLst/>
-          </a:prstGeom>
-          <a:noFill/>
-        </p:spPr>
-        <p:txBody>
-          <a:bodyPr wrap="square" lIns="45720" rIns="45720" tIns="18288" bIns="18288" anchor="t">
-            <a:spAutoFit/>
-          </a:bodyPr>
-          <a:lstStyle/>
-          <a:p>
-            <a:pPr algn="l"/>
-            <a:r>
-              <a:rPr sz="2280" b="0" i="0">
-                <a:solidFill>
-                  <a:srgbClr val="1A1A1A"/>
-                </a:solidFill>
-                <a:latin typeface="Lexend"/>
-              </a:rPr>
-              <a:t>1 km = 0.62 mi. Theo, who weighs 110 lb, rides a 12 km trail.</a:t>
-            </a:r>
-          </a:p>
-        </p:txBody>
-      </p:sp>
-      <p:sp>
-        <p:nvSpPr>
-          <p:cNvPr id="9" name="TextBox 8"/>
-          <p:cNvSpPr txBox="1"/>
-          <p:nvPr/>
-        </p:nvSpPr>
-        <p:spPr>
-          <a:xfrm>
-            <a:off x="1234440" y="2413618"/>
-            <a:ext cx="10058400" cy="429370"/>
-          </a:xfrm>
-          <a:prstGeom prst="rect">
-            <a:avLst/>
-          </a:prstGeom>
-          <a:noFill/>
-        </p:spPr>
-        <p:txBody>
-          <a:bodyPr wrap="square" lIns="45720" rIns="45720" tIns="18288" bIns="18288" anchor="t">
-            <a:spAutoFit/>
-          </a:bodyPr>
-          <a:lstStyle/>
-          <a:p>
-            <a:pPr algn="l"/>
-            <a:r>
-              <a:rPr sz="2280" b="1" i="0">
-                <a:solidFill>
-                  <a:srgbClr val="1A1A1A"/>
-                </a:solidFill>
-                <a:latin typeface="Lexend"/>
-              </a:rPr>
-              <a:t>How long is the trail in miles?</a:t>
-            </a:r>
-          </a:p>
-        </p:txBody>
-      </p:sp>
       <p:pic>
         <p:nvPicPr>
-          <p:cNvPr id="10" name="Picture 9" descr="5134a9b996441169.png"/>
+          <p:cNvPr id="8" name="Picture 7" descr="6e18d58589ed85bc.png"/>
           <p:cNvPicPr>
             <a:picLocks noChangeAspect="1"/>
           </p:cNvPicPr>
@@ -12076,7 +13614,136 @@
         </p:blipFill>
         <p:spPr>
           <a:xfrm>
-            <a:off x="4969764" y="3149312"/>
+            <a:off x="1234440" y="1956815"/>
+            <a:ext cx="1950720" cy="243840"/>
+          </a:xfrm>
+          <a:prstGeom prst="rect">
+            <a:avLst/>
+          </a:prstGeom>
+        </p:spPr>
+      </p:pic>
+      <p:sp>
+        <p:nvSpPr>
+          <p:cNvPr id="9" name="TextBox 8"/>
+          <p:cNvSpPr txBox="1"/>
+          <p:nvPr/>
+        </p:nvSpPr>
+        <p:spPr>
+          <a:xfrm>
+            <a:off x="3185160" y="1851660"/>
+            <a:ext cx="280301" cy="457200"/>
+          </a:xfrm>
+          <a:prstGeom prst="rect">
+            <a:avLst/>
+          </a:prstGeom>
+          <a:noFill/>
+        </p:spPr>
+        <p:txBody>
+          <a:bodyPr wrap="none" lIns="45720" rIns="45720" tIns="18288" bIns="18288" anchor="ctr">
+            <a:noAutofit/>
+          </a:bodyPr>
+          <a:lstStyle/>
+          <a:p>
+            <a:pPr algn="l"/>
+            <a:r>
+              <a:rPr sz="2280" b="0" i="0">
+                <a:solidFill>
+                  <a:srgbClr val="1A1A1A"/>
+                </a:solidFill>
+                <a:latin typeface="Lexend"/>
+              </a:rPr>
+              <a:t>.</a:t>
+            </a:r>
+          </a:p>
+        </p:txBody>
+      </p:sp>
+      <p:sp>
+        <p:nvSpPr>
+          <p:cNvPr id="10" name="TextBox 9"/>
+          <p:cNvSpPr txBox="1"/>
+          <p:nvPr/>
+        </p:nvSpPr>
+        <p:spPr>
+          <a:xfrm>
+            <a:off x="1234440" y="2487168"/>
+            <a:ext cx="10058400" cy="429370"/>
+          </a:xfrm>
+          <a:prstGeom prst="rect">
+            <a:avLst/>
+          </a:prstGeom>
+          <a:noFill/>
+        </p:spPr>
+        <p:txBody>
+          <a:bodyPr wrap="square" lIns="45720" rIns="45720" tIns="18288" bIns="18288" anchor="t">
+            <a:spAutoFit/>
+          </a:bodyPr>
+          <a:lstStyle/>
+          <a:p>
+            <a:pPr algn="l"/>
+            <a:r>
+              <a:rPr sz="2280" b="0" i="0">
+                <a:solidFill>
+                  <a:srgbClr val="1A1A1A"/>
+                </a:solidFill>
+                <a:latin typeface="Lexend"/>
+              </a:rPr>
+              <a:t>Theo, who weighs 110 lb, rides a 12 km trail.</a:t>
+            </a:r>
+          </a:p>
+        </p:txBody>
+      </p:sp>
+      <p:sp>
+        <p:nvSpPr>
+          <p:cNvPr id="11" name="TextBox 10"/>
+          <p:cNvSpPr txBox="1"/>
+          <p:nvPr/>
+        </p:nvSpPr>
+        <p:spPr>
+          <a:xfrm>
+            <a:off x="1234440" y="3026266"/>
+            <a:ext cx="10058400" cy="429370"/>
+          </a:xfrm>
+          <a:prstGeom prst="rect">
+            <a:avLst/>
+          </a:prstGeom>
+          <a:noFill/>
+        </p:spPr>
+        <p:txBody>
+          <a:bodyPr wrap="square" lIns="45720" rIns="45720" tIns="18288" bIns="18288" anchor="t">
+            <a:spAutoFit/>
+          </a:bodyPr>
+          <a:lstStyle/>
+          <a:p>
+            <a:pPr algn="l"/>
+            <a:r>
+              <a:rPr sz="2280" b="1" i="0">
+                <a:solidFill>
+                  <a:srgbClr val="1A1A1A"/>
+                </a:solidFill>
+                <a:latin typeface="Lexend"/>
+              </a:rPr>
+              <a:t>How long is the trail in miles?</a:t>
+            </a:r>
+          </a:p>
+        </p:txBody>
+      </p:sp>
+      <p:pic>
+        <p:nvPicPr>
+          <p:cNvPr id="12" name="Picture 11" descr="5134a9b996441169.png"/>
+          <p:cNvPicPr>
+            <a:picLocks noChangeAspect="1"/>
+          </p:cNvPicPr>
+          <p:nvPr/>
+        </p:nvPicPr>
+        <p:blipFill>
+          <a:blip r:embed="rId3"/>
+          <a:stretch>
+            <a:fillRect/>
+          </a:stretch>
+        </p:blipFill>
+        <p:spPr>
+          <a:xfrm>
+            <a:off x="4969764" y="3778153"/>
             <a:ext cx="2331720" cy="256032"/>
           </a:xfrm>
           <a:prstGeom prst="rect">
@@ -12086,7 +13753,7 @@
       </p:pic>
       <p:sp>
         <p:nvSpPr>
-          <p:cNvPr id="11" name="TextBox 10"/>
+          <p:cNvPr id="13" name="TextBox 12"/>
           <p:cNvSpPr txBox="1"/>
           <p:nvPr/>
         </p:nvSpPr>
@@ -12347,16 +14014,228 @@
           </a:p>
         </p:txBody>
       </p:sp>
-      <p:sp>
-        <p:nvSpPr>
-          <p:cNvPr id="8" name="TextBox 7"/>
-          <p:cNvSpPr txBox="1"/>
-          <p:nvPr/>
-        </p:nvSpPr>
-        <p:spPr>
-          <a:xfrm>
-            <a:off x="1234440" y="1874519"/>
-            <a:ext cx="10058400" cy="858740"/>
+      <p:pic>
+        <p:nvPicPr>
+          <p:cNvPr id="8" name="Picture 7" descr="88d2b26b87c7a8c9.png"/>
+          <p:cNvPicPr>
+            <a:picLocks noChangeAspect="1"/>
+          </p:cNvPicPr>
+          <p:nvPr/>
+        </p:nvPicPr>
+        <p:blipFill>
+          <a:blip r:embed="rId2"/>
+          <a:stretch>
+            <a:fillRect/>
+          </a:stretch>
+        </p:blipFill>
+        <p:spPr>
+          <a:xfrm>
+            <a:off x="1234440" y="1956815"/>
+            <a:ext cx="1847088" cy="243840"/>
+          </a:xfrm>
+          <a:prstGeom prst="rect">
+            <a:avLst/>
+          </a:prstGeom>
+        </p:spPr>
+      </p:pic>
+      <p:sp>
+        <p:nvSpPr>
+          <p:cNvPr id="9" name="TextBox 8"/>
+          <p:cNvSpPr txBox="1"/>
+          <p:nvPr/>
+        </p:nvSpPr>
+        <p:spPr>
+          <a:xfrm>
+            <a:off x="3081528" y="1851660"/>
+            <a:ext cx="290742" cy="457200"/>
+          </a:xfrm>
+          <a:prstGeom prst="rect">
+            <a:avLst/>
+          </a:prstGeom>
+          <a:noFill/>
+        </p:spPr>
+        <p:txBody>
+          <a:bodyPr wrap="none" lIns="45720" rIns="45720" tIns="18288" bIns="18288" anchor="ctr">
+            <a:noAutofit/>
+          </a:bodyPr>
+          <a:lstStyle/>
+          <a:p>
+            <a:pPr algn="l"/>
+            <a:r>
+              <a:rPr sz="2280" b="0" i="0">
+                <a:solidFill>
+                  <a:srgbClr val="1A1A1A"/>
+                </a:solidFill>
+                <a:latin typeface="Lexend"/>
+              </a:rPr>
+              <a:t>;</a:t>
+            </a:r>
+          </a:p>
+        </p:txBody>
+      </p:sp>
+      <p:pic>
+        <p:nvPicPr>
+          <p:cNvPr id="10" name="Picture 9" descr="8f784bf30c7681cf.png"/>
+          <p:cNvPicPr>
+            <a:picLocks noChangeAspect="1"/>
+          </p:cNvPicPr>
+          <p:nvPr/>
+        </p:nvPicPr>
+        <p:blipFill>
+          <a:blip r:embed="rId3"/>
+          <a:stretch>
+            <a:fillRect/>
+          </a:stretch>
+        </p:blipFill>
+        <p:spPr>
+          <a:xfrm>
+            <a:off x="1234440" y="2569464"/>
+            <a:ext cx="1831848" cy="243840"/>
+          </a:xfrm>
+          <a:prstGeom prst="rect">
+            <a:avLst/>
+          </a:prstGeom>
+        </p:spPr>
+      </p:pic>
+      <p:sp>
+        <p:nvSpPr>
+          <p:cNvPr id="11" name="TextBox 10"/>
+          <p:cNvSpPr txBox="1"/>
+          <p:nvPr/>
+        </p:nvSpPr>
+        <p:spPr>
+          <a:xfrm>
+            <a:off x="3066288" y="2464308"/>
+            <a:ext cx="280301" cy="457200"/>
+          </a:xfrm>
+          <a:prstGeom prst="rect">
+            <a:avLst/>
+          </a:prstGeom>
+          <a:noFill/>
+        </p:spPr>
+        <p:txBody>
+          <a:bodyPr wrap="none" lIns="45720" rIns="45720" tIns="18288" bIns="18288" anchor="ctr">
+            <a:noAutofit/>
+          </a:bodyPr>
+          <a:lstStyle/>
+          <a:p>
+            <a:pPr algn="l"/>
+            <a:r>
+              <a:rPr sz="2280" b="0" i="0">
+                <a:solidFill>
+                  <a:srgbClr val="1A1A1A"/>
+                </a:solidFill>
+                <a:latin typeface="Lexend"/>
+              </a:rPr>
+              <a:t>.</a:t>
+            </a:r>
+          </a:p>
+        </p:txBody>
+      </p:sp>
+      <p:sp>
+        <p:nvSpPr>
+          <p:cNvPr id="12" name="TextBox 11"/>
+          <p:cNvSpPr txBox="1"/>
+          <p:nvPr/>
+        </p:nvSpPr>
+        <p:spPr>
+          <a:xfrm>
+            <a:off x="1234440" y="3076956"/>
+            <a:ext cx="4496292" cy="457200"/>
+          </a:xfrm>
+          <a:prstGeom prst="rect">
+            <a:avLst/>
+          </a:prstGeom>
+          <a:noFill/>
+        </p:spPr>
+        <p:txBody>
+          <a:bodyPr wrap="none" lIns="45720" rIns="45720" tIns="18288" bIns="18288" anchor="ctr">
+            <a:noAutofit/>
+          </a:bodyPr>
+          <a:lstStyle/>
+          <a:p>
+            <a:pPr algn="l"/>
+            <a:r>
+              <a:rPr sz="2280" b="0" i="0">
+                <a:solidFill>
+                  <a:srgbClr val="1A1A1A"/>
+                </a:solidFill>
+                <a:latin typeface="Lexend"/>
+              </a:rPr>
+              <a:t>Jo converts 30 cm to inches: </a:t>
+            </a:r>
+          </a:p>
+        </p:txBody>
+      </p:sp>
+      <p:pic>
+        <p:nvPicPr>
+          <p:cNvPr id="13" name="Picture 12" descr="ea1f35b738fd545f.png"/>
+          <p:cNvPicPr>
+            <a:picLocks noChangeAspect="1"/>
+          </p:cNvPicPr>
+          <p:nvPr/>
+        </p:nvPicPr>
+        <p:blipFill>
+          <a:blip r:embed="rId4"/>
+          <a:stretch>
+            <a:fillRect/>
+          </a:stretch>
+        </p:blipFill>
+        <p:spPr>
+          <a:xfrm>
+            <a:off x="5593572" y="3182112"/>
+            <a:ext cx="2417064" cy="243840"/>
+          </a:xfrm>
+          <a:prstGeom prst="rect">
+            <a:avLst/>
+          </a:prstGeom>
+        </p:spPr>
+      </p:pic>
+      <p:sp>
+        <p:nvSpPr>
+          <p:cNvPr id="14" name="TextBox 13"/>
+          <p:cNvSpPr txBox="1"/>
+          <p:nvPr/>
+        </p:nvSpPr>
+        <p:spPr>
+          <a:xfrm>
+            <a:off x="8010636" y="3076956"/>
+            <a:ext cx="280301" cy="457200"/>
+          </a:xfrm>
+          <a:prstGeom prst="rect">
+            <a:avLst/>
+          </a:prstGeom>
+          <a:noFill/>
+        </p:spPr>
+        <p:txBody>
+          <a:bodyPr wrap="none" lIns="45720" rIns="45720" tIns="18288" bIns="18288" anchor="ctr">
+            <a:noAutofit/>
+          </a:bodyPr>
+          <a:lstStyle/>
+          <a:p>
+            <a:pPr algn="l"/>
+            <a:r>
+              <a:rPr sz="2280" b="0" i="0">
+                <a:solidFill>
+                  <a:srgbClr val="1A1A1A"/>
+                </a:solidFill>
+                <a:latin typeface="Lexend"/>
+              </a:rPr>
+              <a:t>.</a:t>
+            </a:r>
+          </a:p>
+        </p:txBody>
+      </p:sp>
+      <p:sp>
+        <p:nvSpPr>
+          <p:cNvPr id="15" name="TextBox 14"/>
+          <p:cNvSpPr txBox="1"/>
+          <p:nvPr/>
+        </p:nvSpPr>
+        <p:spPr>
+          <a:xfrm>
+            <a:off x="1234440" y="3712464"/>
+            <a:ext cx="10058400" cy="429370"/>
           </a:xfrm>
           <a:prstGeom prst="rect">
             <a:avLst/>
@@ -12371,47 +14250,12 @@
           <a:p>
             <a:pPr algn="l"/>
             <a:r>
-              <a:rPr sz="2280" b="0" i="0">
+              <a:rPr sz="2280" b="1" i="0">
                 <a:solidFill>
                   <a:srgbClr val="1A1A1A"/>
                 </a:solidFill>
                 <a:latin typeface="Lexend"/>
               </a:rPr>
-              <a:t>1 in = 2.54 cm; 1 cm = 0.39 in. Jo converts 30 cm to inches: 30 × 2.54 = 76.2 in.</a:t>
-            </a:r>
-          </a:p>
-        </p:txBody>
-      </p:sp>
-      <p:sp>
-        <p:nvSpPr>
-          <p:cNvPr id="9" name="TextBox 8"/>
-          <p:cNvSpPr txBox="1"/>
-          <p:nvPr/>
-        </p:nvSpPr>
-        <p:spPr>
-          <a:xfrm>
-            <a:off x="1234440" y="2842988"/>
-            <a:ext cx="10058400" cy="429370"/>
-          </a:xfrm>
-          <a:prstGeom prst="rect">
-            <a:avLst/>
-          </a:prstGeom>
-          <a:noFill/>
-        </p:spPr>
-        <p:txBody>
-          <a:bodyPr wrap="square" lIns="45720" rIns="45720" tIns="18288" bIns="18288" anchor="t">
-            <a:spAutoFit/>
-          </a:bodyPr>
-          <a:lstStyle/>
-          <a:p>
-            <a:pPr algn="l"/>
-            <a:r>
-              <a:rPr sz="2280" b="1" i="0">
-                <a:solidFill>
-                  <a:srgbClr val="1A1A1A"/>
-                </a:solidFill>
-                <a:latin typeface="Lexend"/>
-              </a:rPr>
               <a:t>Name the error and fix it.</a:t>
             </a:r>
           </a:p>
@@ -12419,13 +14263,13 @@
       </p:sp>
       <p:sp>
         <p:nvSpPr>
-          <p:cNvPr id="10" name="TextBox 9"/>
-          <p:cNvSpPr txBox="1"/>
-          <p:nvPr/>
-        </p:nvSpPr>
-        <p:spPr>
-          <a:xfrm>
-            <a:off x="777240" y="4343400"/>
+          <p:cNvPr id="16" name="TextBox 15"/>
+          <p:cNvSpPr txBox="1"/>
+          <p:nvPr/>
+        </p:nvSpPr>
+        <p:spPr>
+          <a:xfrm>
+            <a:off x="777240" y="4434442"/>
             <a:ext cx="10607040" cy="457200"/>
           </a:xfrm>
           <a:prstGeom prst="rect">
@@ -12680,79 +14524,9 @@
           </a:p>
         </p:txBody>
       </p:sp>
-      <p:sp>
-        <p:nvSpPr>
-          <p:cNvPr id="8" name="TextBox 7"/>
-          <p:cNvSpPr txBox="1"/>
-          <p:nvPr/>
-        </p:nvSpPr>
-        <p:spPr>
-          <a:xfrm>
-            <a:off x="1234440" y="1874519"/>
-            <a:ext cx="10058400" cy="858740"/>
-          </a:xfrm>
-          <a:prstGeom prst="rect">
-            <a:avLst/>
-          </a:prstGeom>
-          <a:noFill/>
-        </p:spPr>
-        <p:txBody>
-          <a:bodyPr wrap="square" lIns="45720" rIns="45720" tIns="18288" bIns="18288" anchor="t">
-            <a:spAutoFit/>
-          </a:bodyPr>
-          <a:lstStyle/>
-          <a:p>
-            <a:pPr algn="l"/>
-            <a:r>
-              <a:rPr sz="2280" b="0" i="0">
-                <a:solidFill>
-                  <a:srgbClr val="1A1A1A"/>
-                </a:solidFill>
-                <a:latin typeface="Lexend"/>
-              </a:rPr>
-              <a:t>1 in = 2.54 cm; 1 cm = 0.39 in. Jo converts 30 cm to inches: 30 × 2.54 = 76.2 in.</a:t>
-            </a:r>
-          </a:p>
-        </p:txBody>
-      </p:sp>
-      <p:sp>
-        <p:nvSpPr>
-          <p:cNvPr id="9" name="TextBox 8"/>
-          <p:cNvSpPr txBox="1"/>
-          <p:nvPr/>
-        </p:nvSpPr>
-        <p:spPr>
-          <a:xfrm>
-            <a:off x="1234440" y="2842988"/>
-            <a:ext cx="10058400" cy="429370"/>
-          </a:xfrm>
-          <a:prstGeom prst="rect">
-            <a:avLst/>
-          </a:prstGeom>
-          <a:noFill/>
-        </p:spPr>
-        <p:txBody>
-          <a:bodyPr wrap="square" lIns="45720" rIns="45720" tIns="18288" bIns="18288" anchor="t">
-            <a:spAutoFit/>
-          </a:bodyPr>
-          <a:lstStyle/>
-          <a:p>
-            <a:pPr algn="l"/>
-            <a:r>
-              <a:rPr sz="2280" b="1" i="0">
-                <a:solidFill>
-                  <a:srgbClr val="1A1A1A"/>
-                </a:solidFill>
-                <a:latin typeface="Lexend"/>
-              </a:rPr>
-              <a:t>Name the error and fix it.</a:t>
-            </a:r>
-          </a:p>
-        </p:txBody>
-      </p:sp>
       <p:pic>
         <p:nvPicPr>
-          <p:cNvPr id="10" name="Picture 9" descr="609db8417a3b4285.png"/>
+          <p:cNvPr id="8" name="Picture 7" descr="e3914b43cbb52236.png"/>
           <p:cNvPicPr>
             <a:picLocks noChangeAspect="1"/>
           </p:cNvPicPr>
@@ -12766,7 +14540,254 @@
         </p:blipFill>
         <p:spPr>
           <a:xfrm>
-            <a:off x="4988051" y="3580207"/>
+            <a:off x="1234440" y="1956815"/>
+            <a:ext cx="1844040" cy="243840"/>
+          </a:xfrm>
+          <a:prstGeom prst="rect">
+            <a:avLst/>
+          </a:prstGeom>
+        </p:spPr>
+      </p:pic>
+      <p:sp>
+        <p:nvSpPr>
+          <p:cNvPr id="9" name="TextBox 8"/>
+          <p:cNvSpPr txBox="1"/>
+          <p:nvPr/>
+        </p:nvSpPr>
+        <p:spPr>
+          <a:xfrm>
+            <a:off x="3078480" y="1851660"/>
+            <a:ext cx="290742" cy="457200"/>
+          </a:xfrm>
+          <a:prstGeom prst="rect">
+            <a:avLst/>
+          </a:prstGeom>
+          <a:noFill/>
+        </p:spPr>
+        <p:txBody>
+          <a:bodyPr wrap="none" lIns="45720" rIns="45720" tIns="18288" bIns="18288" anchor="ctr">
+            <a:noAutofit/>
+          </a:bodyPr>
+          <a:lstStyle/>
+          <a:p>
+            <a:pPr algn="l"/>
+            <a:r>
+              <a:rPr sz="2280" b="0" i="0">
+                <a:solidFill>
+                  <a:srgbClr val="1A1A1A"/>
+                </a:solidFill>
+                <a:latin typeface="Lexend"/>
+              </a:rPr>
+              <a:t>;</a:t>
+            </a:r>
+          </a:p>
+        </p:txBody>
+      </p:sp>
+      <p:pic>
+        <p:nvPicPr>
+          <p:cNvPr id="10" name="Picture 9" descr="6c8af11a6118811c.png"/>
+          <p:cNvPicPr>
+            <a:picLocks noChangeAspect="1"/>
+          </p:cNvPicPr>
+          <p:nvPr/>
+        </p:nvPicPr>
+        <p:blipFill>
+          <a:blip r:embed="rId3"/>
+          <a:stretch>
+            <a:fillRect/>
+          </a:stretch>
+        </p:blipFill>
+        <p:spPr>
+          <a:xfrm>
+            <a:off x="1234440" y="2569464"/>
+            <a:ext cx="1831848" cy="243840"/>
+          </a:xfrm>
+          <a:prstGeom prst="rect">
+            <a:avLst/>
+          </a:prstGeom>
+        </p:spPr>
+      </p:pic>
+      <p:sp>
+        <p:nvSpPr>
+          <p:cNvPr id="11" name="TextBox 10"/>
+          <p:cNvSpPr txBox="1"/>
+          <p:nvPr/>
+        </p:nvSpPr>
+        <p:spPr>
+          <a:xfrm>
+            <a:off x="3066288" y="2464308"/>
+            <a:ext cx="280301" cy="457200"/>
+          </a:xfrm>
+          <a:prstGeom prst="rect">
+            <a:avLst/>
+          </a:prstGeom>
+          <a:noFill/>
+        </p:spPr>
+        <p:txBody>
+          <a:bodyPr wrap="none" lIns="45720" rIns="45720" tIns="18288" bIns="18288" anchor="ctr">
+            <a:noAutofit/>
+          </a:bodyPr>
+          <a:lstStyle/>
+          <a:p>
+            <a:pPr algn="l"/>
+            <a:r>
+              <a:rPr sz="2280" b="0" i="0">
+                <a:solidFill>
+                  <a:srgbClr val="1A1A1A"/>
+                </a:solidFill>
+                <a:latin typeface="Lexend"/>
+              </a:rPr>
+              <a:t>.</a:t>
+            </a:r>
+          </a:p>
+        </p:txBody>
+      </p:sp>
+      <p:sp>
+        <p:nvSpPr>
+          <p:cNvPr id="12" name="TextBox 11"/>
+          <p:cNvSpPr txBox="1"/>
+          <p:nvPr/>
+        </p:nvSpPr>
+        <p:spPr>
+          <a:xfrm>
+            <a:off x="1234440" y="3076956"/>
+            <a:ext cx="4496292" cy="457200"/>
+          </a:xfrm>
+          <a:prstGeom prst="rect">
+            <a:avLst/>
+          </a:prstGeom>
+          <a:noFill/>
+        </p:spPr>
+        <p:txBody>
+          <a:bodyPr wrap="none" lIns="45720" rIns="45720" tIns="18288" bIns="18288" anchor="ctr">
+            <a:noAutofit/>
+          </a:bodyPr>
+          <a:lstStyle/>
+          <a:p>
+            <a:pPr algn="l"/>
+            <a:r>
+              <a:rPr sz="2280" b="0" i="0">
+                <a:solidFill>
+                  <a:srgbClr val="1A1A1A"/>
+                </a:solidFill>
+                <a:latin typeface="Lexend"/>
+              </a:rPr>
+              <a:t>Jo converts 30 cm to inches: </a:t>
+            </a:r>
+          </a:p>
+        </p:txBody>
+      </p:sp>
+      <p:pic>
+        <p:nvPicPr>
+          <p:cNvPr id="13" name="Picture 12" descr="055a3bc030cecbfd.png"/>
+          <p:cNvPicPr>
+            <a:picLocks noChangeAspect="1"/>
+          </p:cNvPicPr>
+          <p:nvPr/>
+        </p:nvPicPr>
+        <p:blipFill>
+          <a:blip r:embed="rId4"/>
+          <a:stretch>
+            <a:fillRect/>
+          </a:stretch>
+        </p:blipFill>
+        <p:spPr>
+          <a:xfrm>
+            <a:off x="5593572" y="3182112"/>
+            <a:ext cx="2417064" cy="243840"/>
+          </a:xfrm>
+          <a:prstGeom prst="rect">
+            <a:avLst/>
+          </a:prstGeom>
+        </p:spPr>
+      </p:pic>
+      <p:sp>
+        <p:nvSpPr>
+          <p:cNvPr id="14" name="TextBox 13"/>
+          <p:cNvSpPr txBox="1"/>
+          <p:nvPr/>
+        </p:nvSpPr>
+        <p:spPr>
+          <a:xfrm>
+            <a:off x="8010636" y="3076956"/>
+            <a:ext cx="280301" cy="457200"/>
+          </a:xfrm>
+          <a:prstGeom prst="rect">
+            <a:avLst/>
+          </a:prstGeom>
+          <a:noFill/>
+        </p:spPr>
+        <p:txBody>
+          <a:bodyPr wrap="none" lIns="45720" rIns="45720" tIns="18288" bIns="18288" anchor="ctr">
+            <a:noAutofit/>
+          </a:bodyPr>
+          <a:lstStyle/>
+          <a:p>
+            <a:pPr algn="l"/>
+            <a:r>
+              <a:rPr sz="2280" b="0" i="0">
+                <a:solidFill>
+                  <a:srgbClr val="1A1A1A"/>
+                </a:solidFill>
+                <a:latin typeface="Lexend"/>
+              </a:rPr>
+              <a:t>.</a:t>
+            </a:r>
+          </a:p>
+        </p:txBody>
+      </p:sp>
+      <p:sp>
+        <p:nvSpPr>
+          <p:cNvPr id="15" name="TextBox 14"/>
+          <p:cNvSpPr txBox="1"/>
+          <p:nvPr/>
+        </p:nvSpPr>
+        <p:spPr>
+          <a:xfrm>
+            <a:off x="1234440" y="3712464"/>
+            <a:ext cx="10058400" cy="429370"/>
+          </a:xfrm>
+          <a:prstGeom prst="rect">
+            <a:avLst/>
+          </a:prstGeom>
+          <a:noFill/>
+        </p:spPr>
+        <p:txBody>
+          <a:bodyPr wrap="square" lIns="45720" rIns="45720" tIns="18288" bIns="18288" anchor="t">
+            <a:spAutoFit/>
+          </a:bodyPr>
+          <a:lstStyle/>
+          <a:p>
+            <a:pPr algn="l"/>
+            <a:r>
+              <a:rPr sz="2280" b="1" i="0">
+                <a:solidFill>
+                  <a:srgbClr val="1A1A1A"/>
+                </a:solidFill>
+                <a:latin typeface="Lexend"/>
+              </a:rPr>
+              <a:t>Name the error and fix it.</a:t>
+            </a:r>
+          </a:p>
+        </p:txBody>
+      </p:sp>
+      <p:pic>
+        <p:nvPicPr>
+          <p:cNvPr id="16" name="Picture 15" descr="609db8417a3b4285.png"/>
+          <p:cNvPicPr>
+            <a:picLocks noChangeAspect="1"/>
+          </p:cNvPicPr>
+          <p:nvPr/>
+        </p:nvPicPr>
+        <p:blipFill>
+          <a:blip r:embed="rId5"/>
+          <a:stretch>
+            <a:fillRect/>
+          </a:stretch>
+        </p:blipFill>
+        <p:spPr>
+          <a:xfrm>
+            <a:off x="4988051" y="4467398"/>
             <a:ext cx="2298192" cy="252984"/>
           </a:xfrm>
           <a:prstGeom prst="rect">
@@ -12776,13 +14797,13 @@
       </p:pic>
       <p:sp>
         <p:nvSpPr>
-          <p:cNvPr id="11" name="TextBox 10"/>
-          <p:cNvSpPr txBox="1"/>
-          <p:nvPr/>
-        </p:nvSpPr>
-        <p:spPr>
-          <a:xfrm>
-            <a:off x="777240" y="4663440"/>
+          <p:cNvPr id="17" name="TextBox 16"/>
+          <p:cNvSpPr txBox="1"/>
+          <p:nvPr/>
+        </p:nvSpPr>
+        <p:spPr>
+          <a:xfrm>
+            <a:off x="777240" y="4919074"/>
             <a:ext cx="10607040" cy="1072896"/>
           </a:xfrm>
           <a:prstGeom prst="rect">
@@ -13045,23 +15066,23 @@
         </p:nvSpPr>
         <p:spPr>
           <a:xfrm>
-            <a:off x="960120" y="1572768"/>
-            <a:ext cx="548640" cy="356616"/>
-          </a:xfrm>
-          <a:prstGeom prst="rect">
-            <a:avLst/>
-          </a:prstGeom>
-          <a:noFill/>
-        </p:spPr>
-        <p:txBody>
-          <a:bodyPr wrap="square" lIns="45720" rIns="45720" tIns="18288" bIns="18288" anchor="t">
-            <a:spAutoFit/>
-          </a:bodyPr>
-          <a:lstStyle/>
-          <a:p>
-            <a:pPr algn="l"/>
-            <a:r>
-              <a:rPr sz="1810" b="1" i="0">
+            <a:off x="960120" y="1495043"/>
+            <a:ext cx="548640" cy="457200"/>
+          </a:xfrm>
+          <a:prstGeom prst="rect">
+            <a:avLst/>
+          </a:prstGeom>
+          <a:noFill/>
+        </p:spPr>
+        <p:txBody>
+          <a:bodyPr wrap="square" lIns="45720" rIns="45720" tIns="18288" bIns="18288" anchor="ctr">
+            <a:spAutoFit/>
+          </a:bodyPr>
+          <a:lstStyle/>
+          <a:p>
+            <a:pPr algn="l"/>
+            <a:r>
+              <a:rPr sz="2180" b="1" i="0">
                 <a:solidFill>
                   <a:srgbClr val="0B5394"/>
                 </a:solidFill>
@@ -13072,66 +15093,90 @@
           </a:p>
         </p:txBody>
       </p:sp>
-      <p:sp>
-        <p:nvSpPr>
-          <p:cNvPr id="9" name="TextBox 8"/>
-          <p:cNvSpPr txBox="1"/>
-          <p:nvPr/>
-        </p:nvSpPr>
-        <p:spPr>
-          <a:xfrm>
-            <a:off x="1554480" y="1572768"/>
-            <a:ext cx="9829800" cy="411480"/>
-          </a:xfrm>
-          <a:prstGeom prst="rect">
-            <a:avLst/>
-          </a:prstGeom>
-          <a:noFill/>
-        </p:spPr>
-        <p:txBody>
-          <a:bodyPr wrap="square" lIns="45720" rIns="45720" tIns="18288" bIns="18288" anchor="t">
-            <a:spAutoFit/>
-          </a:bodyPr>
-          <a:lstStyle/>
-          <a:p>
-            <a:pPr algn="l"/>
-            <a:r>
-              <a:rPr sz="1810" b="0" i="0">
+      <p:pic>
+        <p:nvPicPr>
+          <p:cNvPr id="9" name="Picture 8" descr="88d2b26b87c7a8c9.png"/>
+          <p:cNvPicPr>
+            <a:picLocks noChangeAspect="1"/>
+          </p:cNvPicPr>
+          <p:nvPr/>
+        </p:nvPicPr>
+        <p:blipFill>
+          <a:blip r:embed="rId2"/>
+          <a:stretch>
+            <a:fillRect/>
+          </a:stretch>
+        </p:blipFill>
+        <p:spPr>
+          <a:xfrm>
+            <a:off x="1627632" y="1601723"/>
+            <a:ext cx="1847088" cy="243840"/>
+          </a:xfrm>
+          <a:prstGeom prst="rect">
+            <a:avLst/>
+          </a:prstGeom>
+        </p:spPr>
+      </p:pic>
+      <p:sp>
+        <p:nvSpPr>
+          <p:cNvPr id="10" name="TextBox 9"/>
+          <p:cNvSpPr txBox="1"/>
+          <p:nvPr/>
+        </p:nvSpPr>
+        <p:spPr>
+          <a:xfrm>
+            <a:off x="3474720" y="1495044"/>
+            <a:ext cx="4831351" cy="457200"/>
+          </a:xfrm>
+          <a:prstGeom prst="rect">
+            <a:avLst/>
+          </a:prstGeom>
+          <a:noFill/>
+        </p:spPr>
+        <p:txBody>
+          <a:bodyPr wrap="none" lIns="45720" rIns="45720" tIns="18288" bIns="18288" anchor="ctr">
+            <a:noAutofit/>
+          </a:bodyPr>
+          <a:lstStyle/>
+          <a:p>
+            <a:pPr algn="l"/>
+            <a:r>
+              <a:rPr sz="2180" b="0" i="0">
                 <a:solidFill>
                   <a:srgbClr val="1A1A1A"/>
                 </a:solidFill>
                 <a:latin typeface="Lexend"/>
               </a:rPr>
-              <a:t>1 in = 2.54 cm. How many centimeters is 12 in?</a:t>
-            </a:r>
-          </a:p>
-        </p:txBody>
-      </p:sp>
-      <p:sp>
-        <p:nvSpPr>
-          <p:cNvPr id="10" name="TextBox 9"/>
-          <p:cNvSpPr txBox="1"/>
-          <p:nvPr/>
-        </p:nvSpPr>
-        <p:spPr>
-          <a:xfrm>
-            <a:off x="960120" y="2075688"/>
-            <a:ext cx="548640" cy="356616"/>
-          </a:xfrm>
-          <a:prstGeom prst="rect">
-            <a:avLst/>
-          </a:prstGeom>
-          <a:noFill/>
-        </p:spPr>
-        <p:txBody>
-          <a:bodyPr wrap="square" lIns="45720" rIns="45720" tIns="18288" bIns="18288" anchor="t">
-            <a:spAutoFit/>
-          </a:bodyPr>
-          <a:lstStyle/>
-          <a:p>
-            <a:pPr algn="l"/>
-            <a:r>
-              <a:rPr sz="1810" b="1" i="0">
+              <a:t>. How many centimeters is 12 in?</a:t>
+            </a:r>
+          </a:p>
+        </p:txBody>
+      </p:sp>
+      <p:sp>
+        <p:nvSpPr>
+          <p:cNvPr id="11" name="TextBox 10"/>
+          <p:cNvSpPr txBox="1"/>
+          <p:nvPr/>
+        </p:nvSpPr>
+        <p:spPr>
+          <a:xfrm>
+            <a:off x="960120" y="2089403"/>
+            <a:ext cx="548640" cy="457200"/>
+          </a:xfrm>
+          <a:prstGeom prst="rect">
+            <a:avLst/>
+          </a:prstGeom>
+          <a:noFill/>
+        </p:spPr>
+        <p:txBody>
+          <a:bodyPr wrap="square" lIns="45720" rIns="45720" tIns="18288" bIns="18288" anchor="ctr">
+            <a:spAutoFit/>
+          </a:bodyPr>
+          <a:lstStyle/>
+          <a:p>
+            <a:pPr algn="l"/>
+            <a:r>
+              <a:rPr sz="2180" b="1" i="0">
                 <a:solidFill>
                   <a:srgbClr val="0B5394"/>
                 </a:solidFill>
@@ -13142,66 +15187,90 @@
           </a:p>
         </p:txBody>
       </p:sp>
-      <p:sp>
-        <p:nvSpPr>
-          <p:cNvPr id="11" name="TextBox 10"/>
-          <p:cNvSpPr txBox="1"/>
-          <p:nvPr/>
-        </p:nvSpPr>
-        <p:spPr>
-          <a:xfrm>
-            <a:off x="1554480" y="2075688"/>
-            <a:ext cx="9829800" cy="411480"/>
-          </a:xfrm>
-          <a:prstGeom prst="rect">
-            <a:avLst/>
-          </a:prstGeom>
-          <a:noFill/>
-        </p:spPr>
-        <p:txBody>
-          <a:bodyPr wrap="square" lIns="45720" rIns="45720" tIns="18288" bIns="18288" anchor="t">
-            <a:spAutoFit/>
-          </a:bodyPr>
-          <a:lstStyle/>
-          <a:p>
-            <a:pPr algn="l"/>
-            <a:r>
-              <a:rPr sz="1810" b="0" i="0">
+      <p:pic>
+        <p:nvPicPr>
+          <p:cNvPr id="12" name="Picture 11" descr="8f784bf30c7681cf.png"/>
+          <p:cNvPicPr>
+            <a:picLocks noChangeAspect="1"/>
+          </p:cNvPicPr>
+          <p:nvPr/>
+        </p:nvPicPr>
+        <p:blipFill>
+          <a:blip r:embed="rId3"/>
+          <a:stretch>
+            <a:fillRect/>
+          </a:stretch>
+        </p:blipFill>
+        <p:spPr>
+          <a:xfrm>
+            <a:off x="1627632" y="2196083"/>
+            <a:ext cx="1831848" cy="243840"/>
+          </a:xfrm>
+          <a:prstGeom prst="rect">
+            <a:avLst/>
+          </a:prstGeom>
+        </p:spPr>
+      </p:pic>
+      <p:sp>
+        <p:nvSpPr>
+          <p:cNvPr id="13" name="TextBox 12"/>
+          <p:cNvSpPr txBox="1"/>
+          <p:nvPr/>
+        </p:nvSpPr>
+        <p:spPr>
+          <a:xfrm>
+            <a:off x="3459480" y="2089403"/>
+            <a:ext cx="4271886" cy="457200"/>
+          </a:xfrm>
+          <a:prstGeom prst="rect">
+            <a:avLst/>
+          </a:prstGeom>
+          <a:noFill/>
+        </p:spPr>
+        <p:txBody>
+          <a:bodyPr wrap="none" lIns="45720" rIns="45720" tIns="18288" bIns="18288" anchor="ctr">
+            <a:noAutofit/>
+          </a:bodyPr>
+          <a:lstStyle/>
+          <a:p>
+            <a:pPr algn="l"/>
+            <a:r>
+              <a:rPr sz="2180" b="0" i="0">
                 <a:solidFill>
                   <a:srgbClr val="1A1A1A"/>
                 </a:solidFill>
                 <a:latin typeface="Lexend"/>
               </a:rPr>
-              <a:t>1 cm = 0.39 in. How many inches is 40 cm?</a:t>
-            </a:r>
-          </a:p>
-        </p:txBody>
-      </p:sp>
-      <p:sp>
-        <p:nvSpPr>
-          <p:cNvPr id="12" name="TextBox 11"/>
-          <p:cNvSpPr txBox="1"/>
-          <p:nvPr/>
-        </p:nvSpPr>
-        <p:spPr>
-          <a:xfrm>
-            <a:off x="960120" y="2578608"/>
-            <a:ext cx="548640" cy="356616"/>
-          </a:xfrm>
-          <a:prstGeom prst="rect">
-            <a:avLst/>
-          </a:prstGeom>
-          <a:noFill/>
-        </p:spPr>
-        <p:txBody>
-          <a:bodyPr wrap="square" lIns="45720" rIns="45720" tIns="18288" bIns="18288" anchor="t">
-            <a:spAutoFit/>
-          </a:bodyPr>
-          <a:lstStyle/>
-          <a:p>
-            <a:pPr algn="l"/>
-            <a:r>
-              <a:rPr sz="1810" b="1" i="0">
+              <a:t>. How many inches is 40 cm?</a:t>
+            </a:r>
+          </a:p>
+        </p:txBody>
+      </p:sp>
+      <p:sp>
+        <p:nvSpPr>
+          <p:cNvPr id="14" name="TextBox 13"/>
+          <p:cNvSpPr txBox="1"/>
+          <p:nvPr/>
+        </p:nvSpPr>
+        <p:spPr>
+          <a:xfrm>
+            <a:off x="960120" y="2683763"/>
+            <a:ext cx="548640" cy="457200"/>
+          </a:xfrm>
+          <a:prstGeom prst="rect">
+            <a:avLst/>
+          </a:prstGeom>
+          <a:noFill/>
+        </p:spPr>
+        <p:txBody>
+          <a:bodyPr wrap="square" lIns="45720" rIns="45720" tIns="18288" bIns="18288" anchor="ctr">
+            <a:spAutoFit/>
+          </a:bodyPr>
+          <a:lstStyle/>
+          <a:p>
+            <a:pPr algn="l"/>
+            <a:r>
+              <a:rPr sz="2180" b="1" i="0">
                 <a:solidFill>
                   <a:srgbClr val="0B5394"/>
                 </a:solidFill>
@@ -13212,66 +15281,90 @@
           </a:p>
         </p:txBody>
       </p:sp>
-      <p:sp>
-        <p:nvSpPr>
-          <p:cNvPr id="13" name="TextBox 12"/>
-          <p:cNvSpPr txBox="1"/>
-          <p:nvPr/>
-        </p:nvSpPr>
-        <p:spPr>
-          <a:xfrm>
-            <a:off x="1554480" y="2578608"/>
-            <a:ext cx="9829800" cy="411480"/>
-          </a:xfrm>
-          <a:prstGeom prst="rect">
-            <a:avLst/>
-          </a:prstGeom>
-          <a:noFill/>
-        </p:spPr>
-        <p:txBody>
-          <a:bodyPr wrap="square" lIns="45720" rIns="45720" tIns="18288" bIns="18288" anchor="t">
-            <a:spAutoFit/>
-          </a:bodyPr>
-          <a:lstStyle/>
-          <a:p>
-            <a:pPr algn="l"/>
-            <a:r>
-              <a:rPr sz="1810" b="0" i="0">
+      <p:pic>
+        <p:nvPicPr>
+          <p:cNvPr id="15" name="Picture 14" descr="673c0080fbe2317f.png"/>
+          <p:cNvPicPr>
+            <a:picLocks noChangeAspect="1"/>
+          </p:cNvPicPr>
+          <p:nvPr/>
+        </p:nvPicPr>
+        <p:blipFill>
+          <a:blip r:embed="rId4"/>
+          <a:stretch>
+            <a:fillRect/>
+          </a:stretch>
+        </p:blipFill>
+        <p:spPr>
+          <a:xfrm>
+            <a:off x="1627632" y="2790443"/>
+            <a:ext cx="1901952" cy="243840"/>
+          </a:xfrm>
+          <a:prstGeom prst="rect">
+            <a:avLst/>
+          </a:prstGeom>
+        </p:spPr>
+      </p:pic>
+      <p:sp>
+        <p:nvSpPr>
+          <p:cNvPr id="16" name="TextBox 15"/>
+          <p:cNvSpPr txBox="1"/>
+          <p:nvPr/>
+        </p:nvSpPr>
+        <p:spPr>
+          <a:xfrm>
+            <a:off x="3529584" y="2683763"/>
+            <a:ext cx="4745775" cy="457200"/>
+          </a:xfrm>
+          <a:prstGeom prst="rect">
+            <a:avLst/>
+          </a:prstGeom>
+          <a:noFill/>
+        </p:spPr>
+        <p:txBody>
+          <a:bodyPr wrap="none" lIns="45720" rIns="45720" tIns="18288" bIns="18288" anchor="ctr">
+            <a:noAutofit/>
+          </a:bodyPr>
+          <a:lstStyle/>
+          <a:p>
+            <a:pPr algn="l"/>
+            <a:r>
+              <a:rPr sz="2180" b="0" i="0">
                 <a:solidFill>
                   <a:srgbClr val="1A1A1A"/>
                 </a:solidFill>
                 <a:latin typeface="Lexend"/>
               </a:rPr>
-              <a:t>1 mi = 1.61 km. How many kilometers is 10 mi?</a:t>
-            </a:r>
-          </a:p>
-        </p:txBody>
-      </p:sp>
-      <p:sp>
-        <p:nvSpPr>
-          <p:cNvPr id="14" name="TextBox 13"/>
-          <p:cNvSpPr txBox="1"/>
-          <p:nvPr/>
-        </p:nvSpPr>
-        <p:spPr>
-          <a:xfrm>
-            <a:off x="960120" y="3081528"/>
-            <a:ext cx="548640" cy="356616"/>
-          </a:xfrm>
-          <a:prstGeom prst="rect">
-            <a:avLst/>
-          </a:prstGeom>
-          <a:noFill/>
-        </p:spPr>
-        <p:txBody>
-          <a:bodyPr wrap="square" lIns="45720" rIns="45720" tIns="18288" bIns="18288" anchor="t">
-            <a:spAutoFit/>
-          </a:bodyPr>
-          <a:lstStyle/>
-          <a:p>
-            <a:pPr algn="l"/>
-            <a:r>
-              <a:rPr sz="1810" b="1" i="0">
+              <a:t>. How many kilometers is 10 mi?</a:t>
+            </a:r>
+          </a:p>
+        </p:txBody>
+      </p:sp>
+      <p:sp>
+        <p:nvSpPr>
+          <p:cNvPr id="17" name="TextBox 16"/>
+          <p:cNvSpPr txBox="1"/>
+          <p:nvPr/>
+        </p:nvSpPr>
+        <p:spPr>
+          <a:xfrm>
+            <a:off x="960120" y="3278123"/>
+            <a:ext cx="548640" cy="457200"/>
+          </a:xfrm>
+          <a:prstGeom prst="rect">
+            <a:avLst/>
+          </a:prstGeom>
+          <a:noFill/>
+        </p:spPr>
+        <p:txBody>
+          <a:bodyPr wrap="square" lIns="45720" rIns="45720" tIns="18288" bIns="18288" anchor="ctr">
+            <a:spAutoFit/>
+          </a:bodyPr>
+          <a:lstStyle/>
+          <a:p>
+            <a:pPr algn="l"/>
+            <a:r>
+              <a:rPr sz="2180" b="1" i="0">
                 <a:solidFill>
                   <a:srgbClr val="0B5394"/>
                 </a:solidFill>
@@ -13282,66 +15375,90 @@
           </a:p>
         </p:txBody>
       </p:sp>
-      <p:sp>
-        <p:nvSpPr>
-          <p:cNvPr id="15" name="TextBox 14"/>
-          <p:cNvSpPr txBox="1"/>
-          <p:nvPr/>
-        </p:nvSpPr>
-        <p:spPr>
-          <a:xfrm>
-            <a:off x="1554480" y="3081528"/>
-            <a:ext cx="9829800" cy="411480"/>
-          </a:xfrm>
-          <a:prstGeom prst="rect">
-            <a:avLst/>
-          </a:prstGeom>
-          <a:noFill/>
-        </p:spPr>
-        <p:txBody>
-          <a:bodyPr wrap="square" lIns="45720" rIns="45720" tIns="18288" bIns="18288" anchor="t">
-            <a:spAutoFit/>
-          </a:bodyPr>
-          <a:lstStyle/>
-          <a:p>
-            <a:pPr algn="l"/>
-            <a:r>
-              <a:rPr sz="1810" b="0" i="0">
+      <p:pic>
+        <p:nvPicPr>
+          <p:cNvPr id="18" name="Picture 17" descr="d2f86d8905c9108c.png"/>
+          <p:cNvPicPr>
+            <a:picLocks noChangeAspect="1"/>
+          </p:cNvPicPr>
+          <p:nvPr/>
+        </p:nvPicPr>
+        <p:blipFill>
+          <a:blip r:embed="rId5"/>
+          <a:stretch>
+            <a:fillRect/>
+          </a:stretch>
+        </p:blipFill>
+        <p:spPr>
+          <a:xfrm>
+            <a:off x="1627632" y="3384803"/>
+            <a:ext cx="1950720" cy="243840"/>
+          </a:xfrm>
+          <a:prstGeom prst="rect">
+            <a:avLst/>
+          </a:prstGeom>
+        </p:spPr>
+      </p:pic>
+      <p:sp>
+        <p:nvSpPr>
+          <p:cNvPr id="19" name="TextBox 18"/>
+          <p:cNvSpPr txBox="1"/>
+          <p:nvPr/>
+        </p:nvSpPr>
+        <p:spPr>
+          <a:xfrm>
+            <a:off x="3578352" y="3278123"/>
+            <a:ext cx="3925387" cy="457200"/>
+          </a:xfrm>
+          <a:prstGeom prst="rect">
+            <a:avLst/>
+          </a:prstGeom>
+          <a:noFill/>
+        </p:spPr>
+        <p:txBody>
+          <a:bodyPr wrap="none" lIns="45720" rIns="45720" tIns="18288" bIns="18288" anchor="ctr">
+            <a:noAutofit/>
+          </a:bodyPr>
+          <a:lstStyle/>
+          <a:p>
+            <a:pPr algn="l"/>
+            <a:r>
+              <a:rPr sz="2180" b="0" i="0">
                 <a:solidFill>
                   <a:srgbClr val="1A1A1A"/>
                 </a:solidFill>
                 <a:latin typeface="Lexend"/>
               </a:rPr>
-              <a:t>1 km = 0.62 mi. How many miles is 8 km?</a:t>
-            </a:r>
-          </a:p>
-        </p:txBody>
-      </p:sp>
-      <p:sp>
-        <p:nvSpPr>
-          <p:cNvPr id="16" name="TextBox 15"/>
-          <p:cNvSpPr txBox="1"/>
-          <p:nvPr/>
-        </p:nvSpPr>
-        <p:spPr>
-          <a:xfrm>
-            <a:off x="960120" y="3584448"/>
-            <a:ext cx="548640" cy="356616"/>
-          </a:xfrm>
-          <a:prstGeom prst="rect">
-            <a:avLst/>
-          </a:prstGeom>
-          <a:noFill/>
-        </p:spPr>
-        <p:txBody>
-          <a:bodyPr wrap="square" lIns="45720" rIns="45720" tIns="18288" bIns="18288" anchor="t">
-            <a:spAutoFit/>
-          </a:bodyPr>
-          <a:lstStyle/>
-          <a:p>
-            <a:pPr algn="l"/>
-            <a:r>
-              <a:rPr sz="1810" b="1" i="0">
+              <a:t>. How many miles is 8 km?</a:t>
+            </a:r>
+          </a:p>
+        </p:txBody>
+      </p:sp>
+      <p:sp>
+        <p:nvSpPr>
+          <p:cNvPr id="20" name="TextBox 19"/>
+          <p:cNvSpPr txBox="1"/>
+          <p:nvPr/>
+        </p:nvSpPr>
+        <p:spPr>
+          <a:xfrm>
+            <a:off x="960120" y="3872483"/>
+            <a:ext cx="548640" cy="457200"/>
+          </a:xfrm>
+          <a:prstGeom prst="rect">
+            <a:avLst/>
+          </a:prstGeom>
+          <a:noFill/>
+        </p:spPr>
+        <p:txBody>
+          <a:bodyPr wrap="square" lIns="45720" rIns="45720" tIns="18288" bIns="18288" anchor="ctr">
+            <a:spAutoFit/>
+          </a:bodyPr>
+          <a:lstStyle/>
+          <a:p>
+            <a:pPr algn="l"/>
+            <a:r>
+              <a:rPr sz="2180" b="1" i="0">
                 <a:solidFill>
                   <a:srgbClr val="0B5394"/>
                 </a:solidFill>
@@ -13352,66 +15469,243 @@
           </a:p>
         </p:txBody>
       </p:sp>
-      <p:sp>
-        <p:nvSpPr>
-          <p:cNvPr id="17" name="TextBox 16"/>
-          <p:cNvSpPr txBox="1"/>
-          <p:nvPr/>
-        </p:nvSpPr>
-        <p:spPr>
-          <a:xfrm>
-            <a:off x="1554480" y="3584448"/>
-            <a:ext cx="9829800" cy="768096"/>
-          </a:xfrm>
-          <a:prstGeom prst="rect">
-            <a:avLst/>
-          </a:prstGeom>
-          <a:noFill/>
-        </p:spPr>
-        <p:txBody>
-          <a:bodyPr wrap="square" lIns="45720" rIns="45720" tIns="18288" bIns="18288" anchor="t">
-            <a:spAutoFit/>
-          </a:bodyPr>
-          <a:lstStyle/>
-          <a:p>
-            <a:pPr algn="l"/>
-            <a:r>
-              <a:rPr sz="1810" b="0" i="0">
+      <p:pic>
+        <p:nvPicPr>
+          <p:cNvPr id="21" name="Picture 20" descr="85d78c8d2e33f8ba.png"/>
+          <p:cNvPicPr>
+            <a:picLocks noChangeAspect="1"/>
+          </p:cNvPicPr>
+          <p:nvPr/>
+        </p:nvPicPr>
+        <p:blipFill>
+          <a:blip r:embed="rId6"/>
+          <a:stretch>
+            <a:fillRect/>
+          </a:stretch>
+        </p:blipFill>
+        <p:spPr>
+          <a:xfrm>
+            <a:off x="1627632" y="3948684"/>
+            <a:ext cx="1304544" cy="304800"/>
+          </a:xfrm>
+          <a:prstGeom prst="rect">
+            <a:avLst/>
+          </a:prstGeom>
+        </p:spPr>
+      </p:pic>
+      <p:sp>
+        <p:nvSpPr>
+          <p:cNvPr id="22" name="TextBox 21"/>
+          <p:cNvSpPr txBox="1"/>
+          <p:nvPr/>
+        </p:nvSpPr>
+        <p:spPr>
+          <a:xfrm>
+            <a:off x="2932176" y="3872483"/>
+            <a:ext cx="371222" cy="457200"/>
+          </a:xfrm>
+          <a:prstGeom prst="rect">
+            <a:avLst/>
+          </a:prstGeom>
+          <a:noFill/>
+        </p:spPr>
+        <p:txBody>
+          <a:bodyPr wrap="none" lIns="45720" rIns="45720" tIns="18288" bIns="18288" anchor="ctr">
+            <a:noAutofit/>
+          </a:bodyPr>
+          <a:lstStyle/>
+          <a:p>
+            <a:pPr algn="l"/>
+            <a:r>
+              <a:rPr sz="2180" b="0" i="0">
                 <a:solidFill>
                   <a:srgbClr val="1A1A1A"/>
                 </a:solidFill>
                 <a:latin typeface="Lexend"/>
               </a:rPr>
-              <a:t>1 yd = 3 ft, 1 ft = 12 in, 1 in = 2.54 cm. How many centimeters is 2 yd? Estimate first.</a:t>
-            </a:r>
-          </a:p>
-        </p:txBody>
-      </p:sp>
-      <p:sp>
-        <p:nvSpPr>
-          <p:cNvPr id="18" name="TextBox 17"/>
-          <p:cNvSpPr txBox="1"/>
-          <p:nvPr/>
-        </p:nvSpPr>
-        <p:spPr>
-          <a:xfrm>
-            <a:off x="960120" y="4443984"/>
-            <a:ext cx="548640" cy="356616"/>
-          </a:xfrm>
-          <a:prstGeom prst="rect">
-            <a:avLst/>
-          </a:prstGeom>
-          <a:noFill/>
-        </p:spPr>
-        <p:txBody>
-          <a:bodyPr wrap="square" lIns="45720" rIns="45720" tIns="18288" bIns="18288" anchor="t">
-            <a:spAutoFit/>
-          </a:bodyPr>
-          <a:lstStyle/>
-          <a:p>
-            <a:pPr algn="l"/>
-            <a:r>
-              <a:rPr sz="1810" b="1" i="0">
+              <a:t>, </a:t>
+            </a:r>
+          </a:p>
+        </p:txBody>
+      </p:sp>
+      <p:pic>
+        <p:nvPicPr>
+          <p:cNvPr id="23" name="Picture 22" descr="a7e24ba549ecbc3a.png"/>
+          <p:cNvPicPr>
+            <a:picLocks noChangeAspect="1"/>
+          </p:cNvPicPr>
+          <p:nvPr/>
+        </p:nvPicPr>
+        <p:blipFill>
+          <a:blip r:embed="rId7"/>
+          <a:stretch>
+            <a:fillRect/>
+          </a:stretch>
+        </p:blipFill>
+        <p:spPr>
+          <a:xfrm>
+            <a:off x="3166238" y="3980688"/>
+            <a:ext cx="1347216" cy="240791"/>
+          </a:xfrm>
+          <a:prstGeom prst="rect">
+            <a:avLst/>
+          </a:prstGeom>
+        </p:spPr>
+      </p:pic>
+      <p:sp>
+        <p:nvSpPr>
+          <p:cNvPr id="24" name="TextBox 23"/>
+          <p:cNvSpPr txBox="1"/>
+          <p:nvPr/>
+        </p:nvSpPr>
+        <p:spPr>
+          <a:xfrm>
+            <a:off x="4513454" y="3872483"/>
+            <a:ext cx="371222" cy="457200"/>
+          </a:xfrm>
+          <a:prstGeom prst="rect">
+            <a:avLst/>
+          </a:prstGeom>
+          <a:noFill/>
+        </p:spPr>
+        <p:txBody>
+          <a:bodyPr wrap="none" lIns="45720" rIns="45720" tIns="18288" bIns="18288" anchor="ctr">
+            <a:noAutofit/>
+          </a:bodyPr>
+          <a:lstStyle/>
+          <a:p>
+            <a:pPr algn="l"/>
+            <a:r>
+              <a:rPr sz="2180" b="0" i="0">
+                <a:solidFill>
+                  <a:srgbClr val="1A1A1A"/>
+                </a:solidFill>
+                <a:latin typeface="Lexend"/>
+              </a:rPr>
+              <a:t>, </a:t>
+            </a:r>
+          </a:p>
+        </p:txBody>
+      </p:sp>
+      <p:pic>
+        <p:nvPicPr>
+          <p:cNvPr id="25" name="Picture 24" descr="88d2b26b87c7a8c9.png"/>
+          <p:cNvPicPr>
+            <a:picLocks noChangeAspect="1"/>
+          </p:cNvPicPr>
+          <p:nvPr/>
+        </p:nvPicPr>
+        <p:blipFill>
+          <a:blip r:embed="rId2"/>
+          <a:stretch>
+            <a:fillRect/>
+          </a:stretch>
+        </p:blipFill>
+        <p:spPr>
+          <a:xfrm>
+            <a:off x="4747516" y="3979164"/>
+            <a:ext cx="1847088" cy="243840"/>
+          </a:xfrm>
+          <a:prstGeom prst="rect">
+            <a:avLst/>
+          </a:prstGeom>
+        </p:spPr>
+      </p:pic>
+      <p:sp>
+        <p:nvSpPr>
+          <p:cNvPr id="26" name="TextBox 25"/>
+          <p:cNvSpPr txBox="1"/>
+          <p:nvPr/>
+        </p:nvSpPr>
+        <p:spPr>
+          <a:xfrm>
+            <a:off x="6594604" y="3872483"/>
+            <a:ext cx="4864322" cy="457200"/>
+          </a:xfrm>
+          <a:prstGeom prst="rect">
+            <a:avLst/>
+          </a:prstGeom>
+          <a:noFill/>
+        </p:spPr>
+        <p:txBody>
+          <a:bodyPr wrap="none" lIns="45720" rIns="45720" tIns="18288" bIns="18288" anchor="ctr">
+            <a:noAutofit/>
+          </a:bodyPr>
+          <a:lstStyle/>
+          <a:p>
+            <a:pPr algn="l"/>
+            <a:r>
+              <a:rPr sz="2180" b="0" i="0">
+                <a:solidFill>
+                  <a:srgbClr val="1A1A1A"/>
+                </a:solidFill>
+                <a:latin typeface="Lexend"/>
+              </a:rPr>
+              <a:t>. How many centimeters is 2 yd? </a:t>
+            </a:r>
+          </a:p>
+        </p:txBody>
+      </p:sp>
+      <p:sp>
+        <p:nvSpPr>
+          <p:cNvPr id="27" name="TextBox 26"/>
+          <p:cNvSpPr txBox="1"/>
+          <p:nvPr/>
+        </p:nvSpPr>
+        <p:spPr>
+          <a:xfrm>
+            <a:off x="1554480" y="4311396"/>
+            <a:ext cx="2186646" cy="457200"/>
+          </a:xfrm>
+          <a:prstGeom prst="rect">
+            <a:avLst/>
+          </a:prstGeom>
+          <a:noFill/>
+        </p:spPr>
+        <p:txBody>
+          <a:bodyPr wrap="none" lIns="45720" rIns="45720" tIns="18288" bIns="18288" anchor="ctr">
+            <a:noAutofit/>
+          </a:bodyPr>
+          <a:lstStyle/>
+          <a:p>
+            <a:pPr algn="l"/>
+            <a:r>
+              <a:rPr sz="2180" b="0" i="0">
+                <a:solidFill>
+                  <a:srgbClr val="1A1A1A"/>
+                </a:solidFill>
+                <a:latin typeface="Lexend"/>
+              </a:rPr>
+              <a:t>Estimate first.</a:t>
+            </a:r>
+          </a:p>
+        </p:txBody>
+      </p:sp>
+      <p:sp>
+        <p:nvSpPr>
+          <p:cNvPr id="28" name="TextBox 27"/>
+          <p:cNvSpPr txBox="1"/>
+          <p:nvPr/>
+        </p:nvSpPr>
+        <p:spPr>
+          <a:xfrm>
+            <a:off x="960120" y="4905755"/>
+            <a:ext cx="548640" cy="457200"/>
+          </a:xfrm>
+          <a:prstGeom prst="rect">
+            <a:avLst/>
+          </a:prstGeom>
+          <a:noFill/>
+        </p:spPr>
+        <p:txBody>
+          <a:bodyPr wrap="square" lIns="45720" rIns="45720" tIns="18288" bIns="18288" anchor="ctr">
+            <a:spAutoFit/>
+          </a:bodyPr>
+          <a:lstStyle/>
+          <a:p>
+            <a:pPr algn="l"/>
+            <a:r>
+              <a:rPr sz="2180" b="1" i="0">
                 <a:solidFill>
                   <a:srgbClr val="0B5394"/>
                 </a:solidFill>
@@ -13424,35 +15718,129 @@
       </p:sp>
       <p:sp>
         <p:nvSpPr>
-          <p:cNvPr id="19" name="TextBox 18"/>
-          <p:cNvSpPr txBox="1"/>
-          <p:nvPr/>
-        </p:nvSpPr>
-        <p:spPr>
-          <a:xfrm>
-            <a:off x="1554480" y="4443984"/>
-            <a:ext cx="9829800" cy="768096"/>
-          </a:xfrm>
-          <a:prstGeom prst="rect">
-            <a:avLst/>
-          </a:prstGeom>
-          <a:noFill/>
-        </p:spPr>
-        <p:txBody>
-          <a:bodyPr wrap="square" lIns="45720" rIns="45720" tIns="18288" bIns="18288" anchor="t">
-            <a:spAutoFit/>
-          </a:bodyPr>
-          <a:lstStyle/>
-          <a:p>
-            <a:pPr algn="l"/>
-            <a:r>
-              <a:rPr sz="1810" b="0" i="0">
+          <p:cNvPr id="29" name="TextBox 28"/>
+          <p:cNvSpPr txBox="1"/>
+          <p:nvPr/>
+        </p:nvSpPr>
+        <p:spPr>
+          <a:xfrm>
+            <a:off x="1554480" y="4905755"/>
+            <a:ext cx="2086283" cy="457200"/>
+          </a:xfrm>
+          <a:prstGeom prst="rect">
+            <a:avLst/>
+          </a:prstGeom>
+          <a:noFill/>
+        </p:spPr>
+        <p:txBody>
+          <a:bodyPr wrap="none" lIns="45720" rIns="45720" tIns="18288" bIns="18288" anchor="ctr">
+            <a:noAutofit/>
+          </a:bodyPr>
+          <a:lstStyle/>
+          <a:p>
+            <a:pPr algn="l"/>
+            <a:r>
+              <a:rPr sz="2180" b="0" i="0">
                 <a:solidFill>
                   <a:srgbClr val="1A1A1A"/>
                 </a:solidFill>
                 <a:latin typeface="Lexend"/>
               </a:rPr>
-              <a:t>Today's rate: 1 US dollar = 0.92 euros. How many euros is $50? How many dollars is 23 euros?</a:t>
+              <a:t>Today's rate: </a:t>
+            </a:r>
+          </a:p>
+        </p:txBody>
+      </p:sp>
+      <p:pic>
+        <p:nvPicPr>
+          <p:cNvPr id="30" name="Picture 29" descr="9090d8e8f0989a75.png"/>
+          <p:cNvPicPr>
+            <a:picLocks noChangeAspect="1"/>
+          </p:cNvPicPr>
+          <p:nvPr/>
+        </p:nvPicPr>
+        <p:blipFill>
+          <a:blip r:embed="rId8"/>
+          <a:stretch>
+            <a:fillRect/>
+          </a:stretch>
+        </p:blipFill>
+        <p:spPr>
+          <a:xfrm>
+            <a:off x="3503603" y="5017008"/>
+            <a:ext cx="3346704" cy="234696"/>
+          </a:xfrm>
+          <a:prstGeom prst="rect">
+            <a:avLst/>
+          </a:prstGeom>
+        </p:spPr>
+      </p:pic>
+      <p:sp>
+        <p:nvSpPr>
+          <p:cNvPr id="31" name="TextBox 30"/>
+          <p:cNvSpPr txBox="1"/>
+          <p:nvPr/>
+        </p:nvSpPr>
+        <p:spPr>
+          <a:xfrm>
+            <a:off x="6850307" y="4905755"/>
+            <a:ext cx="4610093" cy="457200"/>
+          </a:xfrm>
+          <a:prstGeom prst="rect">
+            <a:avLst/>
+          </a:prstGeom>
+          <a:noFill/>
+        </p:spPr>
+        <p:txBody>
+          <a:bodyPr wrap="none" lIns="45720" rIns="45720" tIns="18288" bIns="18288" anchor="ctr">
+            <a:noAutofit/>
+          </a:bodyPr>
+          <a:lstStyle/>
+          <a:p>
+            <a:pPr algn="l"/>
+            <a:r>
+              <a:rPr sz="2180" b="0" i="0">
+                <a:solidFill>
+                  <a:srgbClr val="1A1A1A"/>
+                </a:solidFill>
+                <a:latin typeface="Lexend"/>
+              </a:rPr>
+              <a:t>. How many euros is $50? How </a:t>
+            </a:r>
+          </a:p>
+        </p:txBody>
+      </p:sp>
+      <p:sp>
+        <p:nvSpPr>
+          <p:cNvPr id="32" name="TextBox 31"/>
+          <p:cNvSpPr txBox="1"/>
+          <p:nvPr/>
+        </p:nvSpPr>
+        <p:spPr>
+          <a:xfrm>
+            <a:off x="1554480" y="5344667"/>
+            <a:ext cx="3773019" cy="457200"/>
+          </a:xfrm>
+          <a:prstGeom prst="rect">
+            <a:avLst/>
+          </a:prstGeom>
+          <a:noFill/>
+        </p:spPr>
+        <p:txBody>
+          <a:bodyPr wrap="none" lIns="45720" rIns="45720" tIns="18288" bIns="18288" anchor="ctr">
+            <a:noAutofit/>
+          </a:bodyPr>
+          <a:lstStyle/>
+          <a:p>
+            <a:pPr algn="l"/>
+            <a:r>
+              <a:rPr sz="2180" b="0" i="0">
+                <a:solidFill>
+                  <a:srgbClr val="1A1A1A"/>
+                </a:solidFill>
+                <a:latin typeface="Lexend"/>
+              </a:rPr>
+              <a:t>many dollars is 23 euros?</a:t>
             </a:r>
           </a:p>
         </p:txBody>
@@ -14446,8 +16834,137 @@
         </p:nvSpPr>
         <p:spPr>
           <a:xfrm>
-            <a:off x="1143000" y="3834914"/>
-            <a:ext cx="10241280" cy="715617"/>
+            <a:off x="1143000" y="3812054"/>
+            <a:ext cx="4429150" cy="457200"/>
+          </a:xfrm>
+          <a:prstGeom prst="rect">
+            <a:avLst/>
+          </a:prstGeom>
+          <a:noFill/>
+        </p:spPr>
+        <p:txBody>
+          <a:bodyPr wrap="none" lIns="45720" rIns="45720" tIns="18288" bIns="18288" anchor="ctr">
+            <a:noAutofit/>
+          </a:bodyPr>
+          <a:lstStyle/>
+          <a:p>
+            <a:pPr algn="l"/>
+            <a:r>
+              <a:rPr sz="1900" b="0" i="0">
+                <a:solidFill>
+                  <a:srgbClr val="1A1A1A"/>
+                </a:solidFill>
+                <a:latin typeface="Lexend"/>
+              </a:rPr>
+              <a:t>a pair of equal measures, such as </a:t>
+            </a:r>
+          </a:p>
+        </p:txBody>
+      </p:sp>
+      <p:pic>
+        <p:nvPicPr>
+          <p:cNvPr id="14" name="Picture 13" descr="23c46f257f02bce0.png"/>
+          <p:cNvPicPr>
+            <a:picLocks noChangeAspect="1"/>
+          </p:cNvPicPr>
+          <p:nvPr/>
+        </p:nvPicPr>
+        <p:blipFill>
+          <a:blip r:embed="rId2"/>
+          <a:stretch>
+            <a:fillRect/>
+          </a:stretch>
+        </p:blipFill>
+        <p:spPr>
+          <a:xfrm>
+            <a:off x="5434990" y="3840248"/>
+            <a:ext cx="2270760" cy="301752"/>
+          </a:xfrm>
+          <a:prstGeom prst="rect">
+            <a:avLst/>
+          </a:prstGeom>
+        </p:spPr>
+      </p:pic>
+      <p:sp>
+        <p:nvSpPr>
+          <p:cNvPr id="15" name="TextBox 14"/>
+          <p:cNvSpPr txBox="1"/>
+          <p:nvPr/>
+        </p:nvSpPr>
+        <p:spPr>
+          <a:xfrm>
+            <a:off x="7705750" y="3812054"/>
+            <a:ext cx="278602" cy="457200"/>
+          </a:xfrm>
+          <a:prstGeom prst="rect">
+            <a:avLst/>
+          </a:prstGeom>
+          <a:noFill/>
+        </p:spPr>
+        <p:txBody>
+          <a:bodyPr wrap="none" lIns="45720" rIns="45720" tIns="18288" bIns="18288" anchor="ctr">
+            <a:noAutofit/>
+          </a:bodyPr>
+          <a:lstStyle/>
+          <a:p>
+            <a:pPr algn="l"/>
+            <a:r>
+              <a:rPr sz="1900" b="0" i="0">
+                <a:solidFill>
+                  <a:srgbClr val="1A1A1A"/>
+                </a:solidFill>
+                <a:latin typeface="Lexend"/>
+              </a:rPr>
+              <a:t>,</a:t>
+            </a:r>
+          </a:p>
+        </p:txBody>
+      </p:sp>
+      <p:sp>
+        <p:nvSpPr>
+          <p:cNvPr id="16" name="TextBox 15"/>
+          <p:cNvSpPr txBox="1"/>
+          <p:nvPr/>
+        </p:nvSpPr>
+        <p:spPr>
+          <a:xfrm>
+            <a:off x="1143000" y="4296686"/>
+            <a:ext cx="4390633" cy="457200"/>
+          </a:xfrm>
+          <a:prstGeom prst="rect">
+            <a:avLst/>
+          </a:prstGeom>
+          <a:noFill/>
+        </p:spPr>
+        <p:txBody>
+          <a:bodyPr wrap="none" lIns="45720" rIns="45720" tIns="18288" bIns="18288" anchor="ctr">
+            <a:noAutofit/>
+          </a:bodyPr>
+          <a:lstStyle/>
+          <a:p>
+            <a:pPr algn="l"/>
+            <a:r>
+              <a:rPr sz="1900" b="0" i="0">
+                <a:solidFill>
+                  <a:srgbClr val="1A1A1A"/>
+                </a:solidFill>
+                <a:latin typeface="Lexend"/>
+              </a:rPr>
+              <a:t>written as a fraction that equals 1</a:t>
+            </a:r>
+          </a:p>
+        </p:txBody>
+      </p:sp>
+      <p:sp>
+        <p:nvSpPr>
+          <p:cNvPr id="17" name="TextBox 16"/>
+          <p:cNvSpPr txBox="1"/>
+          <p:nvPr/>
+        </p:nvSpPr>
+        <p:spPr>
+          <a:xfrm>
+            <a:off x="777240" y="4932194"/>
+            <a:ext cx="10607040" cy="393589"/>
           </a:xfrm>
           <a:prstGeom prst="rect">
             <a:avLst/>
@@ -14462,41 +16979,6 @@
           <a:p>
             <a:pPr algn="l"/>
             <a:r>
-              <a:rPr sz="1900" b="0" i="0">
-                <a:solidFill>
-                  <a:srgbClr val="1A1A1A"/>
-                </a:solidFill>
-                <a:latin typeface="Lexend"/>
-              </a:rPr>
-              <a:t>a pair of equal measures, such as 1 in = 2.54 cm, written as a fraction that equals 1</a:t>
-            </a:r>
-          </a:p>
-        </p:txBody>
-      </p:sp>
-      <p:sp>
-        <p:nvSpPr>
-          <p:cNvPr id="14" name="TextBox 13"/>
-          <p:cNvSpPr txBox="1"/>
-          <p:nvPr/>
-        </p:nvSpPr>
-        <p:spPr>
-          <a:xfrm>
-            <a:off x="777240" y="4788275"/>
-            <a:ext cx="10607040" cy="393589"/>
-          </a:xfrm>
-          <a:prstGeom prst="rect">
-            <a:avLst/>
-          </a:prstGeom>
-          <a:noFill/>
-        </p:spPr>
-        <p:txBody>
-          <a:bodyPr wrap="square" lIns="45720" rIns="45720" tIns="18288" bIns="18288" anchor="t">
-            <a:spAutoFit/>
-          </a:bodyPr>
-          <a:lstStyle/>
-          <a:p>
-            <a:pPr algn="l"/>
-            <a:r>
               <a:rPr sz="2090" b="1" i="0">
                 <a:solidFill>
                   <a:srgbClr val="0B5394"/>
@@ -14510,13 +16992,13 @@
       </p:sp>
       <p:sp>
         <p:nvSpPr>
-          <p:cNvPr id="15" name="TextBox 14"/>
-          <p:cNvSpPr txBox="1"/>
-          <p:nvPr/>
-        </p:nvSpPr>
-        <p:spPr>
-          <a:xfrm>
-            <a:off x="1143000" y="5181865"/>
+          <p:cNvPr id="18" name="TextBox 17"/>
+          <p:cNvSpPr txBox="1"/>
+          <p:nvPr/>
+        </p:nvSpPr>
+        <p:spPr>
+          <a:xfrm>
+            <a:off x="1143000" y="5325783"/>
             <a:ext cx="10241280" cy="715617"/>
           </a:xfrm>
           <a:prstGeom prst="rect">
@@ -15536,7 +18018,7 @@
         </p:blipFill>
         <p:spPr>
           <a:xfrm>
-            <a:off x="4291583" y="2054352"/>
+            <a:off x="4291583" y="2039493"/>
             <a:ext cx="3578352" cy="289560"/>
           </a:xfrm>
           <a:prstGeom prst="rect">
@@ -15560,7 +18042,7 @@
         </p:blipFill>
         <p:spPr>
           <a:xfrm>
-            <a:off x="2542032" y="2744724"/>
+            <a:off x="2542032" y="2734437"/>
             <a:ext cx="7077456" cy="280416"/>
           </a:xfrm>
           <a:prstGeom prst="rect">
@@ -15796,29 +18278,53 @@
           </a:p>
         </p:txBody>
       </p:sp>
-      <p:sp>
-        <p:nvSpPr>
-          <p:cNvPr id="8" name="TextBox 7"/>
-          <p:cNvSpPr txBox="1"/>
-          <p:nvPr/>
-        </p:nvSpPr>
-        <p:spPr>
-          <a:xfrm>
-            <a:off x="777240" y="2103120"/>
-            <a:ext cx="10607040" cy="429370"/>
-          </a:xfrm>
-          <a:prstGeom prst="rect">
-            <a:avLst/>
-          </a:prstGeom>
-          <a:noFill/>
-        </p:spPr>
-        <p:txBody>
-          <a:bodyPr wrap="square" lIns="45720" rIns="45720" tIns="18288" bIns="18288" anchor="t">
-            <a:spAutoFit/>
-          </a:bodyPr>
-          <a:lstStyle/>
-          <a:p>
-            <a:pPr algn="ctr"/>
+      <p:pic>
+        <p:nvPicPr>
+          <p:cNvPr id="8" name="Picture 7" descr="88d2b26b87c7a8c9.png"/>
+          <p:cNvPicPr>
+            <a:picLocks noChangeAspect="1"/>
+          </p:cNvPicPr>
+          <p:nvPr/>
+        </p:nvPicPr>
+        <p:blipFill>
+          <a:blip r:embed="rId2"/>
+          <a:stretch>
+            <a:fillRect/>
+          </a:stretch>
+        </p:blipFill>
+        <p:spPr>
+          <a:xfrm>
+            <a:off x="2826206" y="2185415"/>
+            <a:ext cx="1847088" cy="243840"/>
+          </a:xfrm>
+          <a:prstGeom prst="rect">
+            <a:avLst/>
+          </a:prstGeom>
+        </p:spPr>
+      </p:pic>
+      <p:sp>
+        <p:nvSpPr>
+          <p:cNvPr id="9" name="TextBox 8"/>
+          <p:cNvSpPr txBox="1"/>
+          <p:nvPr/>
+        </p:nvSpPr>
+        <p:spPr>
+          <a:xfrm>
+            <a:off x="4673294" y="2080260"/>
+            <a:ext cx="4799179" cy="457200"/>
+          </a:xfrm>
+          <a:prstGeom prst="rect">
+            <a:avLst/>
+          </a:prstGeom>
+          <a:noFill/>
+        </p:spPr>
+        <p:txBody>
+          <a:bodyPr wrap="none" lIns="45720" rIns="45720" tIns="18288" bIns="18288" anchor="ctr">
+            <a:noAutofit/>
+          </a:bodyPr>
+          <a:lstStyle/>
+          <a:p>
+            <a:pPr algn="l"/>
             <a:r>
               <a:rPr sz="2280" b="0" i="0">
                 <a:solidFill>
@@ -15826,20 +18332,20 @@
                 </a:solidFill>
                 <a:latin typeface="Lexend"/>
               </a:rPr>
-              <a:t>1 in = 2.54 cm. A tablet screen is 15 in across.</a:t>
-            </a:r>
-          </a:p>
-        </p:txBody>
-      </p:sp>
-      <p:sp>
-        <p:nvSpPr>
-          <p:cNvPr id="9" name="TextBox 8"/>
-          <p:cNvSpPr txBox="1"/>
-          <p:nvPr/>
-        </p:nvSpPr>
-        <p:spPr>
-          <a:xfrm>
-            <a:off x="777240" y="2825098"/>
+              <a:t>. A tablet screen is 15 in across.</a:t>
+            </a:r>
+          </a:p>
+        </p:txBody>
+      </p:sp>
+      <p:sp>
+        <p:nvSpPr>
+          <p:cNvPr id="10" name="TextBox 9"/>
+          <p:cNvSpPr txBox="1"/>
+          <p:nvPr/>
+        </p:nvSpPr>
+        <p:spPr>
+          <a:xfrm>
+            <a:off x="777240" y="2971800"/>
             <a:ext cx="10607040" cy="429370"/>
           </a:xfrm>
           <a:prstGeom prst="rect">

--- a/a7/packages/A7 Unit 5 - Multi-Step Proportional Relationships/Lessons/5.06/A7 5.06 Converting Length Across Systems; Currency - Slides.pptx
+++ b/a7/packages/A7 Unit 5 - Multi-Step Proportional Relationships/Lessons/5.06/A7 5.06 Converting Length Across Systems; Currency - Slides.pptx
@@ -3667,7 +3667,7 @@
       </p:sp>
       <p:pic>
         <p:nvPicPr>
-          <p:cNvPr id="8" name="Picture 7" descr="88d2b26b87c7a8c9.png"/>
+          <p:cNvPr id="8" name="Picture 7" descr="23c46f257f02bce0.png"/>
           <p:cNvPicPr>
             <a:picLocks noChangeAspect="1"/>
           </p:cNvPicPr>
@@ -3681,8 +3681,8 @@
         </p:blipFill>
         <p:spPr>
           <a:xfrm>
-            <a:off x="3200756" y="1682496"/>
-            <a:ext cx="1847088" cy="243840"/>
+            <a:off x="3201804" y="1680019"/>
+            <a:ext cx="1844992" cy="245173"/>
           </a:xfrm>
           <a:prstGeom prst="rect">
             <a:avLst/>
@@ -3697,7 +3697,7 @@
         </p:nvSpPr>
         <p:spPr>
           <a:xfrm>
-            <a:off x="5047844" y="1577340"/>
+            <a:off x="5046796" y="1577340"/>
             <a:ext cx="4050079" cy="457200"/>
           </a:xfrm>
           <a:prstGeom prst="rect">
@@ -3989,7 +3989,7 @@
       </p:sp>
       <p:pic>
         <p:nvPicPr>
-          <p:cNvPr id="8" name="Picture 7" descr="e3914b43cbb52236.png"/>
+          <p:cNvPr id="8" name="Picture 7" descr="93fcb734e6361b20.png"/>
           <p:cNvPicPr>
             <a:picLocks noChangeAspect="1"/>
           </p:cNvPicPr>
@@ -4003,8 +4003,8 @@
         </p:blipFill>
         <p:spPr>
           <a:xfrm>
-            <a:off x="3202280" y="1682496"/>
-            <a:ext cx="1844040" cy="243840"/>
+            <a:off x="3201804" y="1680019"/>
+            <a:ext cx="1844992" cy="245173"/>
           </a:xfrm>
           <a:prstGeom prst="rect">
             <a:avLst/>
@@ -4019,7 +4019,7 @@
         </p:nvSpPr>
         <p:spPr>
           <a:xfrm>
-            <a:off x="5046320" y="1577340"/>
+            <a:off x="5046796" y="1577340"/>
             <a:ext cx="4050079" cy="457200"/>
           </a:xfrm>
           <a:prstGeom prst="rect">
@@ -4376,7 +4376,7 @@
         </p:nvSpPr>
         <p:spPr>
           <a:xfrm>
-            <a:off x="3320460" y="2080260"/>
+            <a:off x="3320937" y="2080260"/>
             <a:ext cx="2167912" cy="457200"/>
           </a:xfrm>
           <a:prstGeom prst="rect">
@@ -4405,7 +4405,7 @@
       </p:sp>
       <p:pic>
         <p:nvPicPr>
-          <p:cNvPr id="9" name="Picture 8" descr="9090d8e8f0989a75.png"/>
+          <p:cNvPr id="9" name="Picture 8" descr="47c497fa41547b11.png"/>
           <p:cNvPicPr>
             <a:picLocks noChangeAspect="1"/>
           </p:cNvPicPr>
@@ -4419,8 +4419,8 @@
         </p:blipFill>
         <p:spPr>
           <a:xfrm>
-            <a:off x="5351213" y="2194560"/>
-            <a:ext cx="3346704" cy="234696"/>
+            <a:off x="5351690" y="2192845"/>
+            <a:ext cx="3345751" cy="235267"/>
           </a:xfrm>
           <a:prstGeom prst="rect">
             <a:avLst/>
@@ -4435,7 +4435,7 @@
         </p:nvSpPr>
         <p:spPr>
           <a:xfrm>
-            <a:off x="8697917" y="2080260"/>
+            <a:off x="8697441" y="2080260"/>
             <a:ext cx="280301" cy="457200"/>
           </a:xfrm>
           <a:prstGeom prst="rect">
@@ -5044,7 +5044,7 @@
         </p:nvSpPr>
         <p:spPr>
           <a:xfrm>
-            <a:off x="1992908" y="1577340"/>
+            <a:off x="1993098" y="1577340"/>
             <a:ext cx="2167912" cy="457200"/>
           </a:xfrm>
           <a:prstGeom prst="rect">
@@ -5073,7 +5073,7 @@
       </p:sp>
       <p:pic>
         <p:nvPicPr>
-          <p:cNvPr id="9" name="Picture 8" descr="d0d46e5b72ac2d61.png"/>
+          <p:cNvPr id="9" name="Picture 8" descr="cdcc197a46a9dbc3.png"/>
           <p:cNvPicPr>
             <a:picLocks noChangeAspect="1"/>
           </p:cNvPicPr>
@@ -5087,8 +5087,8 @@
         </p:blipFill>
         <p:spPr>
           <a:xfrm>
-            <a:off x="4023660" y="1682496"/>
-            <a:ext cx="5047488" cy="243840"/>
+            <a:off x="4023851" y="1680019"/>
+            <a:ext cx="5047107" cy="245173"/>
           </a:xfrm>
           <a:prstGeom prst="rect">
             <a:avLst/>
@@ -5103,7 +5103,7 @@
         </p:nvSpPr>
         <p:spPr>
           <a:xfrm>
-            <a:off x="9071148" y="1577340"/>
+            <a:off x="9070958" y="1577340"/>
             <a:ext cx="1234622" cy="457200"/>
           </a:xfrm>
           <a:prstGeom prst="rect">
@@ -5401,7 +5401,7 @@
         </p:nvSpPr>
         <p:spPr>
           <a:xfrm>
-            <a:off x="1992908" y="1577340"/>
+            <a:off x="1993098" y="1577340"/>
             <a:ext cx="2167912" cy="457200"/>
           </a:xfrm>
           <a:prstGeom prst="rect">
@@ -5430,7 +5430,7 @@
       </p:sp>
       <p:pic>
         <p:nvPicPr>
-          <p:cNvPr id="9" name="Picture 8" descr="1cbb51ff54ffc007.png"/>
+          <p:cNvPr id="9" name="Picture 8" descr="5497a985b9854dbc.png"/>
           <p:cNvPicPr>
             <a:picLocks noChangeAspect="1"/>
           </p:cNvPicPr>
@@ -5444,8 +5444,8 @@
         </p:blipFill>
         <p:spPr>
           <a:xfrm>
-            <a:off x="4023660" y="1682496"/>
-            <a:ext cx="5047488" cy="243840"/>
+            <a:off x="4023851" y="1680019"/>
+            <a:ext cx="5047107" cy="245173"/>
           </a:xfrm>
           <a:prstGeom prst="rect">
             <a:avLst/>
@@ -5460,7 +5460,7 @@
         </p:nvSpPr>
         <p:spPr>
           <a:xfrm>
-            <a:off x="9071148" y="1577340"/>
+            <a:off x="9070958" y="1577340"/>
             <a:ext cx="1234622" cy="457200"/>
           </a:xfrm>
           <a:prstGeom prst="rect">
@@ -5835,7 +5835,7 @@
       </p:sp>
       <p:pic>
         <p:nvPicPr>
-          <p:cNvPr id="8" name="Picture 7" descr="88d2b26b87c7a8c9.png"/>
+          <p:cNvPr id="8" name="Picture 7" descr="23c46f257f02bce0.png"/>
           <p:cNvPicPr>
             <a:picLocks noChangeAspect="1"/>
           </p:cNvPicPr>
@@ -5849,8 +5849,8 @@
         </p:blipFill>
         <p:spPr>
           <a:xfrm>
-            <a:off x="1234440" y="1956815"/>
-            <a:ext cx="1847088" cy="243840"/>
+            <a:off x="1234440" y="1954339"/>
+            <a:ext cx="1844992" cy="245173"/>
           </a:xfrm>
           <a:prstGeom prst="rect">
             <a:avLst/>
@@ -5865,7 +5865,7 @@
         </p:nvSpPr>
         <p:spPr>
           <a:xfrm>
-            <a:off x="3081528" y="1851660"/>
+            <a:off x="3079432" y="1851660"/>
             <a:ext cx="3267008" cy="457200"/>
           </a:xfrm>
           <a:prstGeom prst="rect">
@@ -6192,7 +6192,7 @@
       </p:sp>
       <p:pic>
         <p:nvPicPr>
-          <p:cNvPr id="8" name="Picture 7" descr="e3914b43cbb52236.png"/>
+          <p:cNvPr id="8" name="Picture 7" descr="93fcb734e6361b20.png"/>
           <p:cNvPicPr>
             <a:picLocks noChangeAspect="1"/>
           </p:cNvPicPr>
@@ -6206,8 +6206,8 @@
         </p:blipFill>
         <p:spPr>
           <a:xfrm>
-            <a:off x="1234440" y="1956815"/>
-            <a:ext cx="1844040" cy="243840"/>
+            <a:off x="1234440" y="1954339"/>
+            <a:ext cx="1844992" cy="245173"/>
           </a:xfrm>
           <a:prstGeom prst="rect">
             <a:avLst/>
@@ -6222,7 +6222,7 @@
         </p:nvSpPr>
         <p:spPr>
           <a:xfrm>
-            <a:off x="3078480" y="1851660"/>
+            <a:off x="3079432" y="1851660"/>
             <a:ext cx="3267008" cy="457200"/>
           </a:xfrm>
           <a:prstGeom prst="rect">
@@ -6573,7 +6573,7 @@
       </p:sp>
       <p:pic>
         <p:nvPicPr>
-          <p:cNvPr id="8" name="Picture 7" descr="8f784bf30c7681cf.png"/>
+          <p:cNvPr id="8" name="Picture 7" descr="519897831d37690e.png"/>
           <p:cNvPicPr>
             <a:picLocks noChangeAspect="1"/>
           </p:cNvPicPr>
@@ -6587,8 +6587,8 @@
         </p:blipFill>
         <p:spPr>
           <a:xfrm>
-            <a:off x="1234440" y="1956815"/>
-            <a:ext cx="1831848" cy="243840"/>
+            <a:off x="1234440" y="1954339"/>
+            <a:ext cx="1827657" cy="245173"/>
           </a:xfrm>
           <a:prstGeom prst="rect">
             <a:avLst/>
@@ -6603,7 +6603,7 @@
         </p:nvSpPr>
         <p:spPr>
           <a:xfrm>
-            <a:off x="3066288" y="1851660"/>
+            <a:off x="3062097" y="1851660"/>
             <a:ext cx="3686644" cy="457200"/>
           </a:xfrm>
           <a:prstGeom prst="rect">
@@ -6930,7 +6930,7 @@
       </p:sp>
       <p:pic>
         <p:nvPicPr>
-          <p:cNvPr id="8" name="Picture 7" descr="6c8af11a6118811c.png"/>
+          <p:cNvPr id="8" name="Picture 7" descr="519897831d37690e.png"/>
           <p:cNvPicPr>
             <a:picLocks noChangeAspect="1"/>
           </p:cNvPicPr>
@@ -6944,8 +6944,8 @@
         </p:blipFill>
         <p:spPr>
           <a:xfrm>
-            <a:off x="1234440" y="1956815"/>
-            <a:ext cx="1831848" cy="243840"/>
+            <a:off x="1234440" y="1954339"/>
+            <a:ext cx="1827657" cy="245173"/>
           </a:xfrm>
           <a:prstGeom prst="rect">
             <a:avLst/>
@@ -6960,7 +6960,7 @@
         </p:nvSpPr>
         <p:spPr>
           <a:xfrm>
-            <a:off x="3066288" y="1851660"/>
+            <a:off x="3062097" y="1851660"/>
             <a:ext cx="3686644" cy="457200"/>
           </a:xfrm>
           <a:prstGeom prst="rect">
@@ -7317,7 +7317,7 @@
         </p:nvSpPr>
         <p:spPr>
           <a:xfrm>
-            <a:off x="1874519" y="1504188"/>
+            <a:off x="1874519" y="1493131"/>
             <a:ext cx="1071364" cy="457200"/>
           </a:xfrm>
           <a:prstGeom prst="rect">
@@ -7346,7 +7346,7 @@
       </p:sp>
       <p:pic>
         <p:nvPicPr>
-          <p:cNvPr id="9" name="Picture 8" descr="9ca189c78b28bad0.png"/>
+          <p:cNvPr id="9" name="Picture 8" descr="992378efc32c8a4e.png"/>
           <p:cNvPicPr>
             <a:picLocks noChangeAspect="1"/>
           </p:cNvPicPr>
@@ -7360,8 +7360,8 @@
         </p:blipFill>
         <p:spPr>
           <a:xfrm>
-            <a:off x="2808724" y="1463040"/>
-            <a:ext cx="1185672" cy="539496"/>
+            <a:off x="2808724" y="1463039"/>
+            <a:ext cx="1134443" cy="517382"/>
           </a:xfrm>
           <a:prstGeom prst="rect">
             <a:avLst/>
@@ -7376,7 +7376,7 @@
         </p:nvSpPr>
         <p:spPr>
           <a:xfrm>
-            <a:off x="3994396" y="1504188"/>
+            <a:off x="3943168" y="1493131"/>
             <a:ext cx="5461953" cy="457200"/>
           </a:xfrm>
           <a:prstGeom prst="rect">
@@ -7411,7 +7411,7 @@
         </p:nvSpPr>
         <p:spPr>
           <a:xfrm>
-            <a:off x="1874519" y="2180844"/>
+            <a:off x="1874519" y="2158730"/>
             <a:ext cx="9336740" cy="457200"/>
           </a:xfrm>
           <a:prstGeom prst="rect">
@@ -7446,7 +7446,7 @@
         </p:nvSpPr>
         <p:spPr>
           <a:xfrm>
-            <a:off x="1874519" y="2793492"/>
+            <a:off x="1874519" y="2771378"/>
             <a:ext cx="3356481" cy="457200"/>
           </a:xfrm>
           <a:prstGeom prst="rect">
@@ -7475,7 +7475,7 @@
       </p:sp>
       <p:pic>
         <p:nvPicPr>
-          <p:cNvPr id="13" name="Picture 12" descr="cfca3ed0d980782e.png"/>
+          <p:cNvPr id="13" name="Picture 12" descr="39e03d93cf550831.png"/>
           <p:cNvPicPr>
             <a:picLocks noChangeAspect="1"/>
           </p:cNvPicPr>
@@ -7489,8 +7489,8 @@
         </p:blipFill>
         <p:spPr>
           <a:xfrm>
-            <a:off x="5093841" y="2912173"/>
-            <a:ext cx="1161288" cy="225552"/>
+            <a:off x="5093841" y="2895917"/>
+            <a:ext cx="1115456" cy="218344"/>
           </a:xfrm>
           <a:prstGeom prst="rect">
             <a:avLst/>
@@ -7505,7 +7505,7 @@
         </p:nvSpPr>
         <p:spPr>
           <a:xfrm>
-            <a:off x="1874519" y="3406140"/>
+            <a:off x="1874519" y="3384026"/>
             <a:ext cx="706881" cy="457200"/>
           </a:xfrm>
           <a:prstGeom prst="rect">
@@ -7534,7 +7534,7 @@
       </p:sp>
       <p:pic>
         <p:nvPicPr>
-          <p:cNvPr id="15" name="Picture 14" descr="16140fa0016efc2b.png"/>
+          <p:cNvPr id="15" name="Picture 14" descr="f2cd49c9de613dcc.png"/>
           <p:cNvPicPr>
             <a:picLocks noChangeAspect="1"/>
           </p:cNvPicPr>
@@ -7548,8 +7548,8 @@
         </p:blipFill>
         <p:spPr>
           <a:xfrm>
-            <a:off x="2444241" y="3503485"/>
-            <a:ext cx="1362456" cy="240791"/>
+            <a:off x="2444241" y="3487205"/>
+            <a:ext cx="1300575" cy="234957"/>
           </a:xfrm>
           <a:prstGeom prst="rect">
             <a:avLst/>
@@ -7564,7 +7564,7 @@
         </p:nvSpPr>
         <p:spPr>
           <a:xfrm>
-            <a:off x="3806697" y="3406140"/>
+            <a:off x="3744816" y="3384026"/>
             <a:ext cx="3738599" cy="457200"/>
           </a:xfrm>
           <a:prstGeom prst="rect">
@@ -7821,7 +7821,7 @@
       </p:sp>
       <p:pic>
         <p:nvPicPr>
-          <p:cNvPr id="8" name="Picture 7" descr="673c0080fbe2317f.png"/>
+          <p:cNvPr id="8" name="Picture 7" descr="17a8a85b0b9a11ab.png"/>
           <p:cNvPicPr>
             <a:picLocks noChangeAspect="1"/>
           </p:cNvPicPr>
@@ -7835,8 +7835,8 @@
         </p:blipFill>
         <p:spPr>
           <a:xfrm>
-            <a:off x="1234440" y="1956815"/>
-            <a:ext cx="1901952" cy="243840"/>
+            <a:off x="1234440" y="1954339"/>
+            <a:ext cx="1901952" cy="245173"/>
           </a:xfrm>
           <a:prstGeom prst="rect">
             <a:avLst/>
@@ -8178,7 +8178,7 @@
       </p:sp>
       <p:pic>
         <p:nvPicPr>
-          <p:cNvPr id="8" name="Picture 7" descr="e62e96f3d6ecb8f1.png"/>
+          <p:cNvPr id="8" name="Picture 7" descr="9b3ee9e039b8f1d9.png"/>
           <p:cNvPicPr>
             <a:picLocks noChangeAspect="1"/>
           </p:cNvPicPr>
@@ -8192,8 +8192,8 @@
         </p:blipFill>
         <p:spPr>
           <a:xfrm>
-            <a:off x="1234440" y="1956815"/>
-            <a:ext cx="1901952" cy="243840"/>
+            <a:off x="1234440" y="1954339"/>
+            <a:ext cx="1901952" cy="245173"/>
           </a:xfrm>
           <a:prstGeom prst="rect">
             <a:avLst/>
@@ -8559,7 +8559,7 @@
       </p:sp>
       <p:pic>
         <p:nvPicPr>
-          <p:cNvPr id="8" name="Picture 7" descr="d2f86d8905c9108c.png"/>
+          <p:cNvPr id="8" name="Picture 7" descr="bf2c9433a2aba0bf.png"/>
           <p:cNvPicPr>
             <a:picLocks noChangeAspect="1"/>
           </p:cNvPicPr>
@@ -8573,8 +8573,8 @@
         </p:blipFill>
         <p:spPr>
           <a:xfrm>
-            <a:off x="1234440" y="1956815"/>
-            <a:ext cx="1950720" cy="243840"/>
+            <a:off x="1234440" y="1954339"/>
+            <a:ext cx="1949005" cy="245173"/>
           </a:xfrm>
           <a:prstGeom prst="rect">
             <a:avLst/>
@@ -8589,7 +8589,7 @@
         </p:nvSpPr>
         <p:spPr>
           <a:xfrm>
-            <a:off x="3185160" y="1851660"/>
+            <a:off x="3183445" y="1851660"/>
             <a:ext cx="3180484" cy="457200"/>
           </a:xfrm>
           <a:prstGeom prst="rect">
@@ -9152,7 +9152,7 @@
       </p:sp>
       <p:pic>
         <p:nvPicPr>
-          <p:cNvPr id="8" name="Picture 7" descr="6e18d58589ed85bc.png"/>
+          <p:cNvPr id="8" name="Picture 7" descr="d6a54cea2649eb48.png"/>
           <p:cNvPicPr>
             <a:picLocks noChangeAspect="1"/>
           </p:cNvPicPr>
@@ -9166,8 +9166,8 @@
         </p:blipFill>
         <p:spPr>
           <a:xfrm>
-            <a:off x="1234440" y="1956815"/>
-            <a:ext cx="1950720" cy="243840"/>
+            <a:off x="1234440" y="1954339"/>
+            <a:ext cx="1949005" cy="245173"/>
           </a:xfrm>
           <a:prstGeom prst="rect">
             <a:avLst/>
@@ -9182,7 +9182,7 @@
         </p:nvSpPr>
         <p:spPr>
           <a:xfrm>
-            <a:off x="3185160" y="1851660"/>
+            <a:off x="3183445" y="1851660"/>
             <a:ext cx="3180484" cy="457200"/>
           </a:xfrm>
           <a:prstGeom prst="rect">
@@ -9533,7 +9533,7 @@
       </p:sp>
       <p:pic>
         <p:nvPicPr>
-          <p:cNvPr id="8" name="Picture 7" descr="a7e24ba549ecbc3a.png"/>
+          <p:cNvPr id="8" name="Picture 7" descr="419008846420ef41.png"/>
           <p:cNvPicPr>
             <a:picLocks noChangeAspect="1"/>
           </p:cNvPicPr>
@@ -9547,8 +9547,8 @@
         </p:blipFill>
         <p:spPr>
           <a:xfrm>
-            <a:off x="1234440" y="1953768"/>
-            <a:ext cx="1347216" cy="240791"/>
+            <a:off x="1234440" y="1949386"/>
+            <a:ext cx="1342262" cy="245173"/>
           </a:xfrm>
           <a:prstGeom prst="rect">
             <a:avLst/>
@@ -9563,7 +9563,7 @@
         </p:nvSpPr>
         <p:spPr>
           <a:xfrm>
-            <a:off x="2581656" y="1851660"/>
+            <a:off x="2576703" y="1851660"/>
             <a:ext cx="953666" cy="457200"/>
           </a:xfrm>
           <a:prstGeom prst="rect">
@@ -9592,7 +9592,7 @@
       </p:sp>
       <p:pic>
         <p:nvPicPr>
-          <p:cNvPr id="10" name="Picture 9" descr="88d2b26b87c7a8c9.png"/>
+          <p:cNvPr id="10" name="Picture 9" descr="23c46f257f02bce0.png"/>
           <p:cNvPicPr>
             <a:picLocks noChangeAspect="1"/>
           </p:cNvPicPr>
@@ -9606,8 +9606,8 @@
         </p:blipFill>
         <p:spPr>
           <a:xfrm>
-            <a:off x="3398162" y="1956815"/>
-            <a:ext cx="1847088" cy="243840"/>
+            <a:off x="3393209" y="1954339"/>
+            <a:ext cx="1844992" cy="245173"/>
           </a:xfrm>
           <a:prstGeom prst="rect">
             <a:avLst/>
@@ -9622,7 +9622,7 @@
         </p:nvSpPr>
         <p:spPr>
           <a:xfrm>
-            <a:off x="5245250" y="1851660"/>
+            <a:off x="5238202" y="1851660"/>
             <a:ext cx="280301" cy="457200"/>
           </a:xfrm>
           <a:prstGeom prst="rect">
@@ -9984,7 +9984,7 @@
       </p:sp>
       <p:pic>
         <p:nvPicPr>
-          <p:cNvPr id="8" name="Picture 7" descr="f2542c0ca55f8587.png"/>
+          <p:cNvPr id="8" name="Picture 7" descr="419008846420ef41.png"/>
           <p:cNvPicPr>
             <a:picLocks noChangeAspect="1"/>
           </p:cNvPicPr>
@@ -9998,8 +9998,8 @@
         </p:blipFill>
         <p:spPr>
           <a:xfrm>
-            <a:off x="1234440" y="1953768"/>
-            <a:ext cx="1347216" cy="240791"/>
+            <a:off x="1234440" y="1949386"/>
+            <a:ext cx="1342262" cy="245173"/>
           </a:xfrm>
           <a:prstGeom prst="rect">
             <a:avLst/>
@@ -10014,7 +10014,7 @@
         </p:nvSpPr>
         <p:spPr>
           <a:xfrm>
-            <a:off x="2581656" y="1851660"/>
+            <a:off x="2576703" y="1851660"/>
             <a:ext cx="953666" cy="457200"/>
           </a:xfrm>
           <a:prstGeom prst="rect">
@@ -10043,7 +10043,7 @@
       </p:sp>
       <p:pic>
         <p:nvPicPr>
-          <p:cNvPr id="10" name="Picture 9" descr="e3914b43cbb52236.png"/>
+          <p:cNvPr id="10" name="Picture 9" descr="93fcb734e6361b20.png"/>
           <p:cNvPicPr>
             <a:picLocks noChangeAspect="1"/>
           </p:cNvPicPr>
@@ -10057,8 +10057,8 @@
         </p:blipFill>
         <p:spPr>
           <a:xfrm>
-            <a:off x="3398162" y="1956815"/>
-            <a:ext cx="1844040" cy="243840"/>
+            <a:off x="3393209" y="1954339"/>
+            <a:ext cx="1844992" cy="245173"/>
           </a:xfrm>
           <a:prstGeom prst="rect">
             <a:avLst/>
@@ -10073,7 +10073,7 @@
         </p:nvSpPr>
         <p:spPr>
           <a:xfrm>
-            <a:off x="5242202" y="1851660"/>
+            <a:off x="5238202" y="1851660"/>
             <a:ext cx="280301" cy="457200"/>
           </a:xfrm>
           <a:prstGeom prst="rect">
@@ -11597,7 +11597,7 @@
       </p:sp>
       <p:pic>
         <p:nvPicPr>
-          <p:cNvPr id="9" name="Picture 8" descr="6f3040f3d83f449a.png"/>
+          <p:cNvPr id="9" name="Picture 8" descr="14cf36aaa7163402.png"/>
           <p:cNvPicPr>
             <a:picLocks noChangeAspect="1"/>
           </p:cNvPicPr>
@@ -11611,8 +11611,8 @@
         </p:blipFill>
         <p:spPr>
           <a:xfrm>
-            <a:off x="3561985" y="1950720"/>
-            <a:ext cx="1898904" cy="274320"/>
+            <a:off x="3561985" y="1949386"/>
+            <a:ext cx="1896999" cy="274891"/>
           </a:xfrm>
           <a:prstGeom prst="rect">
             <a:avLst/>
@@ -11627,7 +11627,7 @@
         </p:nvSpPr>
         <p:spPr>
           <a:xfrm>
-            <a:off x="5460889" y="1851660"/>
+            <a:off x="5458984" y="1851660"/>
             <a:ext cx="290742" cy="457200"/>
           </a:xfrm>
           <a:prstGeom prst="rect">
@@ -12083,7 +12083,7 @@
       </p:sp>
       <p:pic>
         <p:nvPicPr>
-          <p:cNvPr id="9" name="Picture 8" descr="62d87b2c8cfaf8d7.png"/>
+          <p:cNvPr id="9" name="Picture 8" descr="fa316f6c8e8ec322.png"/>
           <p:cNvPicPr>
             <a:picLocks noChangeAspect="1"/>
           </p:cNvPicPr>
@@ -12097,8 +12097,8 @@
         </p:blipFill>
         <p:spPr>
           <a:xfrm>
-            <a:off x="3561985" y="1950720"/>
-            <a:ext cx="1898904" cy="274320"/>
+            <a:off x="3561985" y="1949386"/>
+            <a:ext cx="1899475" cy="274891"/>
           </a:xfrm>
           <a:prstGeom prst="rect">
             <a:avLst/>
@@ -12113,7 +12113,7 @@
         </p:nvSpPr>
         <p:spPr>
           <a:xfrm>
-            <a:off x="5460889" y="1851660"/>
+            <a:off x="5461460" y="1851660"/>
             <a:ext cx="290742" cy="457200"/>
           </a:xfrm>
           <a:prstGeom prst="rect">
@@ -12564,7 +12564,7 @@
         </p:nvSpPr>
         <p:spPr>
           <a:xfrm>
-            <a:off x="1874519" y="1504188"/>
+            <a:off x="1874519" y="1493131"/>
             <a:ext cx="1071364" cy="457200"/>
           </a:xfrm>
           <a:prstGeom prst="rect">
@@ -12593,7 +12593,7 @@
       </p:sp>
       <p:pic>
         <p:nvPicPr>
-          <p:cNvPr id="9" name="Picture 8" descr="9ca189c78b28bad0.png"/>
+          <p:cNvPr id="9" name="Picture 8" descr="992378efc32c8a4e.png"/>
           <p:cNvPicPr>
             <a:picLocks noChangeAspect="1"/>
           </p:cNvPicPr>
@@ -12607,8 +12607,8 @@
         </p:blipFill>
         <p:spPr>
           <a:xfrm>
-            <a:off x="2808724" y="1463040"/>
-            <a:ext cx="1185672" cy="539496"/>
+            <a:off x="2808724" y="1463039"/>
+            <a:ext cx="1134443" cy="517382"/>
           </a:xfrm>
           <a:prstGeom prst="rect">
             <a:avLst/>
@@ -12623,7 +12623,7 @@
         </p:nvSpPr>
         <p:spPr>
           <a:xfrm>
-            <a:off x="3994396" y="1504188"/>
+            <a:off x="3943168" y="1493131"/>
             <a:ext cx="5461953" cy="457200"/>
           </a:xfrm>
           <a:prstGeom prst="rect">
@@ -12658,7 +12658,7 @@
         </p:nvSpPr>
         <p:spPr>
           <a:xfrm>
-            <a:off x="9867830" y="1440180"/>
+            <a:off x="9816601" y="1440180"/>
             <a:ext cx="997129" cy="457200"/>
           </a:xfrm>
           <a:prstGeom prst="rect">
@@ -12693,7 +12693,7 @@
         </p:nvSpPr>
         <p:spPr>
           <a:xfrm>
-            <a:off x="1874519" y="2180844"/>
+            <a:off x="1874519" y="2158730"/>
             <a:ext cx="9336740" cy="457200"/>
           </a:xfrm>
           <a:prstGeom prst="rect">
@@ -12728,7 +12728,7 @@
         </p:nvSpPr>
         <p:spPr>
           <a:xfrm>
-            <a:off x="2606040" y="2638044"/>
+            <a:off x="2606040" y="2615930"/>
             <a:ext cx="1009168" cy="457200"/>
           </a:xfrm>
           <a:prstGeom prst="rect">
@@ -12763,7 +12763,7 @@
         </p:nvSpPr>
         <p:spPr>
           <a:xfrm>
-            <a:off x="1874519" y="3250692"/>
+            <a:off x="1874519" y="3228578"/>
             <a:ext cx="3356481" cy="457200"/>
           </a:xfrm>
           <a:prstGeom prst="rect">
@@ -12792,7 +12792,7 @@
       </p:sp>
       <p:pic>
         <p:nvPicPr>
-          <p:cNvPr id="15" name="Picture 14" descr="cfca3ed0d980782e.png"/>
+          <p:cNvPr id="15" name="Picture 14" descr="39e03d93cf550831.png"/>
           <p:cNvPicPr>
             <a:picLocks noChangeAspect="1"/>
           </p:cNvPicPr>
@@ -12806,8 +12806,8 @@
         </p:blipFill>
         <p:spPr>
           <a:xfrm>
-            <a:off x="5093841" y="3369373"/>
-            <a:ext cx="1161288" cy="225552"/>
+            <a:off x="5093841" y="3353117"/>
+            <a:ext cx="1115456" cy="218344"/>
           </a:xfrm>
           <a:prstGeom prst="rect">
             <a:avLst/>
@@ -12822,7 +12822,7 @@
         </p:nvSpPr>
         <p:spPr>
           <a:xfrm>
-            <a:off x="6803769" y="3250692"/>
+            <a:off x="6757938" y="3228578"/>
             <a:ext cx="385609" cy="457200"/>
           </a:xfrm>
           <a:prstGeom prst="rect">
@@ -12857,7 +12857,7 @@
         </p:nvSpPr>
         <p:spPr>
           <a:xfrm>
-            <a:off x="1874519" y="3863339"/>
+            <a:off x="1874519" y="3841226"/>
             <a:ext cx="706881" cy="457200"/>
           </a:xfrm>
           <a:prstGeom prst="rect">
@@ -12886,7 +12886,7 @@
       </p:sp>
       <p:pic>
         <p:nvPicPr>
-          <p:cNvPr id="18" name="Picture 17" descr="16140fa0016efc2b.png"/>
+          <p:cNvPr id="18" name="Picture 17" descr="f2cd49c9de613dcc.png"/>
           <p:cNvPicPr>
             <a:picLocks noChangeAspect="1"/>
           </p:cNvPicPr>
@@ -12900,8 +12900,8 @@
         </p:blipFill>
         <p:spPr>
           <a:xfrm>
-            <a:off x="2444241" y="3960685"/>
-            <a:ext cx="1362456" cy="240791"/>
+            <a:off x="2444241" y="3944405"/>
+            <a:ext cx="1300575" cy="234957"/>
           </a:xfrm>
           <a:prstGeom prst="rect">
             <a:avLst/>
@@ -12916,7 +12916,7 @@
         </p:nvSpPr>
         <p:spPr>
           <a:xfrm>
-            <a:off x="3806697" y="3863339"/>
+            <a:off x="3744816" y="3841226"/>
             <a:ext cx="3738599" cy="457200"/>
           </a:xfrm>
           <a:prstGeom prst="rect">
@@ -12951,7 +12951,7 @@
         </p:nvSpPr>
         <p:spPr>
           <a:xfrm>
-            <a:off x="7956776" y="3863339"/>
+            <a:off x="7894895" y="3841226"/>
             <a:ext cx="950069" cy="457200"/>
           </a:xfrm>
           <a:prstGeom prst="rect">
@@ -14169,7 +14169,7 @@
       </p:sp>
       <p:pic>
         <p:nvPicPr>
-          <p:cNvPr id="13" name="Picture 12" descr="ea1f35b738fd545f.png"/>
+          <p:cNvPr id="13" name="Picture 12" descr="fd521c93e65714f9.png"/>
           <p:cNvPicPr>
             <a:picLocks noChangeAspect="1"/>
           </p:cNvPicPr>
@@ -14183,8 +14183,8 @@
         </p:blipFill>
         <p:spPr>
           <a:xfrm>
-            <a:off x="5593572" y="3182112"/>
-            <a:ext cx="2417064" cy="243840"/>
+            <a:off x="5593572" y="3179635"/>
+            <a:ext cx="2414587" cy="245173"/>
           </a:xfrm>
           <a:prstGeom prst="rect">
             <a:avLst/>
@@ -14199,7 +14199,7 @@
         </p:nvSpPr>
         <p:spPr>
           <a:xfrm>
-            <a:off x="8010636" y="3076956"/>
+            <a:off x="8008159" y="3076956"/>
             <a:ext cx="280301" cy="457200"/>
           </a:xfrm>
           <a:prstGeom prst="rect">
@@ -14679,7 +14679,7 @@
       </p:sp>
       <p:pic>
         <p:nvPicPr>
-          <p:cNvPr id="13" name="Picture 12" descr="055a3bc030cecbfd.png"/>
+          <p:cNvPr id="13" name="Picture 12" descr="4ece4610ab63a2b5.png"/>
           <p:cNvPicPr>
             <a:picLocks noChangeAspect="1"/>
           </p:cNvPicPr>
@@ -14693,8 +14693,8 @@
         </p:blipFill>
         <p:spPr>
           <a:xfrm>
-            <a:off x="5593572" y="3182112"/>
-            <a:ext cx="2417064" cy="243840"/>
+            <a:off x="5593572" y="3179635"/>
+            <a:ext cx="2417064" cy="245173"/>
           </a:xfrm>
           <a:prstGeom prst="rect">
             <a:avLst/>
@@ -16877,8 +16877,8 @@
         </p:blipFill>
         <p:spPr>
           <a:xfrm>
-            <a:off x="5434990" y="3840248"/>
-            <a:ext cx="2270760" cy="301752"/>
+            <a:off x="5434990" y="3935720"/>
+            <a:ext cx="1537493" cy="204311"/>
           </a:xfrm>
           <a:prstGeom prst="rect">
             <a:avLst/>
@@ -16893,8 +16893,8 @@
         </p:nvSpPr>
         <p:spPr>
           <a:xfrm>
-            <a:off x="7705750" y="3812054"/>
-            <a:ext cx="278602" cy="457200"/>
+            <a:off x="6972484" y="3812054"/>
+            <a:ext cx="4530562" cy="457200"/>
           </a:xfrm>
           <a:prstGeom prst="rect">
             <a:avLst/>
@@ -16915,7 +16915,7 @@
                 </a:solidFill>
                 <a:latin typeface="Lexend"/>
               </a:rPr>
-              <a:t>,</a:t>
+              <a:t>, written as a fraction that equals 1</a:t>
             </a:r>
           </a:p>
         </p:txBody>
@@ -16928,29 +16928,29 @@
         </p:nvSpPr>
         <p:spPr>
           <a:xfrm>
-            <a:off x="1143000" y="4296686"/>
-            <a:ext cx="4390633" cy="457200"/>
-          </a:xfrm>
-          <a:prstGeom prst="rect">
-            <a:avLst/>
-          </a:prstGeom>
-          <a:noFill/>
-        </p:spPr>
-        <p:txBody>
-          <a:bodyPr wrap="none" lIns="45720" rIns="45720" tIns="18288" bIns="18288" anchor="ctr">
-            <a:noAutofit/>
-          </a:bodyPr>
-          <a:lstStyle/>
-          <a:p>
-            <a:pPr algn="l"/>
-            <a:r>
-              <a:rPr sz="1900" b="0" i="0">
-                <a:solidFill>
-                  <a:srgbClr val="1A1A1A"/>
-                </a:solidFill>
-                <a:latin typeface="Lexend"/>
-              </a:rPr>
-              <a:t>written as a fraction that equals 1</a:t>
+            <a:off x="777240" y="4447562"/>
+            <a:ext cx="10607040" cy="393589"/>
+          </a:xfrm>
+          <a:prstGeom prst="rect">
+            <a:avLst/>
+          </a:prstGeom>
+          <a:noFill/>
+        </p:spPr>
+        <p:txBody>
+          <a:bodyPr wrap="square" lIns="45720" rIns="45720" tIns="18288" bIns="18288" anchor="t">
+            <a:spAutoFit/>
+          </a:bodyPr>
+          <a:lstStyle/>
+          <a:p>
+            <a:pPr algn="l"/>
+            <a:r>
+              <a:rPr sz="2090" b="1" i="0">
+                <a:solidFill>
+                  <a:srgbClr val="0B5394"/>
+                </a:solidFill>
+                <a:latin typeface="Lexend"/>
+              </a:rPr>
+              <a:t>exchange rate</a:t>
             </a:r>
           </a:p>
         </p:txBody>
@@ -16963,42 +16963,7 @@
         </p:nvSpPr>
         <p:spPr>
           <a:xfrm>
-            <a:off x="777240" y="4932194"/>
-            <a:ext cx="10607040" cy="393589"/>
-          </a:xfrm>
-          <a:prstGeom prst="rect">
-            <a:avLst/>
-          </a:prstGeom>
-          <a:noFill/>
-        </p:spPr>
-        <p:txBody>
-          <a:bodyPr wrap="square" lIns="45720" rIns="45720" tIns="18288" bIns="18288" anchor="t">
-            <a:spAutoFit/>
-          </a:bodyPr>
-          <a:lstStyle/>
-          <a:p>
-            <a:pPr algn="l"/>
-            <a:r>
-              <a:rPr sz="2090" b="1" i="0">
-                <a:solidFill>
-                  <a:srgbClr val="0B5394"/>
-                </a:solidFill>
-                <a:latin typeface="Lexend"/>
-              </a:rPr>
-              <a:t>exchange rate</a:t>
-            </a:r>
-          </a:p>
-        </p:txBody>
-      </p:sp>
-      <p:sp>
-        <p:nvSpPr>
-          <p:cNvPr id="18" name="TextBox 17"/>
-          <p:cNvSpPr txBox="1"/>
-          <p:nvPr/>
-        </p:nvSpPr>
-        <p:spPr>
-          <a:xfrm>
-            <a:off x="1143000" y="5325783"/>
+            <a:off x="1143000" y="4841151"/>
             <a:ext cx="10241280" cy="715617"/>
           </a:xfrm>
           <a:prstGeom prst="rect">
@@ -18280,7 +18245,7 @@
       </p:sp>
       <p:pic>
         <p:nvPicPr>
-          <p:cNvPr id="8" name="Picture 7" descr="88d2b26b87c7a8c9.png"/>
+          <p:cNvPr id="8" name="Picture 7" descr="23c46f257f02bce0.png"/>
           <p:cNvPicPr>
             <a:picLocks noChangeAspect="1"/>
           </p:cNvPicPr>
@@ -18294,8 +18259,8 @@
         </p:blipFill>
         <p:spPr>
           <a:xfrm>
-            <a:off x="2826206" y="2185415"/>
-            <a:ext cx="1847088" cy="243840"/>
+            <a:off x="2827254" y="2182939"/>
+            <a:ext cx="1844992" cy="245173"/>
           </a:xfrm>
           <a:prstGeom prst="rect">
             <a:avLst/>
@@ -18310,7 +18275,7 @@
         </p:nvSpPr>
         <p:spPr>
           <a:xfrm>
-            <a:off x="4673294" y="2080260"/>
+            <a:off x="4672246" y="2080260"/>
             <a:ext cx="4799179" cy="457200"/>
           </a:xfrm>
           <a:prstGeom prst="rect">

--- a/a7/packages/A7 Unit 5 - Multi-Step Proportional Relationships/Lessons/5.06/A7 5.06 Converting Length Across Systems; Currency - Slides.pptx
+++ b/a7/packages/A7 Unit 5 - Multi-Step Proportional Relationships/Lessons/5.06/A7 5.06 Converting Length Across Systems; Currency - Slides.pptx
@@ -17304,7 +17304,7 @@
         </p:blipFill>
         <p:spPr>
           <a:xfrm>
-            <a:off x="3875532" y="1993392"/>
+            <a:off x="3875532" y="2194560"/>
             <a:ext cx="4410456" cy="697992"/>
           </a:xfrm>
           <a:prstGeom prst="rect">
@@ -17626,7 +17626,7 @@
         </p:blipFill>
         <p:spPr>
           <a:xfrm>
-            <a:off x="3998975" y="1993392"/>
+            <a:off x="3998975" y="2194560"/>
             <a:ext cx="4163568" cy="701040"/>
           </a:xfrm>
           <a:prstGeom prst="rect">
@@ -17642,7 +17642,7 @@
         </p:nvSpPr>
         <p:spPr>
           <a:xfrm>
-            <a:off x="987552" y="3032760"/>
+            <a:off x="987552" y="3435096"/>
             <a:ext cx="10131551" cy="475488"/>
           </a:xfrm>
           <a:prstGeom prst="rect">
@@ -17983,7 +17983,7 @@
         </p:blipFill>
         <p:spPr>
           <a:xfrm>
-            <a:off x="4291583" y="2039493"/>
+            <a:off x="4291583" y="2240661"/>
             <a:ext cx="3578352" cy="289560"/>
           </a:xfrm>
           <a:prstGeom prst="rect">
@@ -17993,7 +17993,7 @@
       </p:pic>
       <p:pic>
         <p:nvPicPr>
-          <p:cNvPr id="11" name="Picture 10" descr="ff2899a6a3a58ae8.png"/>
+          <p:cNvPr id="11" name="Picture 10" descr="1097f78d90eae82b.png"/>
           <p:cNvPicPr>
             <a:picLocks noChangeAspect="1"/>
           </p:cNvPicPr>
@@ -18007,8 +18007,8 @@
         </p:blipFill>
         <p:spPr>
           <a:xfrm>
-            <a:off x="2542032" y="2734437"/>
-            <a:ext cx="7077456" cy="280416"/>
+            <a:off x="2365248" y="3045333"/>
+            <a:ext cx="7431024" cy="280416"/>
           </a:xfrm>
           <a:prstGeom prst="rect">
             <a:avLst/>

--- a/a7/packages/A7 Unit 5 - Multi-Step Proportional Relationships/Lessons/5.06/A7 5.06 Converting Length Across Systems; Currency - Slides.pptx
+++ b/a7/packages/A7 Unit 5 - Multi-Step Proportional Relationships/Lessons/5.06/A7 5.06 Converting Length Across Systems; Currency - Slides.pptx
@@ -16278,7 +16278,7 @@
                 </a:solidFill>
                 <a:latin typeface="Lexend"/>
               </a:rPr>
-              <a:t>Every skill listed is required, to a SmartScore of 67. Due at the start of the next class.</a:t>
+              <a:t>Every skill listed is required, to a SmartScore of 67. Due by the Unit 5 test.</a:t>
             </a:r>
           </a:p>
         </p:txBody>
